--- a/endpraesentation/Elbharz_Endpraesentation.pptx
+++ b/endpraesentation/Elbharz_Endpraesentation.pptx
@@ -119,43 +119,43 @@
   <p:extLst>
     <p:ext uri="{521415D9-36F7-43E2-AB2F-B90AF26B5E84}">
       <p14:sectionLst xmlns:p14="http://schemas.microsoft.com/office/powerpoint/2010/main">
-        <p14:section name="Einleitung" id="{6532e4ca-1398-8bcb-d927-828750165321}">
+        <p14:section name="Einleitung" id="{c461b272-78a2-9290-9328-c097d0f9949d}">
           <p14:sldIdLst>
             <p14:sldId id="256"/>
             <p14:sldId id="257"/>
             <p14:sldId id="258"/>
           </p14:sldIdLst>
         </p14:section>
-        <p14:section name="Verlauf" id="{0148ba12-a1fb-6947-1c86-9ca0f44eabcd}">
+        <p14:section name="Verlauf" id="{dfe8e0c7-2735-f458-fc63-4f8506f222ce}">
           <p14:sldIdLst>
             <p14:sldId id="259"/>
             <p14:sldId id="260"/>
             <p14:sldId id="261"/>
           </p14:sldIdLst>
         </p14:section>
-        <p14:section name="Auswertung" id="{728cbe10-b762-e5b5-a2f4-6aeab58bf162}">
+        <p14:section name="Auswertung" id="{2d3e4570-774d-f8a8-f573-0fde43656102}">
           <p14:sldIdLst>
             <p14:sldId id="262"/>
             <p14:sldId id="263"/>
             <p14:sldId id="264"/>
           </p14:sldIdLst>
         </p14:section>
-        <p14:section name="Reflexion" id="{9e8f4fa5-b771-d146-a90e-e90426330df2}">
+        <p14:section name="Reflexion" id="{8eabee37-c5f7-4771-c4a7-ca540e84a84e}">
           <p14:sldIdLst>
             <p14:sldId id="265"/>
           </p14:sldIdLst>
         </p14:section>
-        <p14:section name="Gründung" id="{8e8c43d8-6ffc-348e-322c-4a21b484d532}">
+        <p14:section name="Gründung" id="{3cee98de-1084-9e2b-9777-869ce5d35641}">
           <p14:sldIdLst>
             <p14:sldId id="266"/>
           </p14:sldIdLst>
         </p14:section>
-        <p14:section name="Abschluss" id="{126408f8-4b93-861f-3c4e-056c0b984a1a}">
+        <p14:section name="Abschluss" id="{92573ac5-96cb-f0f9-4639-f41a9f8d6c22}">
           <p14:sldIdLst>
             <p14:sldId id="267"/>
           </p14:sldIdLst>
         </p14:section>
-        <p14:section name="Quellen" id="{6ede3303-0427-5e47-814c-c40d5dab7a19}">
+        <p14:section name="Quellen" id="{750a32a9-e790-f8b6-0146-fc040c42f8d5}">
           <p14:sldIdLst>
             <p14:sldId id="268"/>
           </p14:sldIdLst>
@@ -936,7 +936,7 @@
               <a:lstStyle/>
               <a:p>
                 <a:pPr>
-                  <a:defRPr b="0" i="0" strike="noStrike" sz="1100" u="none">
+                  <a:defRPr b="0" i="0" strike="noStrike" sz="1200" u="none">
                     <a:solidFill>
                       <a:srgbClr val="1B2A2F"/>
                     </a:solidFill>
@@ -1017,7 +1017,7 @@
             <a:lstStyle/>
             <a:p>
               <a:pPr>
-                <a:defRPr b="0" i="0" strike="noStrike" sz="1100" u="none">
+                <a:defRPr b="0" i="0" strike="noStrike" sz="1200" u="none">
                   <a:solidFill>
                     <a:srgbClr val="1B2A2F"/>
                   </a:solidFill>
@@ -1078,7 +1078,7 @@
               <a:lstStyle/>
               <a:p>
                 <a:pPr>
-                  <a:defRPr b="0" i="0" strike="noStrike" sz="1100" u="none">
+                  <a:defRPr b="0" i="0" strike="noStrike" sz="1200" u="none">
                     <a:solidFill>
                       <a:srgbClr val="1B2A2F"/>
                     </a:solidFill>
@@ -1176,7 +1176,7 @@
             <a:lstStyle/>
             <a:p>
               <a:pPr>
-                <a:defRPr b="0" i="0" strike="noStrike" sz="1100" u="none">
+                <a:defRPr b="0" i="0" strike="noStrike" sz="1200" u="none">
                   <a:solidFill>
                     <a:srgbClr val="1B2A2F"/>
                   </a:solidFill>
@@ -1223,7 +1223,7 @@
           <a:lstStyle/>
           <a:p>
             <a:pPr>
-              <a:defRPr sz="1200" b="0" i="0" u="none" strike="noStrike">
+              <a:defRPr sz="1300" b="0" i="0" u="none" strike="noStrike">
                 <a:solidFill>
                   <a:srgbClr val="1B2A2F"/>
                 </a:solidFill>
@@ -1275,7 +1275,7 @@
           <a:lstStyle/>
           <a:p>
             <a:pPr>
-              <a:defRPr sz="1100" b="0" i="0" u="none" strike="noStrike">
+              <a:defRPr sz="1200" b="0" i="0" u="none" strike="noStrike">
                 <a:solidFill>
                   <a:srgbClr val="5F8F99"/>
                 </a:solidFill>
@@ -1360,7 +1360,7 @@
                 </a:solidFill>
                 <a:latin typeface="+mn-lt"/>
               </a:rPr>
-              <a:t>Kassenbestand am Rundenende (€)</a:t>
+              <a:t>Schlussbestand je Runde (€), Start 100.000 €</a:t>
             </a:r>
           </a:p>
         </c:rich>
@@ -1382,7 +1382,7 @@
               <c:strCache>
                 <c:ptCount val="1"/>
                 <c:pt idx="0">
-                  <c:v>Kassenbestand</c:v>
+                  <c:v>Schlussbestand</c:v>
                 </c:pt>
               </c:strCache>
             </c:strRef>
@@ -1408,7 +1408,7 @@
               <a:lstStyle/>
               <a:p>
                 <a:pPr>
-                  <a:defRPr b="0" i="0" strike="noStrike" sz="1000" u="none">
+                  <a:defRPr b="0" i="0" strike="noStrike" sz="1100" u="none">
                     <a:solidFill>
                       <a:srgbClr val="1B2A2F"/>
                     </a:solidFill>
@@ -1513,7 +1513,7 @@
             <a:lstStyle/>
             <a:p>
               <a:pPr>
-                <a:defRPr b="0" i="0" strike="noStrike" sz="1000" u="none">
+                <a:defRPr b="0" i="0" strike="noStrike" sz="1100" u="none">
                   <a:solidFill>
                     <a:srgbClr val="1B2A2F"/>
                   </a:solidFill>
@@ -1561,7 +1561,7 @@
           <a:lstStyle/>
           <a:p>
             <a:pPr>
-              <a:defRPr sz="1200" b="0" i="0" u="none" strike="noStrike">
+              <a:defRPr sz="1300" b="0" i="0" u="none" strike="noStrike">
                 <a:solidFill>
                   <a:srgbClr val="1B2A2F"/>
                 </a:solidFill>
@@ -1581,7 +1581,7 @@
         <c:axId val="2094734552"/>
         <c:scaling>
           <c:orientation val="minMax"/>
-          <c:max val="110000"/>
+          <c:max val="120000"/>
           <c:min val="0"/>
         </c:scaling>
         <c:delete val="0"/>
@@ -1613,7 +1613,7 @@
           <a:lstStyle/>
           <a:p>
             <a:pPr>
-              <a:defRPr sz="1100" b="0" i="0" u="none" strike="noStrike">
+              <a:defRPr sz="1200" b="0" i="0" u="none" strike="noStrike">
                 <a:solidFill>
                   <a:srgbClr val="5F8F99"/>
                 </a:solidFill>
@@ -2047,9 +2047,9 @@
           <a:p>
             <a:r>
               <a:rPr lang="en-US" dirty="0"/>
-              <a:t>ZEIT: ca. 0:15 min
+              <a:t>ZEIT: ca. 0:20 min
 SPRECHTEXT (Vorschlag – bitte in eigenen Worten anpassen):
-Hallo zusammen, wir sind die Elbharz Getränke GbR aus der 11b, und das ist unsere Primatenbrause, Tamarinde-Limette. In den nächsten gut zehn Minuten zeigen wir euch, was aus unserer Idee im Planspiel geworden ist: von der Gründung über sechs Spielrunden bis zum Verkaufswert unseres Unternehmens.</a:t>
+Hallo zusammen, wir sind die Elbharz Getränke GbR aus der 11b, und das ist unsere Primatenbrause, Tamarinde-Limette. In den nächsten elf Minuten zeigen wir euch, was aus unserer Idee im Planspiel geworden ist: von der Gründung über sechs Spielrunden bis zum Verkaufswert unseres Unternehmens.</a:t>
             </a:r>
             <a:endParaRPr lang="en-US" dirty="0"/>
           </a:p>
@@ -2137,9 +2137,9 @@
           <a:p>
             <a:r>
               <a:rPr lang="en-US" dirty="0"/>
-              <a:t>ZEIT: ca. 1:15 min
+              <a:t>ZEIT: ca. 1:20 min
 SPRECHTEXT (Vorschlag – bitte in eigenen Worten anpassen):
-Im Nachhinein bewerten wir unsere Entscheidungen so. Gut war, dass wir vorsichtig mit nur einer Maschine gestartet sind, wie es die Spielanleitung empfiehlt, und dass wir nach Runde 2 schnell reagiert haben: Mit 5.900 Euro kam unsere beste Runde. Schlechter war, dass wir in Runde 2 eine Maschine für 30.000 Euro gekauft haben, die ohne Mitarbeiter gar nicht laufen konnte. Und in Runde 4 und 5 haben wir nur je eine Palette produziert, aber zwei Mitarbeiter und die Miete bezahlt, das waren jeweils 13.000 Euro Fixkosten. Besser wäre gewesen, Maschine und Personal immer zusammen zu planen und in schwachen Runden Personal zu reduzieren oder mit einem mittleren Preis weiter zu produzieren. Unser Fazit: Der Preis war unser stärkster Hebel, und Fixkosten laufen auch dann weiter, wenn man fast nichts verkauft.</a:t>
+Im Nachhinein bewerten wir unsere Entscheidungen so. Gut war, dass wir vorsichtig mit nur einer Maschine gestartet sind, wie es die Spielanleitung empfiehlt, und dass wir nach Runde 2 schnell reagiert haben: Mit 5.900 Euro kam unsere beste Runde. Schlecht war vor allem unser Preis ab Runde 4. Wir haben weniger Absatz erwartet und trotzdem die höchsten Preise des ganzen Spiels verlangt, 9.500 und 8.400 Euro – dabei bestimmt der Preis den Absatz. Verkauft haben wir nur 20 bis 50 Prozent. Dazu kamen je 13.000 Euro Fixkosten für eine einzige Palette. Und die zweite Maschine für 30.000 Euro haben wir nur in Runde 3 wirklich gebraucht, sonst hätte eine gereicht. In Runde 1 war der Preis dagegen eher zu niedrig, da ging alles sofort weg. Anders machen würden wir: beim Preis von Runde 3 bleiben, Maschinen nur kaufen, wenn wir sie auslasten und besetzen können, und das Personal an die Produktion anpassen. Unser Fazit: Der Preis war unser stärkster Hebel, und Fixkosten laufen weiter, auch wenn man kaum verkauft.</a:t>
             </a:r>
             <a:endParaRPr lang="en-US" dirty="0"/>
           </a:p>
@@ -2227,9 +2227,9 @@
           <a:p>
             <a:r>
               <a:rPr lang="en-US" dirty="0"/>
-              <a:t>ZEIT: ca. 1:15 min
+              <a:t>ZEIT: ca. 1:10 min
 SPRECHTEXT (Vorschlag – bitte in eigenen Worten anpassen):
-Zum Schluss der Blick zurück auf unsere Gründung. Vieles, was uns wichtig war, kam im Spiel nicht vor: Mehrweg und Pfand, unsere Zielgruppe mit der Persona Jasper, Marketing über Social Media und den Onlineshop, und auch unsere besondere Sorte Tamarinde-Limette. Im Spiel war jede Brause gleich, nur der Preis zählte. Hätte Marketing eine Rolle gespielt, hätten wir in Runde 4 und 5, als kaum etwas verkauft wurde, gegensteuern können. Mehrweg hätte dagegen eher zusätzliche Kosten gebracht. Unser Vorschlag, um das Spiel zu erweitern, ohne es zu kompliziert zu machen: ein Marketingbudget als zusätzliche Entscheidung pro Runde. Man wählt zum Beispiel 0, 2.000 oder 5.000 Euro, und der Spielleiter erhöht dafür den Absatz. Das ist nur eine Zeile mehr im Kassenbuch.</a:t>
+Zum Schluss der Blick zurück auf unsere Gründung. Vieles, was uns wichtig war, kam im Spiel nicht vor, und jedes davon hätte etwas verändert. Mehrweg hätte Kosten gebracht, für Rücknahme, Spülen und Rücktransport. Unsere Zielgruppe mit Persona Jasper hätte bedeutet, dass der Absatz nicht nur vom Preis abhängt, sondern auch davon, wen man anspricht. Mit Social Media und Onlineshop hätten wir in Runde 4 und 5 Werbung machen können, statt nur eine Palette anzubieten. Und unsere besondere Sorte Tamarinde-Limette ist ein Alleinstellungsmerkmal – damit hätten wir vielleicht einen höheren Preis bei gleichem Absatz verlangen können. Im Spiel war aber jede Brause gleich. Wir schlagen deshalb zwei einfache Erweiterungen vor: Erstens ein Marketingbudget – je 2.000 Euro gibt es eine Palette mehr Absatz. Zweitens eine Mehrweg-Option: 1.000 Euro Zusatzkosten je Runde, dafür eine Palette mehr Absatz bei umweltbewussten Kunden. Beides ist nur eine Zeile mehr im Kassenbuch.</a:t>
             </a:r>
             <a:endParaRPr lang="en-US" dirty="0"/>
           </a:p>
@@ -2317,7 +2317,7 @@
           <a:p>
             <a:r>
               <a:rPr lang="en-US" dirty="0"/>
-              <a:t>ZEIT: ca. 0:15 min
+              <a:t>ZEIT: ca. 0:10 min
 SPRECHTEXT (Vorschlag – bitte in eigenen Worten anpassen):
 Das war unser Weg mit der Primatenbrause, von der Idee bis zum Verkaufswert. Vielen Dank fürs Zuhören, wir freuen uns auf eure Fragen.</a:t>
             </a:r>
@@ -2497,7 +2497,7 @@
               <a:rPr lang="en-US" dirty="0"/>
               <a:t>ZEIT: ca. 0:45 min
 SPRECHTEXT (Vorschlag – bitte in eigenen Worten anpassen):
-Kurz zur Erinnerung, wer wir sind. Unsere Idee war ein Getränk, dessen Rückseite man zu Ende lesen kann. Hier seht ihr sie: sechs Zutaten, mehr nicht, Wasser, Kohlensäure, Tamarinde, Limettensaft, Meersalz und Magnesium. Wir sind vier Gesellschafter aus Hamburg. Unsere Zielgruppe sind 16- bis 25-Jährige wie unsere Persona Jasper, die im Laden die Flasche umdrehen und die Zutaten lesen. Verkaufen wollten wir zuerst online und über Social Media, dann regional im Handel.</a:t>
+Kurz zur Erinnerung, wer wir sind. Unser Ausgangspunkt war ein Getränk, dessen Rückseite man zu Ende lesen kann. Das war unsere einzige Vorgabe, und daran haben wir bei der Gründung alles andere gemessen. Hier seht ihr die Rückseite: sechs Zutaten, mehr nicht – Wasser, Kohlensäure, Tamarinde, Limettensaft, Meersalz und Magnesium. Wir sind vier Gesellschafter aus Hamburg. Unsere Zielgruppe sind 16- bis 25-Jährige wie unsere Persona Jasper, der im Laden die Flasche umdreht und die Zutaten liest. Verkaufen wollten wir zuerst online und über Social Media, danach im regionalen Handel. Und warum Tamarinde? Die gibt es in Deutschland in Getränken kaum – herb statt süß.</a:t>
             </a:r>
             <a:endParaRPr lang="en-US" dirty="0"/>
           </a:p>
@@ -2587,7 +2587,7 @@
               <a:rPr lang="en-US" dirty="0"/>
               <a:t>ZEIT: ca. 0:45 min
 SPRECHTEXT (Vorschlag – bitte in eigenen Worten anpassen):
-Nachhaltigkeit hatten wir von Anfang an im Blick. Erstens Mehrweg: Glasflaschen im Pfandsystem statt Einweg. Zweitens regional: Mehrweg lohnt sich nur, wenn die Wege kurz sind, deshalb wollten wir in Norddeutschland brauen und abfüllen. Drittens nur eine Sorte, das spart bei Produktion, Lager und Transport. Ehrlich gesagt: Im Planspiel selbst spielte das keine Rolle, dort entschied nur der Preis über den Absatz. Darauf kommen wir am Ende beim Bezug zur Gründung zurück.</a:t>
+Nachhaltigkeit hatten wir von Anfang an im Blick. Erstens Mehrweg: Glasflaschen im Pfandsystem statt Einweg – die leere Flasche kommt zurück, wird gespült und neu befüllt. Zweitens regional: Glas ist schwer, Mehrweg lohnt sich deshalb nur bei kurzen Wegen. Darum wollten wir in Norddeutschland herstellen und abfüllen. Drittens nur eine Sorte: Das spart Aufwand bei Produktion, Lager und Transport. Wichtig war uns dabei, nur zu versprechen, was man auf dem Etikett überprüfen kann. Ehrlich gesagt spielte das im Planspiel keine Rolle, dort entschied nur der Preis über den Absatz. Darauf kommen wir am Ende beim Bezug zur Gründung zurück.</a:t>
             </a:r>
             <a:endParaRPr lang="en-US" dirty="0"/>
           </a:p>
@@ -2677,7 +2677,7 @@
               <a:rPr lang="en-US" dirty="0"/>
               <a:t>ZEIT: ca. 1:00 min
 SPRECHTEXT (Vorschlag – bitte in eigenen Worten anpassen):
-Hier seht ihr alle sechs Runden auf einen Blick. Jede Säule ist das, was wir produziert haben, darunter steht unser Preis pro Palette. Petrol ist, was wir am normalen Markt verkauft haben, orange ging für nur 1.000 Euro an den Schnäppchenmarkt. In Runde 1 haben wir zu 3.000 Euro alles verkauft. In Runde 2 haben wir den Preis auf 7.600 Euro erhöht, da blieb die Hälfte liegen. Mit 5.900 Euro in Runde 3 lief es am besten. In Runde 4 und 5 haben wir nur noch eine Palette produziert, und in Runde 6 noch einmal 13.</a:t>
+Hier seht ihr alle sechs Runden auf einen Blick. Jede Säule zeigt, wie viele Paletten wir produziert haben, darunter steht unser Angebotspreis. Petrol ist, was wir am normalen Markt verkauft haben. Orange mussten wir für nur 1.000 Euro pro Palette am Schnäppchenmarkt loswerden, denn Brause verdirbt nach einer Runde. In Runde 1 haben wir zu 3.000 Euro alles verkauft. In Runde 2 haben wir den Preis auf 7.600 Euro erhöht, da blieb die Hälfte liegen. Mit 5.900 Euro in Runde 3 lief es am besten: 70 Prozent gingen am Markt weg. In Runde 4 und 5 haben wir nur noch eine Palette produziert und davon trotzdem nur die Hälfte bzw. ein Fünftel verkauft. In Runde 6 waren es noch einmal 13 Paletten.</a:t>
             </a:r>
             <a:endParaRPr lang="en-US" dirty="0"/>
           </a:p>
@@ -2765,9 +2765,9 @@
           <a:p>
             <a:r>
               <a:rPr lang="en-US" dirty="0"/>
-              <a:t>ZEIT: ca. 1:15 min
+              <a:t>ZEIT: ca. 1:05 min
 SPRECHTEXT (Vorschlag – bitte in eigenen Worten anpassen):
-Warum haben wir so entschieden? Das steht in unserem Entscheidungsprotokoll. In Runde 1 haben wir eine Economy-Maschine gekauft, weil sich Standard mit dem zusätzlichen Mitarbeiter nicht gelohnt hätte, und bewusst günstig angeboten. Weil alles weg war, dachten wir in Runde 2, die anderen sind teurer, und sind drastisch auf 7.600 Euro hoch. Wir haben eine zweite Maschine gekauft, hatten aber noch keinen Mitarbeiter dafür, sie lief also noch nicht. In Runde 3 haben wir knapp unter den vermuteten 6.000 Euro der Konkurrenz angeboten. In Runde 4 und 5 haben wir weniger Absatz erwartet und deshalb nur eine Palette produziert. In Runde 6 wollten wir zum Schluss noch einmal Umsatz machen.</a:t>
+Warum haben wir so entschieden? Das steht in unserem Entscheidungsprotokoll, und unten auf jeder Karte seht ihr, was die Runde für unseren Kassenstand bedeutet hat. In Runde 1 haben wir eine Economy-Maschine gekauft, weil sich Standard mit dem zusätzlichen Mitarbeiter nicht gelohnt hätte, und bewusst günstig angeboten. Weil alles weg war, dachten wir in Runde 2, die anderen sind teurer, und sind drastisch auf 7.600 Euro hoch. Außerdem haben wir eine zweite Maschine gekauft – aber noch ohne Mitarbeiter, sie stand also still. In Runde 3 kam der zweite Mitarbeiter dazu, und wir haben knapp unter den vermuteten 6.000 Euro der Konkurrenz angeboten. Das war unsere einzige Runde mit deutlichem Plus. In Runde 4 und 5 haben wir weniger Absatz erwartet und nur eine Palette produziert, aber zu 9.500 Euro. In Runde 6 wollten wir zum Schluss noch einmal Umsatz machen.</a:t>
             </a:r>
             <a:endParaRPr lang="en-US" dirty="0"/>
           </a:p>
@@ -2855,9 +2855,9 @@
           <a:p>
             <a:r>
               <a:rPr lang="en-US" dirty="0"/>
-              <a:t>ZEIT: ca. 0:45 min
+              <a:t>ZEIT: ca. 0:50 min
 SPRECHTEXT (Vorschlag – bitte in eigenen Worten anpassen):
-Ab Runde 2 kamen die Meldungen des Wirtschaftsdienstes dazu. Bei uns tauchen sie im Kassenbuch als sonstige Kosten auf: insgesamt 34.000 Euro, am meisten in Runde 2 und 5 mit je 10.000 Euro. Das sind rund zwölf Prozent unserer gesamten Kosten. In Runde 4 war außerdem das Material teurer, 1.500 statt 1.000 Euro pro Palette. Rein rechnerisch hätten wir ohne diese Zusatzkosten 34.000 Euro mehr in der Kasse gehabt. [Wenn ihr den Wortlaut der Meldungen noch wisst: hier pro Runde ein Stichwort nennen.]</a:t>
+Ab Runde 2 kamen die Meldungen des Wirtschaftsdienstes dazu. Bei uns stehen sie im Kassenbuch als sonstige Kosten: insgesamt 34.000 Euro, am meisten in Runde 2 und Runde 5 mit je 10.000 Euro. Das sind rund zwölf Prozent unserer gesamten Kosten. Rein rechnerisch läge unser Verkaufswert ohne diese Kosten bei 117.770 Euro, also über dem Startkapital. Diese Kosten konnten wir nicht beeinflussen, aber wir hätten sie bei Preis und Menge einplanen können. Das soll keine Ausrede sein, zeigt aber, wie stark äußere Einflüsse wirken – und dass wir Rücklagen gebraucht hätten. [Wenn ihr den Wortlaut der Meldungen noch wisst: hier pro Runde ein Stichwort nennen.]</a:t>
             </a:r>
             <a:endParaRPr lang="en-US" dirty="0"/>
           </a:p>
@@ -2945,9 +2945,9 @@
           <a:p>
             <a:r>
               <a:rPr lang="en-US" dirty="0"/>
-              <a:t>ZEIT: ca. 1:15 min
+              <a:t>ZEIT: ca. 1:00 min
 SPRECHTEXT (Vorschlag – bitte in eigenen Worten anpassen):
-Für die Auswertung haben wir die Wirtschaftlichkeit berechnet: Leistungen geteilt durch Kosten. Die Leistungen sind unsere Umsatzerlöse, die Kosten sind alles aus dem Kassenbuch, also Maschinen, Personal, Miete, die Zusatzkosten vom Wirtschaftsdienst, Produktion und Material. Ein Beispiel: In Runde 3 hatten wir 79.940 Euro Umsatz und 54.000 Euro Kosten, das ergibt 1,48. Das heißt, für jeden Euro, den wir eingesetzt haben, kamen 1,48 Euro zurück. Alles über 1 bedeutet Gewinn, alles unter 1 Verlust. Grün sind nur Runde 3 und Runde 6. Aussagekraft: Die Kennzahl zeigt, wie effizient eine Runde war, aber Runde 1 und 2 sind durch die Maschinenkäufe belastet, die uns auch später noch genutzt haben.</a:t>
+Für die Auswertung haben wir zwei Kennzahlen berechnet. Die wichtigste ist die Wirtschaftlichkeit: Umsatzerlöse geteilt durch die Kosten der Runde. In Runde 3 waren das 79.940 Euro Umsatz geteilt durch 54.000 Euro Kosten, also 1,48 – für jeden eingesetzten Euro kamen 1,48 Euro zurück. Über 1 heißt Gewinn, unter 1 Verlust; das schaffen nur Runde 3 und 6. Die zweite Kennzahl ist die Absatzquote: Wie viel Prozent unserer Produktion haben wir am normalen Markt verkauft? Sie zeigt, ob unser Preis zum Markt gepasst hat – von 100 Prozent in Runde 1 bis 20 Prozent in Runde 5. Zur Aussagekraft: Die Wirtschaftlichkeit rechnet Maschinenkäufe voll in die Kaufrunde. Würde man nur den Wertverlust von 10 Prozent ansetzen, wären auch Runde 1 und 2 knapp wirtschaftlich gewesen. Die vollständige Kostentabelle steht in unserem Auswertungsbogen M15.</a:t>
             </a:r>
             <a:endParaRPr lang="en-US" dirty="0"/>
           </a:p>
@@ -3035,9 +3035,9 @@
           <a:p>
             <a:r>
               <a:rPr lang="en-US" dirty="0"/>
-              <a:t>ZEIT: ca. 1:15 min
+              <a:t>ZEIT: ca. 0:55 min
 SPRECHTEXT (Vorschlag – bitte in eigenen Worten anpassen):
-Links seht ihr die Wirtschaftlichkeit pro Runde, die Linie markiert 1, also den Punkt, ab dem sich eine Runde lohnt. Nur Runde 3 und Runde 6 liegen darüber. Runde 4 und 5 sind besonders schwach: Wir haben fast nichts verkauft, aber Personal und Miete liefen weiter. Rechts seht ihr, wie sich unser Startkapital entwickelt hat. Wir sind mit 100.000 Euro gestartet, hatten nach Runde 3 unseren besten Stand mit 82.840 Euro, den Tiefpunkt nach Runde 5 mit 47.790 Euro und am Ende 53.770 Euro.</a:t>
+Beide Grafiken kennt ihr aus dem Auswertungsbogen. Links die Wirtschaftlichkeit je Runde, die gestrichelte Linie markiert 1, ab dort lohnt sich eine Runde. Nur Runde 3 und 6 liegen darüber, über alle sechs Runden kommen wir auf 0,84. Runde 4 und 5 sind besonders schwach: Wir haben kaum etwas verkauft, aber Personal und Miete liefen weiter. Rechts seht ihr, wie sich unser Startkapital über die Schlussbestände entwickelt hat. Wir sind mit 100.000 Euro gestartet. Die Maschinenkäufe drücken Runde 1 und 2, nach Runde 3 hatten wir mit 82.840 Euro unseren besten Stand, nach Runde 5 mit 47.790 Euro den Tiefpunkt, und am Ende stehen 53.770 Euro in der Kasse. Was das Unternehmen insgesamt wert ist, zeigt die nächste Folie.</a:t>
             </a:r>
             <a:endParaRPr lang="en-US" dirty="0"/>
           </a:p>
@@ -3125,9 +3125,9 @@
           <a:p>
             <a:r>
               <a:rPr lang="en-US" dirty="0"/>
-              <a:t>ZEIT: ca. 0:45 min
+              <a:t>ZEIT: ca. 0:50 min
 SPRECHTEXT (Vorschlag – bitte in eigenen Worten anpassen):
-Am Ende wird unser Unternehmen verkauft. Der Wert ist der Schlussbestand plus der Restwert der Maschinen. Der Schlussbestand nach Runde 6 sind 53.770 Euro. Jede Maschine verliert pro genutzter Runde zehn Prozent ihres Kaufpreises: Die erste Maschine lief sechs Runden und ist noch 12.000 Euro wert, die zweite lief vier Runden, weil sie in Runde 2 ohne Mitarbeiter stillstand, und ist noch 18.000 Euro wert. Zusammen ergibt das einen Verkaufswert von 83.770 Euro. Das sind 16.230 Euro weniger als unser Startkapital.</a:t>
+Am Ende wird unser Unternehmen verkauft. Der Wert ist der Schlussbestand plus der Restwert der Maschinen. Der Schlussbestand nach Runde 6 sind 53.770 Euro. Jede Maschine verliert pro genutzter Runde zehn Prozent ihres Kaufpreises: Die erste Maschine lief sechs Runden und ist noch 12.000 Euro wert, die zweite lief vier Runden, weil sie in Runde 2 ohne Mitarbeiter stillstand, und ist noch 18.000 Euro wert. Zusammen ergibt das einen Verkaufswert von 83.770 Euro. Das sind 16.230 Euro weniger als unser Startkapital. Zum Vergleich: Allein die zwei Maschinen haben 60.000 Euro gekostet, davon stecken noch 30.000 Euro im Unternehmenswert.</a:t>
             </a:r>
             <a:endParaRPr lang="en-US" dirty="0"/>
           </a:p>
@@ -4456,7 +4456,7 @@
                   <a:schemeClr val="tx1"/>
                 </a:solidFill>
               </a:rPr>
-              <a:t>Vorsichtiger Start mit 1 Maschine – wie empfohlen</a:t>
+              <a:t>Vorsichtiger Start mit 1 Maschine – wie in der Spielanleitung empfohlen</a:t>
             </a:r>
             <a:endParaRPr lang="en-US" sz="1600" dirty="0"/>
           </a:p>
@@ -4482,7 +4482,7 @@
       </p:sp>
       <p:sp>
         <p:nvSpPr>
-          <p:cNvPr id="19" name="Karte Das lief schlechter"/>
+          <p:cNvPr id="19" name="Karte Das lief schlecht"/>
           <p:cNvSpPr/>
           <p:nvPr/>
         </p:nvSpPr>
@@ -4576,7 +4576,7 @@
                   <a:schemeClr val="tx2"/>
                 </a:solidFill>
               </a:rPr>
-              <a:t>Das lief schlechter</a:t>
+              <a:t>Das lief schlecht</a:t>
             </a:r>
             <a:endParaRPr lang="en-US" sz="1900" dirty="0"/>
           </a:p>
@@ -4616,7 +4616,7 @@
                   <a:schemeClr val="tx1"/>
                 </a:solidFill>
               </a:rPr>
-              <a:t>R2: Maschine für 30.000 € gekauft, ohne Personal ungenutzt</a:t>
+              <a:t>R4–R6: hohe Preise trotz erwarteter Flaute – nur 20–50 % verkauft</a:t>
             </a:r>
             <a:endParaRPr lang="en-US" sz="1600" dirty="0"/>
           </a:p>
@@ -4634,7 +4634,7 @@
                   <a:schemeClr val="tx1"/>
                 </a:solidFill>
               </a:rPr>
-              <a:t>R4/R5: 1 Palette, aber je 13.000 € Fixkosten</a:t>
+              <a:t>R4/R5: je 13.000 € Fixkosten für 1 Palette</a:t>
             </a:r>
             <a:endParaRPr lang="en-US" sz="1600" dirty="0"/>
           </a:p>
@@ -4652,7 +4652,7 @@
                   <a:schemeClr val="tx1"/>
                 </a:solidFill>
               </a:rPr>
-              <a:t>R1: 100 % verkauft – Preis vermutlich zu niedrig</a:t>
+              <a:t>2. Maschine (30.000 €) nur in R3 wirklich gebraucht</a:t>
             </a:r>
             <a:endParaRPr lang="en-US" sz="1600" dirty="0"/>
           </a:p>
@@ -4794,7 +4794,7 @@
                   <a:schemeClr val="tx1"/>
                 </a:solidFill>
               </a:rPr>
-              <a:t>Maschine und Personal immer zusammen planen</a:t>
+              <a:t>Preis nahe 5.900 € halten – lief in R3 am besten</a:t>
             </a:r>
             <a:endParaRPr lang="en-US" sz="1600" dirty="0"/>
           </a:p>
@@ -4812,7 +4812,25 @@
                   <a:schemeClr val="tx1"/>
                 </a:solidFill>
               </a:rPr>
-              <a:t>Schwache Runden: Personal reduzieren (spart 4.000 € je Person) oder mit mittlerem Preis weiter produzieren</a:t>
+              <a:t>Maschinen nur kaufen, wenn wir sie auslasten und besetzen</a:t>
+            </a:r>
+            <a:endParaRPr lang="en-US" sz="1600" dirty="0"/>
+          </a:p>
+          <a:p>
+            <a:pPr marL="203200" indent="-203200">
+              <a:spcAft>
+                <a:spcPts val="800"/>
+              </a:spcAft>
+              <a:buSzPct val="100000"/>
+              <a:buChar char="•"/>
+            </a:pPr>
+            <a:r>
+              <a:rPr lang="en-US" sz="1600" dirty="0">
+                <a:solidFill>
+                  <a:schemeClr val="tx1"/>
+                </a:solidFill>
+              </a:rPr>
+              <a:t>Personal an die Produktion anpassen (4.000 € je Person und Runde)</a:t>
             </a:r>
             <a:endParaRPr lang="en-US" sz="1600" dirty="0"/>
           </a:p>
@@ -5286,8 +5304,8 @@
         </p:nvSpPr>
         <p:spPr>
           <a:xfrm>
-            <a:off x="640080" y="1417320"/>
-            <a:ext cx="3840480" cy="365760"/>
+            <a:off x="640080" y="1371600"/>
+            <a:ext cx="6949440" cy="365760"/>
           </a:xfrm>
           <a:prstGeom prst="rect">
             <a:avLst/>
@@ -5308,7 +5326,7 @@
                   <a:schemeClr val="accent4"/>
                 </a:solidFill>
               </a:rPr>
-              <a:t>Nicht im Spiel berücksichtigt</a:t>
+              <a:t>Was im Spiel fehlte – und was es bewirkt hätte</a:t>
             </a:r>
             <a:endParaRPr lang="en-US" sz="1600" dirty="0"/>
           </a:p>
@@ -5322,12 +5340,12 @@
         </p:nvSpPr>
         <p:spPr>
           <a:xfrm>
-            <a:off x="640080" y="1874520"/>
-            <a:ext cx="3840480" cy="868680"/>
+            <a:off x="640080" y="1828800"/>
+            <a:ext cx="6949440" cy="932688"/>
           </a:xfrm>
           <a:prstGeom prst="roundRect">
             <a:avLst>
-              <a:gd name="adj" fmla="val 12632"/>
+              <a:gd name="adj" fmla="val 11765"/>
             </a:avLst>
           </a:prstGeom>
           <a:solidFill>
@@ -5344,8 +5362,8 @@
         </p:nvSpPr>
         <p:spPr>
           <a:xfrm>
-            <a:off x="822960" y="2011680"/>
-            <a:ext cx="594360" cy="594360"/>
+            <a:off x="822960" y="1984248"/>
+            <a:ext cx="621792" cy="621792"/>
           </a:xfrm>
           <a:prstGeom prst="ellipse">
             <a:avLst/>
@@ -5372,8 +5390,8 @@
         </p:blipFill>
         <p:spPr>
           <a:xfrm>
-            <a:off x="983437" y="2172157"/>
-            <a:ext cx="273406" cy="273406"/>
+            <a:off x="990844" y="2152132"/>
+            <a:ext cx="286024" cy="286024"/>
           </a:xfrm>
           <a:prstGeom prst="rect">
             <a:avLst/>
@@ -5388,8 +5406,8 @@
         </p:nvSpPr>
         <p:spPr>
           <a:xfrm>
-            <a:off x="1600200" y="1874520"/>
-            <a:ext cx="2743200" cy="868680"/>
+            <a:off x="1645920" y="1828800"/>
+            <a:ext cx="5806440" cy="932688"/>
           </a:xfrm>
           <a:prstGeom prst="rect">
             <a:avLst/>
@@ -5405,14 +5423,28 @@
               <a:buNone/>
             </a:pPr>
             <a:r>
-              <a:rPr lang="en-US" sz="1600" b="1" dirty="0">
+              <a:rPr lang="en-US" sz="1700" b="1" dirty="0">
                 <a:solidFill>
                   <a:schemeClr val="tx2"/>
                 </a:solidFill>
               </a:rPr>
               <a:t>Mehrweg &amp; Pfand</a:t>
             </a:r>
-            <a:endParaRPr lang="en-US" sz="1600" dirty="0"/>
+            <a:endParaRPr lang="en-US" sz="1700" dirty="0"/>
+          </a:p>
+          <a:p>
+            <a:pPr indent="0" marL="0">
+              <a:buNone/>
+            </a:pPr>
+            <a:r>
+              <a:rPr lang="en-US" sz="1500" dirty="0">
+                <a:solidFill>
+                  <a:schemeClr val="tx1"/>
+                </a:solidFill>
+              </a:rPr>
+              <a:t>→ Mehr Kosten: Rücknahme, Spülen, Rücktransport</a:t>
+            </a:r>
+            <a:endParaRPr lang="en-US" sz="1700" dirty="0"/>
           </a:p>
         </p:txBody>
       </p:sp>
@@ -5425,11 +5457,11 @@
         <p:spPr>
           <a:xfrm>
             <a:off x="640080" y="2898648"/>
-            <a:ext cx="3840480" cy="868680"/>
+            <a:ext cx="6949440" cy="932688"/>
           </a:xfrm>
           <a:prstGeom prst="roundRect">
             <a:avLst>
-              <a:gd name="adj" fmla="val 12632"/>
+              <a:gd name="adj" fmla="val 11765"/>
             </a:avLst>
           </a:prstGeom>
           <a:solidFill>
@@ -5446,8 +5478,8 @@
         </p:nvSpPr>
         <p:spPr>
           <a:xfrm>
-            <a:off x="822960" y="3035808"/>
-            <a:ext cx="594360" cy="594360"/>
+            <a:off x="822960" y="3054096"/>
+            <a:ext cx="621792" cy="621792"/>
           </a:xfrm>
           <a:prstGeom prst="ellipse">
             <a:avLst/>
@@ -5474,8 +5506,8 @@
         </p:blipFill>
         <p:spPr>
           <a:xfrm>
-            <a:off x="983437" y="3196285"/>
-            <a:ext cx="273406" cy="273406"/>
+            <a:off x="990844" y="3221980"/>
+            <a:ext cx="286024" cy="286024"/>
           </a:xfrm>
           <a:prstGeom prst="rect">
             <a:avLst/>
@@ -5490,8 +5522,8 @@
         </p:nvSpPr>
         <p:spPr>
           <a:xfrm>
-            <a:off x="1600200" y="2898648"/>
-            <a:ext cx="2743200" cy="868680"/>
+            <a:off x="1645920" y="2898648"/>
+            <a:ext cx="5806440" cy="932688"/>
           </a:xfrm>
           <a:prstGeom prst="rect">
             <a:avLst/>
@@ -5507,14 +5539,28 @@
               <a:buNone/>
             </a:pPr>
             <a:r>
-              <a:rPr lang="en-US" sz="1600" b="1" dirty="0">
+              <a:rPr lang="en-US" sz="1700" b="1" dirty="0">
                 <a:solidFill>
                   <a:schemeClr val="tx2"/>
                 </a:solidFill>
               </a:rPr>
               <a:t>Zielgruppe &amp; Persona Jasper</a:t>
             </a:r>
-            <a:endParaRPr lang="en-US" sz="1600" dirty="0"/>
+            <a:endParaRPr lang="en-US" sz="1700" dirty="0"/>
+          </a:p>
+          <a:p>
+            <a:pPr indent="0" marL="0">
+              <a:buNone/>
+            </a:pPr>
+            <a:r>
+              <a:rPr lang="en-US" sz="1500" dirty="0">
+                <a:solidFill>
+                  <a:schemeClr val="tx1"/>
+                </a:solidFill>
+              </a:rPr>
+              <a:t>→ Absatz hinge auch davon ab, wen man anspricht</a:t>
+            </a:r>
+            <a:endParaRPr lang="en-US" sz="1700" dirty="0"/>
           </a:p>
         </p:txBody>
       </p:sp>
@@ -5526,12 +5572,12 @@
         </p:nvSpPr>
         <p:spPr>
           <a:xfrm>
-            <a:off x="640080" y="3922776"/>
-            <a:ext cx="3840480" cy="868680"/>
+            <a:off x="640080" y="3968496"/>
+            <a:ext cx="6949440" cy="932688"/>
           </a:xfrm>
           <a:prstGeom prst="roundRect">
             <a:avLst>
-              <a:gd name="adj" fmla="val 12632"/>
+              <a:gd name="adj" fmla="val 11765"/>
             </a:avLst>
           </a:prstGeom>
           <a:solidFill>
@@ -5548,8 +5594,8 @@
         </p:nvSpPr>
         <p:spPr>
           <a:xfrm>
-            <a:off x="822960" y="4059936"/>
-            <a:ext cx="594360" cy="594360"/>
+            <a:off x="822960" y="4123944"/>
+            <a:ext cx="621792" cy="621792"/>
           </a:xfrm>
           <a:prstGeom prst="ellipse">
             <a:avLst/>
@@ -5576,8 +5622,8 @@
         </p:blipFill>
         <p:spPr>
           <a:xfrm>
-            <a:off x="983437" y="4220413"/>
-            <a:ext cx="273406" cy="273406"/>
+            <a:off x="990844" y="4291828"/>
+            <a:ext cx="286024" cy="286024"/>
           </a:xfrm>
           <a:prstGeom prst="rect">
             <a:avLst/>
@@ -5592,8 +5638,8 @@
         </p:nvSpPr>
         <p:spPr>
           <a:xfrm>
-            <a:off x="1600200" y="3922776"/>
-            <a:ext cx="2743200" cy="868680"/>
+            <a:off x="1645920" y="3968496"/>
+            <a:ext cx="5806440" cy="932688"/>
           </a:xfrm>
           <a:prstGeom prst="rect">
             <a:avLst/>
@@ -5609,31 +5655,45 @@
               <a:buNone/>
             </a:pPr>
             <a:r>
-              <a:rPr lang="en-US" sz="1600" b="1" dirty="0">
+              <a:rPr lang="en-US" sz="1700" b="1" dirty="0">
                 <a:solidFill>
                   <a:schemeClr val="tx2"/>
                 </a:solidFill>
               </a:rPr>
               <a:t>Social Media &amp; Onlineshop</a:t>
             </a:r>
-            <a:endParaRPr lang="en-US" sz="1600" dirty="0"/>
-          </a:p>
-        </p:txBody>
-      </p:sp>
-      <p:sp>
-        <p:nvSpPr>
-          <p:cNvPr id="27" name="Fehlt Besondere Sorte Tamarinde"/>
+            <a:endParaRPr lang="en-US" sz="1700" dirty="0"/>
+          </a:p>
+          <a:p>
+            <a:pPr indent="0" marL="0">
+              <a:buNone/>
+            </a:pPr>
+            <a:r>
+              <a:rPr lang="en-US" sz="1500" dirty="0">
+                <a:solidFill>
+                  <a:schemeClr val="tx1"/>
+                </a:solidFill>
+              </a:rPr>
+              <a:t>→ Werbung hätte R4/R5 mehr Absatz bringen können</a:t>
+            </a:r>
+            <a:endParaRPr lang="en-US" sz="1700" dirty="0"/>
+          </a:p>
+        </p:txBody>
+      </p:sp>
+      <p:sp>
+        <p:nvSpPr>
+          <p:cNvPr id="27" name="Fehlt Sorte Tamarinde-Limette"/>
           <p:cNvSpPr/>
           <p:nvPr/>
         </p:nvSpPr>
         <p:spPr>
           <a:xfrm>
-            <a:off x="640080" y="4946904"/>
-            <a:ext cx="3840480" cy="868680"/>
+            <a:off x="640080" y="5038344"/>
+            <a:ext cx="6949440" cy="932688"/>
           </a:xfrm>
           <a:prstGeom prst="roundRect">
             <a:avLst>
-              <a:gd name="adj" fmla="val 12632"/>
+              <a:gd name="adj" fmla="val 11765"/>
             </a:avLst>
           </a:prstGeom>
           <a:solidFill>
@@ -5650,8 +5710,8 @@
         </p:nvSpPr>
         <p:spPr>
           <a:xfrm>
-            <a:off x="822960" y="5084064"/>
-            <a:ext cx="594360" cy="594360"/>
+            <a:off x="822960" y="5193792"/>
+            <a:ext cx="621792" cy="621792"/>
           </a:xfrm>
           <a:prstGeom prst="ellipse">
             <a:avLst/>
@@ -5678,8 +5738,8 @@
         </p:blipFill>
         <p:spPr>
           <a:xfrm>
-            <a:off x="983437" y="5244541"/>
-            <a:ext cx="273406" cy="273406"/>
+            <a:off x="990844" y="5361676"/>
+            <a:ext cx="286024" cy="286024"/>
           </a:xfrm>
           <a:prstGeom prst="rect">
             <a:avLst/>
@@ -5694,8 +5754,8 @@
         </p:nvSpPr>
         <p:spPr>
           <a:xfrm>
-            <a:off x="1600200" y="4946904"/>
-            <a:ext cx="2743200" cy="868680"/>
+            <a:off x="1645920" y="5038344"/>
+            <a:ext cx="5806440" cy="932688"/>
           </a:xfrm>
           <a:prstGeom prst="rect">
             <a:avLst/>
@@ -5711,88 +5771,46 @@
               <a:buNone/>
             </a:pPr>
             <a:r>
-              <a:rPr lang="en-US" sz="1600" b="1" dirty="0">
+              <a:rPr lang="en-US" sz="1700" b="1" dirty="0">
                 <a:solidFill>
                   <a:schemeClr val="tx2"/>
                 </a:solidFill>
               </a:rPr>
-              <a:t>Besondere Sorte Tamarinde</a:t>
-            </a:r>
-            <a:endParaRPr lang="en-US" sz="1600" dirty="0"/>
-          </a:p>
-        </p:txBody>
-      </p:sp>
-      <p:sp>
-        <p:nvSpPr>
-          <p:cNvPr id="31" name="Text 24"/>
-          <p:cNvSpPr txBox="1"/>
-          <p:nvPr/>
-        </p:nvSpPr>
-        <p:spPr>
-          <a:xfrm>
-            <a:off x="4526280" y="3017520"/>
-            <a:ext cx="457200" cy="914400"/>
-          </a:xfrm>
-          <a:prstGeom prst="rect">
-            <a:avLst/>
-          </a:prstGeom>
-          <a:noFill/>
-          <a:ln/>
-        </p:spPr>
-        <p:txBody>
-          <a:bodyPr wrap="square" lIns="0" tIns="0" rIns="0" bIns="0" rtlCol="0" anchor="ctr"/>
-          <a:lstStyle/>
-          <a:p>
-            <a:pPr algn="ctr" indent="0" marL="0">
-              <a:buNone/>
-            </a:pPr>
-            <a:r>
-              <a:rPr lang="en-US" sz="4400" b="1" dirty="0">
-                <a:solidFill>
-                  <a:schemeClr val="accent2"/>
-                </a:solidFill>
-              </a:rPr>
-              <a:t>›</a:t>
-            </a:r>
-            <a:endParaRPr lang="en-US" sz="4400" dirty="0"/>
-          </a:p>
-        </p:txBody>
-      </p:sp>
-      <p:sp>
-        <p:nvSpPr>
-          <p:cNvPr id="32" name="Karte Auswirkung"/>
+              <a:t>Sorte Tamarinde-Limette</a:t>
+            </a:r>
+            <a:endParaRPr lang="en-US" sz="1700" dirty="0"/>
+          </a:p>
+          <a:p>
+            <a:pPr indent="0" marL="0">
+              <a:buNone/>
+            </a:pPr>
+            <a:r>
+              <a:rPr lang="en-US" sz="1500" dirty="0">
+                <a:solidFill>
+                  <a:schemeClr val="tx1"/>
+                </a:solidFill>
+              </a:rPr>
+              <a:t>→ Alleinstellung: höherer Preis bei gleichem Absatz</a:t>
+            </a:r>
+            <a:endParaRPr lang="en-US" sz="1700" dirty="0"/>
+          </a:p>
+        </p:txBody>
+      </p:sp>
+      <p:sp>
+        <p:nvSpPr>
+          <p:cNvPr id="31" name="Spielerweiterung"/>
           <p:cNvSpPr/>
           <p:nvPr/>
         </p:nvSpPr>
         <p:spPr>
           <a:xfrm>
-            <a:off x="5029200" y="1874520"/>
-            <a:ext cx="3108960" cy="3931920"/>
+            <a:off x="7863840" y="1371600"/>
+            <a:ext cx="3657600" cy="4754880"/>
           </a:xfrm>
           <a:prstGeom prst="roundRect">
             <a:avLst>
-              <a:gd name="adj" fmla="val 3529"/>
+              <a:gd name="adj" fmla="val 3000"/>
             </a:avLst>
-          </a:prstGeom>
-          <a:solidFill>
-            <a:schemeClr val="bg2"/>
-          </a:solidFill>
-          <a:ln/>
-        </p:spPr>
-      </p:sp>
-      <p:sp>
-        <p:nvSpPr>
-          <p:cNvPr id="33" name="Icon-Kreis FaChartLine"/>
-          <p:cNvSpPr/>
-          <p:nvPr/>
-        </p:nvSpPr>
-        <p:spPr>
-          <a:xfrm>
-            <a:off x="5303520" y="2148840"/>
-            <a:ext cx="640080" cy="640080"/>
-          </a:xfrm>
-          <a:prstGeom prst="ellipse">
-            <a:avLst/>
           </a:prstGeom>
           <a:solidFill>
             <a:schemeClr val="accent1"/>
@@ -5800,9 +5818,29 @@
           <a:ln/>
         </p:spPr>
       </p:sp>
+      <p:sp>
+        <p:nvSpPr>
+          <p:cNvPr id="32" name="Icon-Kreis FaLightbulb"/>
+          <p:cNvSpPr/>
+          <p:nvPr/>
+        </p:nvSpPr>
+        <p:spPr>
+          <a:xfrm>
+            <a:off x="8092440" y="1600200"/>
+            <a:ext cx="640080" cy="640080"/>
+          </a:xfrm>
+          <a:prstGeom prst="ellipse">
+            <a:avLst/>
+          </a:prstGeom>
+          <a:solidFill>
+            <a:schemeClr val="accent2"/>
+          </a:solidFill>
+          <a:ln/>
+        </p:spPr>
+      </p:sp>
       <p:pic>
         <p:nvPicPr>
-          <p:cNvPr id="34" name="Icon FaChartLine" descr="Symbol ChartLine">    </p:cNvPr>
+          <p:cNvPr id="33" name="Icon FaLightbulb" descr="Symbol Lightbulb">    </p:cNvPr>
           <p:cNvPicPr>
             <a:picLocks noChangeAspect="1"/>
           </p:cNvPicPr>
@@ -5816,7 +5854,7 @@
         </p:blipFill>
         <p:spPr>
           <a:xfrm>
-            <a:off x="5476342" y="2321662"/>
+            <a:off x="8265262" y="1773022"/>
             <a:ext cx="294437" cy="294437"/>
           </a:xfrm>
           <a:prstGeom prst="rect">
@@ -5824,6 +5862,42 @@
           </a:prstGeom>
         </p:spPr>
       </p:pic>
+      <p:sp>
+        <p:nvSpPr>
+          <p:cNvPr id="34" name="Text 26"/>
+          <p:cNvSpPr txBox="1"/>
+          <p:nvPr/>
+        </p:nvSpPr>
+        <p:spPr>
+          <a:xfrm>
+            <a:off x="8869680" y="1600200"/>
+            <a:ext cx="2560320" cy="640080"/>
+          </a:xfrm>
+          <a:prstGeom prst="rect">
+            <a:avLst/>
+          </a:prstGeom>
+          <a:noFill/>
+          <a:ln/>
+        </p:spPr>
+        <p:txBody>
+          <a:bodyPr wrap="square" lIns="0" tIns="0" rIns="0" bIns="0" rtlCol="0" anchor="ctr"/>
+          <a:lstStyle/>
+          <a:p>
+            <a:pPr indent="0" marL="0">
+              <a:buNone/>
+            </a:pPr>
+            <a:r>
+              <a:rPr lang="en-US" sz="1900" b="1" dirty="0">
+                <a:solidFill>
+                  <a:schemeClr val="bg1"/>
+                </a:solidFill>
+              </a:rPr>
+              <a:t>Unsere Vorschläge</a:t>
+            </a:r>
+            <a:endParaRPr lang="en-US" sz="1900" dirty="0"/>
+          </a:p>
+        </p:txBody>
+      </p:sp>
       <p:sp>
         <p:nvSpPr>
           <p:cNvPr id="35" name="Text 27"/>
@@ -5832,8 +5906,8 @@
         </p:nvSpPr>
         <p:spPr>
           <a:xfrm>
-            <a:off x="6126480" y="2148840"/>
-            <a:ext cx="1783080" cy="640080"/>
+            <a:off x="8092440" y="2468880"/>
+            <a:ext cx="3200400" cy="3474720"/>
           </a:xfrm>
           <a:prstGeom prst="rect">
             <a:avLst/>
@@ -5842,7 +5916,7 @@
           <a:ln/>
         </p:spPr>
         <p:txBody>
-          <a:bodyPr wrap="square" lIns="0" tIns="0" rIns="0" bIns="0" rtlCol="0" anchor="ctr"/>
+          <a:bodyPr wrap="square" lIns="0" tIns="0" rIns="0" bIns="0" rtlCol="0" anchor="t"/>
           <a:lstStyle/>
           <a:p>
             <a:pPr indent="0" marL="0">
@@ -5851,324 +5925,74 @@
             <a:r>
               <a:rPr lang="en-US" sz="2000" b="1" dirty="0">
                 <a:solidFill>
-                  <a:schemeClr val="tx2"/>
-                </a:solidFill>
-              </a:rPr>
-              <a:t>Auswirkung</a:t>
+                  <a:schemeClr val="accent2"/>
+                </a:solidFill>
+              </a:rPr>
+              <a:t>1  Marketingbudget</a:t>
             </a:r>
             <a:endParaRPr lang="en-US" sz="2000" dirty="0"/>
           </a:p>
-        </p:txBody>
-      </p:sp>
-      <p:sp>
-        <p:nvSpPr>
-          <p:cNvPr id="36" name="Text 28"/>
-          <p:cNvSpPr txBox="1"/>
-          <p:nvPr/>
-        </p:nvSpPr>
-        <p:spPr>
-          <a:xfrm>
-            <a:off x="5303520" y="2971800"/>
-            <a:ext cx="2560320" cy="2651760"/>
-          </a:xfrm>
-          <a:prstGeom prst="rect">
-            <a:avLst/>
-          </a:prstGeom>
-          <a:noFill/>
-          <a:ln/>
-        </p:spPr>
-        <p:txBody>
-          <a:bodyPr wrap="square" lIns="0" tIns="0" rIns="0" bIns="0" rtlCol="0" anchor="t"/>
-          <a:lstStyle/>
-          <a:p>
-            <a:pPr indent="0" marL="0">
-              <a:buNone/>
-            </a:pPr>
-            <a:endParaRPr lang="en-US" sz="1600" dirty="0"/>
-          </a:p>
-        </p:txBody>
-      </p:sp>
-      <p:sp>
-        <p:nvSpPr>
-          <p:cNvPr id="37" name="Text 29"/>
-          <p:cNvSpPr txBox="1"/>
-          <p:nvPr/>
-        </p:nvSpPr>
-        <p:spPr>
-          <a:xfrm>
-            <a:off x="5303520" y="2971800"/>
-            <a:ext cx="2606040" cy="2743200"/>
-          </a:xfrm>
-          <a:prstGeom prst="rect">
-            <a:avLst/>
-          </a:prstGeom>
-          <a:noFill/>
-          <a:ln/>
-        </p:spPr>
-        <p:txBody>
-          <a:bodyPr wrap="square" lIns="0" tIns="0" rIns="0" bIns="0" rtlCol="0" anchor="t"/>
-          <a:lstStyle/>
-          <a:p>
-            <a:pPr marL="203200" indent="-203200">
-              <a:spcAft>
-                <a:spcPts val="800"/>
-              </a:spcAft>
-              <a:buSzPct val="100000"/>
-              <a:buChar char="•"/>
-            </a:pPr>
-            <a:r>
-              <a:rPr lang="en-US" sz="1400" dirty="0">
-                <a:solidFill>
-                  <a:schemeClr val="tx1"/>
-                </a:solidFill>
-              </a:rPr>
-              <a:t>Im Spiel war jede Brause gleich – nur der Preis zählte</a:t>
-            </a:r>
-            <a:endParaRPr lang="en-US" sz="1400" dirty="0"/>
-          </a:p>
-          <a:p>
-            <a:pPr marL="203200" indent="-203200">
-              <a:spcAft>
-                <a:spcPts val="800"/>
-              </a:spcAft>
-              <a:buSzPct val="100000"/>
-              <a:buChar char="•"/>
-            </a:pPr>
-            <a:r>
-              <a:rPr lang="en-US" sz="1400" dirty="0">
-                <a:solidFill>
-                  <a:schemeClr val="tx1"/>
-                </a:solidFill>
-              </a:rPr>
-              <a:t>Mit Marketing hätten wir in R4/R5 gegen den Absatzeinbruch arbeiten können</a:t>
-            </a:r>
-            <a:endParaRPr lang="en-US" sz="1400" dirty="0"/>
-          </a:p>
-          <a:p>
-            <a:pPr marL="203200" indent="-203200">
-              <a:spcAft>
-                <a:spcPts val="800"/>
-              </a:spcAft>
-              <a:buSzPct val="100000"/>
-              <a:buChar char="•"/>
-            </a:pPr>
-            <a:r>
-              <a:rPr lang="en-US" sz="1400" dirty="0">
-                <a:solidFill>
-                  <a:schemeClr val="tx1"/>
-                </a:solidFill>
-              </a:rPr>
-              <a:t>Mehrweg hätte eher Kosten gebracht (Pfand, Spülen)</a:t>
-            </a:r>
-            <a:endParaRPr lang="en-US" sz="1400" dirty="0"/>
-          </a:p>
-        </p:txBody>
-      </p:sp>
-      <p:sp>
-        <p:nvSpPr>
-          <p:cNvPr id="38" name="Text 30"/>
-          <p:cNvSpPr txBox="1"/>
-          <p:nvPr/>
-        </p:nvSpPr>
-        <p:spPr>
-          <a:xfrm>
-            <a:off x="8183880" y="3017520"/>
-            <a:ext cx="457200" cy="914400"/>
-          </a:xfrm>
-          <a:prstGeom prst="rect">
-            <a:avLst/>
-          </a:prstGeom>
-          <a:noFill/>
-          <a:ln/>
-        </p:spPr>
-        <p:txBody>
-          <a:bodyPr wrap="square" lIns="0" tIns="0" rIns="0" bIns="0" rtlCol="0" anchor="ctr"/>
-          <a:lstStyle/>
-          <a:p>
-            <a:pPr algn="ctr" indent="0" marL="0">
-              <a:buNone/>
-            </a:pPr>
-            <a:r>
-              <a:rPr lang="en-US" sz="4400" b="1" dirty="0">
-                <a:solidFill>
-                  <a:schemeClr val="accent2"/>
-                </a:solidFill>
-              </a:rPr>
-              <a:t>›</a:t>
-            </a:r>
-            <a:endParaRPr lang="en-US" sz="4400" dirty="0"/>
-          </a:p>
-        </p:txBody>
-      </p:sp>
-      <p:sp>
-        <p:nvSpPr>
-          <p:cNvPr id="39" name="Spielerweiterung"/>
-          <p:cNvSpPr/>
-          <p:nvPr/>
-        </p:nvSpPr>
-        <p:spPr>
-          <a:xfrm>
-            <a:off x="8686800" y="1874520"/>
-            <a:ext cx="2834640" cy="3931920"/>
-          </a:xfrm>
-          <a:prstGeom prst="roundRect">
-            <a:avLst>
-              <a:gd name="adj" fmla="val 3871"/>
-            </a:avLst>
-          </a:prstGeom>
-          <a:solidFill>
-            <a:schemeClr val="accent1"/>
-          </a:solidFill>
-          <a:ln/>
-        </p:spPr>
-      </p:sp>
-      <p:sp>
-        <p:nvSpPr>
-          <p:cNvPr id="40" name="Icon-Kreis FaLightbulb"/>
-          <p:cNvSpPr/>
-          <p:nvPr/>
-        </p:nvSpPr>
-        <p:spPr>
-          <a:xfrm>
-            <a:off x="8915400" y="2103120"/>
-            <a:ext cx="640080" cy="640080"/>
-          </a:xfrm>
-          <a:prstGeom prst="ellipse">
-            <a:avLst/>
-          </a:prstGeom>
-          <a:solidFill>
-            <a:schemeClr val="accent2"/>
-          </a:solidFill>
-          <a:ln/>
-        </p:spPr>
-      </p:sp>
-      <p:pic>
-        <p:nvPicPr>
-          <p:cNvPr id="41" name="Icon FaLightbulb" descr="Symbol Lightbulb">    </p:cNvPr>
-          <p:cNvPicPr>
-            <a:picLocks noChangeAspect="1"/>
-          </p:cNvPicPr>
-          <p:nvPr/>
-        </p:nvPicPr>
-        <p:blipFill>
-          <a:blip r:embed="rId6"/>
-          <a:stretch>
-            <a:fillRect/>
-          </a:stretch>
-        </p:blipFill>
-        <p:spPr>
-          <a:xfrm>
-            <a:off x="9088222" y="2275942"/>
-            <a:ext cx="294437" cy="294437"/>
-          </a:xfrm>
-          <a:prstGeom prst="rect">
-            <a:avLst/>
-          </a:prstGeom>
-        </p:spPr>
-      </p:pic>
-      <p:sp>
-        <p:nvSpPr>
-          <p:cNvPr id="42" name="Text 33"/>
-          <p:cNvSpPr txBox="1"/>
-          <p:nvPr/>
-        </p:nvSpPr>
-        <p:spPr>
-          <a:xfrm>
-            <a:off x="9692640" y="2103120"/>
-            <a:ext cx="1737360" cy="640080"/>
-          </a:xfrm>
-          <a:prstGeom prst="rect">
-            <a:avLst/>
-          </a:prstGeom>
-          <a:noFill/>
-          <a:ln/>
-        </p:spPr>
-        <p:txBody>
-          <a:bodyPr wrap="square" lIns="0" tIns="0" rIns="0" bIns="0" rtlCol="0" anchor="ctr"/>
-          <a:lstStyle/>
-          <a:p>
-            <a:pPr indent="0" marL="0">
-              <a:buNone/>
-            </a:pPr>
-            <a:r>
-              <a:rPr lang="en-US" sz="1900" b="1" dirty="0">
-                <a:solidFill>
-                  <a:schemeClr val="bg1"/>
-                </a:solidFill>
-              </a:rPr>
-              <a:t>Unsere Idee</a:t>
-            </a:r>
-            <a:endParaRPr lang="en-US" sz="1900" dirty="0"/>
-          </a:p>
-        </p:txBody>
-      </p:sp>
-      <p:sp>
-        <p:nvSpPr>
-          <p:cNvPr id="43" name="Text 34"/>
-          <p:cNvSpPr txBox="1"/>
-          <p:nvPr/>
-        </p:nvSpPr>
-        <p:spPr>
-          <a:xfrm>
-            <a:off x="8915400" y="2926080"/>
-            <a:ext cx="2423160" cy="2743200"/>
-          </a:xfrm>
-          <a:prstGeom prst="rect">
-            <a:avLst/>
-          </a:prstGeom>
-          <a:noFill/>
-          <a:ln/>
-        </p:spPr>
-        <p:txBody>
-          <a:bodyPr wrap="square" lIns="0" tIns="0" rIns="0" bIns="0" rtlCol="0" anchor="t"/>
-          <a:lstStyle/>
           <a:p>
             <a:pPr indent="0" marL="0">
               <a:spcAft>
-                <a:spcPts val="800"/>
+                <a:spcPts val="2200"/>
               </a:spcAft>
               <a:buNone/>
             </a:pPr>
             <a:r>
-              <a:rPr lang="en-US" sz="1600" b="1" dirty="0">
+              <a:rPr lang="en-US" sz="1700" dirty="0">
+                <a:solidFill>
+                  <a:schemeClr val="bg1"/>
+                </a:solidFill>
+              </a:rPr>
+              <a:t>Je 2.000 € → +1 Palette Absatz</a:t>
+            </a:r>
+            <a:endParaRPr lang="en-US" sz="2000" dirty="0"/>
+          </a:p>
+          <a:p>
+            <a:pPr indent="0" marL="0">
+              <a:buNone/>
+            </a:pPr>
+            <a:r>
+              <a:rPr lang="en-US" sz="2000" b="1" dirty="0">
                 <a:solidFill>
                   <a:schemeClr val="accent2"/>
                 </a:solidFill>
               </a:rPr>
-              <a:t>Marketingbudget pro Runde</a:t>
-            </a:r>
-            <a:endParaRPr lang="en-US" sz="1600" dirty="0"/>
+              <a:t>2  Mehrweg-Option</a:t>
+            </a:r>
+            <a:endParaRPr lang="en-US" sz="2000" dirty="0"/>
           </a:p>
           <a:p>
             <a:pPr indent="0" marL="0">
               <a:spcAft>
-                <a:spcPts val="800"/>
+                <a:spcPts val="2200"/>
               </a:spcAft>
               <a:buNone/>
             </a:pPr>
             <a:r>
-              <a:rPr lang="en-US" sz="1400" dirty="0">
+              <a:rPr lang="en-US" sz="1700" dirty="0">
                 <a:solidFill>
                   <a:schemeClr val="bg1"/>
                 </a:solidFill>
               </a:rPr>
-              <a:t>0 / 2.000 / 5.000 € wählen – der Spielleiter erhöht dafür den Absatz.</a:t>
-            </a:r>
-            <a:endParaRPr lang="en-US" sz="1600" dirty="0"/>
+              <a:t>+1.000 € Kosten je Runde → +1 Palette Absatz bei umweltbewussten Kunden</a:t>
+            </a:r>
+            <a:endParaRPr lang="en-US" sz="2000" dirty="0"/>
           </a:p>
           <a:p>
             <a:pPr indent="0" marL="0">
               <a:buNone/>
             </a:pPr>
             <a:r>
-              <a:rPr lang="en-US" sz="1400" i="1" dirty="0">
+              <a:rPr lang="en-US" sz="1600" i="1" dirty="0">
                 <a:solidFill>
                   <a:schemeClr val="bg2"/>
                 </a:solidFill>
               </a:rPr>
-              <a:t>Nur eine Zeile mehr im Kassenbuch.</a:t>
-            </a:r>
-            <a:endParaRPr lang="en-US" sz="1600" dirty="0"/>
+              <a:t>Je nur eine Zeile mehr im Kassenbuch.</a:t>
+            </a:r>
+            <a:endParaRPr lang="en-US" sz="2000" dirty="0"/>
           </a:p>
         </p:txBody>
       </p:sp>
@@ -7397,7 +7221,7 @@
                   <a:schemeClr val="bg2"/>
                 </a:solidFill>
               </a:rPr>
-              <a:t>Daran haben wir jede Entscheidung bei der Gründung gemessen.</a:t>
+              <a:t>Unsere einzige Vorgabe – daran haben wir bei der Gründung alles andere gemessen.</a:t>
             </a:r>
             <a:endParaRPr lang="en-US" sz="3000" dirty="0"/>
           </a:p>
@@ -8854,7 +8678,7 @@
                   <a:schemeClr val="tx1"/>
                 </a:solidFill>
               </a:rPr>
-              <a:t>Hier gebraut, hier abgefüllt – kurze Wege, damit Mehrweg sich lohnt</a:t>
+              <a:t>Hier hergestellt, hier abgefüllt – kurze Wege, damit Mehrweg sich lohnt</a:t>
             </a:r>
             <a:endParaRPr lang="en-US" sz="2000" dirty="0"/>
           </a:p>
@@ -9715,7 +9539,7 @@
         </p:nvGraphicFramePr>
         <p:xfrm>
           <a:off x="640080" y="1371600"/>
-          <a:ext cx="7223760" cy="4800600"/>
+          <a:ext cx="7223760" cy="4434840"/>
         </p:xfrm>
         <a:graphic xmlns:a="http://schemas.openxmlformats.org/drawingml/2006/main">
           <a:graphicData uri="http://schemas.openxmlformats.org/drawingml/2006/chart">
@@ -9725,7 +9549,43 @@
       </p:graphicFrame>
       <p:sp>
         <p:nvSpPr>
-          <p:cNvPr id="15" name="Fakt 100 %"/>
+          <p:cNvPr id="15" name="Text 11"/>
+          <p:cNvSpPr txBox="1"/>
+          <p:nvPr/>
+        </p:nvSpPr>
+        <p:spPr>
+          <a:xfrm>
+            <a:off x="640080" y="5852160"/>
+            <a:ext cx="7223760" cy="320040"/>
+          </a:xfrm>
+          <a:prstGeom prst="rect">
+            <a:avLst/>
+          </a:prstGeom>
+          <a:noFill/>
+          <a:ln/>
+        </p:spPr>
+        <p:txBody>
+          <a:bodyPr wrap="square" lIns="0" tIns="0" rIns="0" bIns="0" rtlCol="0" anchor="ctr"/>
+          <a:lstStyle/>
+          <a:p>
+            <a:pPr indent="0" marL="0">
+              <a:buNone/>
+            </a:pPr>
+            <a:r>
+              <a:rPr lang="en-US" sz="1200" i="1" dirty="0">
+                <a:solidFill>
+                  <a:schemeClr val="accent4"/>
+                </a:solidFill>
+              </a:rPr>
+              <a:t>R4: 0,5 am Markt + 0,5 Schnäppchen · R5: 0,2 + 0,8 · R3 laut Arbeitsblatt 12,6 + 5,6 Paletten</a:t>
+            </a:r>
+            <a:endParaRPr lang="en-US" sz="1200" dirty="0"/>
+          </a:p>
+        </p:txBody>
+      </p:sp>
+      <p:sp>
+        <p:nvSpPr>
+          <p:cNvPr id="16" name="Fakt 100 %"/>
           <p:cNvSpPr/>
           <p:nvPr/>
         </p:nvSpPr>
@@ -9747,7 +9607,7 @@
       </p:sp>
       <p:sp>
         <p:nvSpPr>
-          <p:cNvPr id="16" name="Text 12"/>
+          <p:cNvPr id="17" name="Text 13"/>
           <p:cNvSpPr txBox="1"/>
           <p:nvPr/>
         </p:nvSpPr>
@@ -9786,7 +9646,7 @@
       </p:sp>
       <p:sp>
         <p:nvSpPr>
-          <p:cNvPr id="17" name="Text 13"/>
+          <p:cNvPr id="18" name="Text 14"/>
           <p:cNvSpPr txBox="1"/>
           <p:nvPr/>
         </p:nvSpPr>
@@ -9809,20 +9669,20 @@
               <a:buNone/>
             </a:pPr>
             <a:r>
-              <a:rPr lang="en-US" sz="1400" dirty="0">
+              <a:rPr lang="en-US" sz="1500" dirty="0">
                 <a:solidFill>
                   <a:schemeClr val="tx1"/>
                 </a:solidFill>
               </a:rPr>
               <a:t>verkauft in R1 – zu 3.000 € ging alles weg</a:t>
             </a:r>
-            <a:endParaRPr lang="en-US" sz="1400" dirty="0"/>
-          </a:p>
-        </p:txBody>
-      </p:sp>
-      <p:sp>
-        <p:nvSpPr>
-          <p:cNvPr id="18" name="Fakt 70 %"/>
+            <a:endParaRPr lang="en-US" sz="1500" dirty="0"/>
+          </a:p>
+        </p:txBody>
+      </p:sp>
+      <p:sp>
+        <p:nvSpPr>
+          <p:cNvPr id="19" name="Fakt 70 %"/>
           <p:cNvSpPr/>
           <p:nvPr/>
         </p:nvSpPr>
@@ -9844,7 +9704,7 @@
       </p:sp>
       <p:sp>
         <p:nvSpPr>
-          <p:cNvPr id="19" name="Text 15"/>
+          <p:cNvPr id="20" name="Text 16"/>
           <p:cNvSpPr txBox="1"/>
           <p:nvPr/>
         </p:nvSpPr>
@@ -9883,7 +9743,7 @@
       </p:sp>
       <p:sp>
         <p:nvSpPr>
-          <p:cNvPr id="20" name="Text 16"/>
+          <p:cNvPr id="21" name="Text 17"/>
           <p:cNvSpPr txBox="1"/>
           <p:nvPr/>
         </p:nvSpPr>
@@ -9906,20 +9766,20 @@
               <a:buNone/>
             </a:pPr>
             <a:r>
-              <a:rPr lang="en-US" sz="1400" dirty="0">
+              <a:rPr lang="en-US" sz="1500" dirty="0">
                 <a:solidFill>
                   <a:schemeClr val="tx1"/>
                 </a:solidFill>
               </a:rPr>
               <a:t>verkauft in R3 bei 5.900 € – unsere beste Runde</a:t>
             </a:r>
-            <a:endParaRPr lang="en-US" sz="1400" dirty="0"/>
-          </a:p>
-        </p:txBody>
-      </p:sp>
-      <p:sp>
-        <p:nvSpPr>
-          <p:cNvPr id="21" name="Fakt 1 Palette"/>
+            <a:endParaRPr lang="en-US" sz="1500" dirty="0"/>
+          </a:p>
+        </p:txBody>
+      </p:sp>
+      <p:sp>
+        <p:nvSpPr>
+          <p:cNvPr id="22" name="Fakt 1 Palette"/>
           <p:cNvSpPr/>
           <p:nvPr/>
         </p:nvSpPr>
@@ -9941,7 +9801,7 @@
       </p:sp>
       <p:sp>
         <p:nvSpPr>
-          <p:cNvPr id="22" name="Text 18"/>
+          <p:cNvPr id="23" name="Text 19"/>
           <p:cNvSpPr txBox="1"/>
           <p:nvPr/>
         </p:nvSpPr>
@@ -9980,7 +9840,7 @@
       </p:sp>
       <p:sp>
         <p:nvSpPr>
-          <p:cNvPr id="23" name="Text 19"/>
+          <p:cNvPr id="24" name="Text 20"/>
           <p:cNvSpPr txBox="1"/>
           <p:nvPr/>
         </p:nvSpPr>
@@ -10003,14 +9863,14 @@
               <a:buNone/>
             </a:pPr>
             <a:r>
-              <a:rPr lang="en-US" sz="1400" dirty="0">
+              <a:rPr lang="en-US" sz="1500" dirty="0">
                 <a:solidFill>
                   <a:schemeClr val="tx1"/>
                 </a:solidFill>
               </a:rPr>
               <a:t>in R4 und R5 – wir erwarteten kaum Absatz</a:t>
             </a:r>
-            <a:endParaRPr lang="en-US" sz="1400" dirty="0"/>
+            <a:endParaRPr lang="en-US" sz="1500" dirty="0"/>
           </a:p>
         </p:txBody>
       </p:sp>
@@ -10566,8 +10426,8 @@
         </p:nvSpPr>
         <p:spPr>
           <a:xfrm>
-            <a:off x="868680" y="2148840"/>
-            <a:ext cx="3063240" cy="868680"/>
+            <a:off x="868680" y="2176272"/>
+            <a:ext cx="3063240" cy="822960"/>
           </a:xfrm>
           <a:prstGeom prst="rect">
             <a:avLst/>
@@ -10583,12 +10443,70 @@
               <a:buNone/>
             </a:pPr>
             <a:r>
-              <a:rPr lang="en-US" sz="1400" dirty="0">
+              <a:rPr lang="en-US" sz="1500" dirty="0">
                 <a:solidFill>
                   <a:schemeClr val="tx1"/>
                 </a:solidFill>
               </a:rPr>
-              <a:t>Economy statt Standard. Günstig starten, alles verkaufen, Preise der anderen beobachten.</a:t>
+              <a:t>Economy statt Standard. Günstig starten und alles verkaufen.</a:t>
+            </a:r>
+            <a:endParaRPr lang="en-US" sz="1500" dirty="0"/>
+          </a:p>
+        </p:txBody>
+      </p:sp>
+      <p:sp>
+        <p:nvSpPr>
+          <p:cNvPr id="20" name="Ergebnis R1"/>
+          <p:cNvSpPr/>
+          <p:nvPr/>
+        </p:nvSpPr>
+        <p:spPr>
+          <a:xfrm>
+            <a:off x="868680" y="3063240"/>
+            <a:ext cx="3063240" cy="411480"/>
+          </a:xfrm>
+          <a:prstGeom prst="roundRect">
+            <a:avLst>
+              <a:gd name="adj" fmla="val 13333"/>
+            </a:avLst>
+          </a:prstGeom>
+          <a:solidFill>
+            <a:schemeClr val="bg1"/>
+          </a:solidFill>
+          <a:ln/>
+        </p:spPr>
+      </p:sp>
+      <p:sp>
+        <p:nvSpPr>
+          <p:cNvPr id="21" name="Text 18"/>
+          <p:cNvSpPr txBox="1"/>
+          <p:nvPr/>
+        </p:nvSpPr>
+        <p:spPr>
+          <a:xfrm>
+            <a:off x="960120" y="3063240"/>
+            <a:ext cx="2880360" cy="411480"/>
+          </a:xfrm>
+          <a:prstGeom prst="rect">
+            <a:avLst/>
+          </a:prstGeom>
+          <a:noFill/>
+          <a:ln/>
+        </p:spPr>
+        <p:txBody>
+          <a:bodyPr wrap="square" lIns="0" tIns="0" rIns="0" bIns="0" rtlCol="0" anchor="ctr"/>
+          <a:lstStyle/>
+          <a:p>
+            <a:pPr indent="0" marL="0">
+              <a:buNone/>
+            </a:pPr>
+            <a:r>
+              <a:rPr lang="en-US" sz="1400" b="1" dirty="0">
+                <a:solidFill>
+                  <a:schemeClr val="tx2"/>
+                </a:solidFill>
+              </a:rPr>
+              <a:t>Ergebnis −24.000 € → Kasse 76.000 €</a:t>
             </a:r>
             <a:endParaRPr lang="en-US" sz="1400" dirty="0"/>
           </a:p>
@@ -10596,57 +10514,7 @@
       </p:sp>
       <p:sp>
         <p:nvSpPr>
-          <p:cNvPr id="20" name="Text 17"/>
-          <p:cNvSpPr txBox="1"/>
-          <p:nvPr/>
-        </p:nvSpPr>
-        <p:spPr>
-          <a:xfrm>
-            <a:off x="868680" y="3017520"/>
-            <a:ext cx="3063240" cy="548640"/>
-          </a:xfrm>
-          <a:prstGeom prst="rect">
-            <a:avLst/>
-          </a:prstGeom>
-          <a:noFill/>
-          <a:ln/>
-        </p:spPr>
-        <p:txBody>
-          <a:bodyPr wrap="square" lIns="0" tIns="0" rIns="0" bIns="0" rtlCol="0" anchor="t"/>
-          <a:lstStyle/>
-          <a:p>
-            <a:pPr indent="0" marL="0">
-              <a:buNone/>
-            </a:pPr>
-            <a:r>
-              <a:rPr lang="en-US" sz="1300" dirty="0">
-                <a:solidFill>
-                  <a:schemeClr val="tx1"/>
-                </a:solidFill>
-              </a:rPr>
-              <a:t>15 von 15 Paletten am Markt verkauft</a:t>
-            </a:r>
-            <a:endParaRPr lang="en-US" sz="1300" dirty="0"/>
-          </a:p>
-          <a:p>
-            <a:pPr indent="0" marL="0">
-              <a:buNone/>
-            </a:pPr>
-            <a:r>
-              <a:rPr lang="en-US" sz="1300" b="1" dirty="0">
-                <a:solidFill>
-                  <a:schemeClr val="tx2"/>
-                </a:solidFill>
-              </a:rPr>
-              <a:t>Ergebnis −24.000 € → Kasse 76.000 €</a:t>
-            </a:r>
-            <a:endParaRPr lang="en-US" sz="1300" dirty="0"/>
-          </a:p>
-        </p:txBody>
-      </p:sp>
-      <p:sp>
-        <p:nvSpPr>
-          <p:cNvPr id="21" name="Runde 2"/>
+          <p:cNvPr id="22" name="Runde 2"/>
           <p:cNvSpPr/>
           <p:nvPr/>
         </p:nvSpPr>
@@ -10668,7 +10536,7 @@
       </p:sp>
       <p:sp>
         <p:nvSpPr>
-          <p:cNvPr id="22" name="Nr R2"/>
+          <p:cNvPr id="23" name="Nr R2"/>
           <p:cNvSpPr/>
           <p:nvPr/>
         </p:nvSpPr>
@@ -10688,7 +10556,7 @@
       </p:sp>
       <p:sp>
         <p:nvSpPr>
-          <p:cNvPr id="23" name="Text 20"/>
+          <p:cNvPr id="24" name="Text 21"/>
           <p:cNvSpPr txBox="1"/>
           <p:nvPr/>
         </p:nvSpPr>
@@ -10724,7 +10592,7 @@
       </p:sp>
       <p:sp>
         <p:nvSpPr>
-          <p:cNvPr id="24" name="Text 21"/>
+          <p:cNvPr id="25" name="Text 22"/>
           <p:cNvSpPr txBox="1"/>
           <p:nvPr/>
         </p:nvSpPr>
@@ -10760,7 +10628,7 @@
       </p:sp>
       <p:sp>
         <p:nvSpPr>
-          <p:cNvPr id="25" name="Text 22"/>
+          <p:cNvPr id="26" name="Text 23"/>
           <p:cNvSpPr txBox="1"/>
           <p:nvPr/>
         </p:nvSpPr>
@@ -10799,50 +10667,14 @@
       </p:sp>
       <p:sp>
         <p:nvSpPr>
-          <p:cNvPr id="26" name="Text 23"/>
-          <p:cNvSpPr txBox="1"/>
-          <p:nvPr/>
-        </p:nvSpPr>
-        <p:spPr>
-          <a:xfrm>
-            <a:off x="4549140" y="2148840"/>
-            <a:ext cx="3063240" cy="868680"/>
-          </a:xfrm>
-          <a:prstGeom prst="rect">
-            <a:avLst/>
-          </a:prstGeom>
-          <a:noFill/>
-          <a:ln/>
-        </p:spPr>
-        <p:txBody>
-          <a:bodyPr wrap="square" lIns="0" tIns="0" rIns="0" bIns="0" rtlCol="0" anchor="t"/>
-          <a:lstStyle/>
-          <a:p>
-            <a:pPr indent="0" marL="0">
-              <a:buNone/>
-            </a:pPr>
-            <a:r>
-              <a:rPr lang="en-US" sz="1400" dirty="0">
-                <a:solidFill>
-                  <a:schemeClr val="tx1"/>
-                </a:solidFill>
-              </a:rPr>
-              <a:t>Alles war weg – die anderen sind wohl teurer. Preis drastisch erhöht; 2. Maschine gekauft, aber noch ohne Personal.</a:t>
-            </a:r>
-            <a:endParaRPr lang="en-US" sz="1400" dirty="0"/>
-          </a:p>
-        </p:txBody>
-      </p:sp>
-      <p:sp>
-        <p:nvSpPr>
           <p:cNvPr id="27" name="Text 24"/>
           <p:cNvSpPr txBox="1"/>
           <p:nvPr/>
         </p:nvSpPr>
         <p:spPr>
           <a:xfrm>
-            <a:off x="4549140" y="3017520"/>
-            <a:ext cx="3063240" cy="548640"/>
+            <a:off x="4549140" y="2176272"/>
+            <a:ext cx="3063240" cy="822960"/>
           </a:xfrm>
           <a:prstGeom prst="rect">
             <a:avLst/>
@@ -10858,34 +10690,78 @@
               <a:buNone/>
             </a:pPr>
             <a:r>
-              <a:rPr lang="en-US" sz="1300" dirty="0">
+              <a:rPr lang="en-US" sz="1500" dirty="0">
                 <a:solidFill>
                   <a:schemeClr val="tx1"/>
                 </a:solidFill>
               </a:rPr>
-              <a:t>6,5 von 13 Paletten am Markt verkauft</a:t>
-            </a:r>
-            <a:endParaRPr lang="en-US" sz="1300" dirty="0"/>
-          </a:p>
+              <a:t>Alles war weg → Preis drastisch erhöht. 2. Maschine gekauft, noch ohne Personal.</a:t>
+            </a:r>
+            <a:endParaRPr lang="en-US" sz="1500" dirty="0"/>
+          </a:p>
+        </p:txBody>
+      </p:sp>
+      <p:sp>
+        <p:nvSpPr>
+          <p:cNvPr id="28" name="Ergebnis R2"/>
+          <p:cNvSpPr/>
+          <p:nvPr/>
+        </p:nvSpPr>
+        <p:spPr>
+          <a:xfrm>
+            <a:off x="4549140" y="3063240"/>
+            <a:ext cx="3063240" cy="411480"/>
+          </a:xfrm>
+          <a:prstGeom prst="roundRect">
+            <a:avLst>
+              <a:gd name="adj" fmla="val 13333"/>
+            </a:avLst>
+          </a:prstGeom>
+          <a:solidFill>
+            <a:schemeClr val="bg1"/>
+          </a:solidFill>
+          <a:ln/>
+        </p:spPr>
+      </p:sp>
+      <p:sp>
+        <p:nvSpPr>
+          <p:cNvPr id="29" name="Text 26"/>
+          <p:cNvSpPr txBox="1"/>
+          <p:nvPr/>
+        </p:nvSpPr>
+        <p:spPr>
+          <a:xfrm>
+            <a:off x="4640580" y="3063240"/>
+            <a:ext cx="2880360" cy="411480"/>
+          </a:xfrm>
+          <a:prstGeom prst="rect">
+            <a:avLst/>
+          </a:prstGeom>
+          <a:noFill/>
+          <a:ln/>
+        </p:spPr>
+        <p:txBody>
+          <a:bodyPr wrap="square" lIns="0" tIns="0" rIns="0" bIns="0" rtlCol="0" anchor="ctr"/>
+          <a:lstStyle/>
           <a:p>
             <a:pPr indent="0" marL="0">
               <a:buNone/>
             </a:pPr>
             <a:r>
-              <a:rPr lang="en-US" sz="1300" b="1" dirty="0">
+              <a:rPr lang="en-US" sz="1400" b="1" dirty="0">
                 <a:solidFill>
                   <a:schemeClr val="tx2"/>
                 </a:solidFill>
               </a:rPr>
               <a:t>Ergebnis −19.100 € → Kasse 56.900 €</a:t>
             </a:r>
-            <a:endParaRPr lang="en-US" sz="1300" dirty="0"/>
-          </a:p>
-        </p:txBody>
-      </p:sp>
-      <p:sp>
-        <p:nvSpPr>
-          <p:cNvPr id="28" name="Runde 3"/>
+            <a:endParaRPr lang="en-US" sz="1400" dirty="0"/>
+          </a:p>
+        </p:txBody>
+      </p:sp>
+      <p:sp>
+        <p:nvSpPr>
+          <p:cNvPr id="30" name="Runde 3"/>
           <p:cNvSpPr/>
           <p:nvPr/>
         </p:nvSpPr>
@@ -10907,7 +10783,7 @@
       </p:sp>
       <p:sp>
         <p:nvSpPr>
-          <p:cNvPr id="29" name="Nr R3"/>
+          <p:cNvPr id="31" name="Nr R3"/>
           <p:cNvSpPr/>
           <p:nvPr/>
         </p:nvSpPr>
@@ -10927,7 +10803,7 @@
       </p:sp>
       <p:sp>
         <p:nvSpPr>
-          <p:cNvPr id="30" name="Text 27"/>
+          <p:cNvPr id="32" name="Text 29"/>
           <p:cNvSpPr txBox="1"/>
           <p:nvPr/>
         </p:nvSpPr>
@@ -10963,7 +10839,7 @@
       </p:sp>
       <p:sp>
         <p:nvSpPr>
-          <p:cNvPr id="31" name="Text 28"/>
+          <p:cNvPr id="33" name="Text 30"/>
           <p:cNvSpPr txBox="1"/>
           <p:nvPr/>
         </p:nvSpPr>
@@ -10999,7 +10875,7 @@
       </p:sp>
       <p:sp>
         <p:nvSpPr>
-          <p:cNvPr id="32" name="Text 29"/>
+          <p:cNvPr id="34" name="Text 31"/>
           <p:cNvSpPr txBox="1"/>
           <p:nvPr/>
         </p:nvSpPr>
@@ -11038,14 +10914,14 @@
       </p:sp>
       <p:sp>
         <p:nvSpPr>
-          <p:cNvPr id="33" name="Text 30"/>
+          <p:cNvPr id="35" name="Text 32"/>
           <p:cNvSpPr txBox="1"/>
           <p:nvPr/>
         </p:nvSpPr>
         <p:spPr>
           <a:xfrm>
-            <a:off x="8229600" y="2148840"/>
-            <a:ext cx="3063240" cy="868680"/>
+            <a:off x="8229600" y="2176272"/>
+            <a:ext cx="3063240" cy="822960"/>
           </a:xfrm>
           <a:prstGeom prst="rect">
             <a:avLst/>
@@ -11061,12 +10937,70 @@
               <a:buNone/>
             </a:pPr>
             <a:r>
-              <a:rPr lang="en-US" sz="1400" dirty="0">
+              <a:rPr lang="en-US" sz="1500" dirty="0">
                 <a:solidFill>
                   <a:schemeClr val="tx1"/>
                 </a:solidFill>
               </a:rPr>
-              <a:t>7.600 € war zu viel. Konkurrenz um 6.000 € vermutet – knapp darunter angeboten.</a:t>
+              <a:t>Knapp unter den vermuteten 6.000 € der Konkurrenz. 2. Mitarbeiter → Maschine 2 läuft.</a:t>
+            </a:r>
+            <a:endParaRPr lang="en-US" sz="1500" dirty="0"/>
+          </a:p>
+        </p:txBody>
+      </p:sp>
+      <p:sp>
+        <p:nvSpPr>
+          <p:cNvPr id="36" name="Ergebnis R3"/>
+          <p:cNvSpPr/>
+          <p:nvPr/>
+        </p:nvSpPr>
+        <p:spPr>
+          <a:xfrm>
+            <a:off x="8229600" y="3063240"/>
+            <a:ext cx="3063240" cy="411480"/>
+          </a:xfrm>
+          <a:prstGeom prst="roundRect">
+            <a:avLst>
+              <a:gd name="adj" fmla="val 13333"/>
+            </a:avLst>
+          </a:prstGeom>
+          <a:solidFill>
+            <a:srgbClr val="E3EFCF"/>
+          </a:solidFill>
+          <a:ln/>
+        </p:spPr>
+      </p:sp>
+      <p:sp>
+        <p:nvSpPr>
+          <p:cNvPr id="37" name="Text 34"/>
+          <p:cNvSpPr txBox="1"/>
+          <p:nvPr/>
+        </p:nvSpPr>
+        <p:spPr>
+          <a:xfrm>
+            <a:off x="8321040" y="3063240"/>
+            <a:ext cx="2880360" cy="411480"/>
+          </a:xfrm>
+          <a:prstGeom prst="rect">
+            <a:avLst/>
+          </a:prstGeom>
+          <a:noFill/>
+          <a:ln/>
+        </p:spPr>
+        <p:txBody>
+          <a:bodyPr wrap="square" lIns="0" tIns="0" rIns="0" bIns="0" rtlCol="0" anchor="ctr"/>
+          <a:lstStyle/>
+          <a:p>
+            <a:pPr indent="0" marL="0">
+              <a:buNone/>
+            </a:pPr>
+            <a:r>
+              <a:rPr lang="en-US" sz="1400" b="1" dirty="0">
+                <a:solidFill>
+                  <a:srgbClr val="3D6610"/>
+                </a:solidFill>
+              </a:rPr>
+              <a:t>Ergebnis +25.940 € → Kasse 82.840 €</a:t>
             </a:r>
             <a:endParaRPr lang="en-US" sz="1400" dirty="0"/>
           </a:p>
@@ -11074,57 +11008,7 @@
       </p:sp>
       <p:sp>
         <p:nvSpPr>
-          <p:cNvPr id="34" name="Text 31"/>
-          <p:cNvSpPr txBox="1"/>
-          <p:nvPr/>
-        </p:nvSpPr>
-        <p:spPr>
-          <a:xfrm>
-            <a:off x="8229600" y="3017520"/>
-            <a:ext cx="3063240" cy="548640"/>
-          </a:xfrm>
-          <a:prstGeom prst="rect">
-            <a:avLst/>
-          </a:prstGeom>
-          <a:noFill/>
-          <a:ln/>
-        </p:spPr>
-        <p:txBody>
-          <a:bodyPr wrap="square" lIns="0" tIns="0" rIns="0" bIns="0" rtlCol="0" anchor="t"/>
-          <a:lstStyle/>
-          <a:p>
-            <a:pPr indent="0" marL="0">
-              <a:buNone/>
-            </a:pPr>
-            <a:r>
-              <a:rPr lang="en-US" sz="1300" dirty="0">
-                <a:solidFill>
-                  <a:schemeClr val="tx1"/>
-                </a:solidFill>
-              </a:rPr>
-              <a:t>12,6 von 18 Paletten am Markt verkauft</a:t>
-            </a:r>
-            <a:endParaRPr lang="en-US" sz="1300" dirty="0"/>
-          </a:p>
-          <a:p>
-            <a:pPr indent="0" marL="0">
-              <a:buNone/>
-            </a:pPr>
-            <a:r>
-              <a:rPr lang="en-US" sz="1300" b="1" dirty="0">
-                <a:solidFill>
-                  <a:srgbClr val="3D6610"/>
-                </a:solidFill>
-              </a:rPr>
-              <a:t>Ergebnis +25.940 € → Kasse 82.840 €</a:t>
-            </a:r>
-            <a:endParaRPr lang="en-US" sz="1300" dirty="0"/>
-          </a:p>
-        </p:txBody>
-      </p:sp>
-      <p:sp>
-        <p:nvSpPr>
-          <p:cNvPr id="35" name="Runde 4"/>
+          <p:cNvPr id="38" name="Runde 4"/>
           <p:cNvSpPr/>
           <p:nvPr/>
         </p:nvSpPr>
@@ -11146,7 +11030,7 @@
       </p:sp>
       <p:sp>
         <p:nvSpPr>
-          <p:cNvPr id="36" name="Nr R4"/>
+          <p:cNvPr id="39" name="Nr R4"/>
           <p:cNvSpPr/>
           <p:nvPr/>
         </p:nvSpPr>
@@ -11166,7 +11050,7 @@
       </p:sp>
       <p:sp>
         <p:nvSpPr>
-          <p:cNvPr id="37" name="Text 34"/>
+          <p:cNvPr id="40" name="Text 37"/>
           <p:cNvSpPr txBox="1"/>
           <p:nvPr/>
         </p:nvSpPr>
@@ -11202,7 +11086,7 @@
       </p:sp>
       <p:sp>
         <p:nvSpPr>
-          <p:cNvPr id="38" name="Text 35"/>
+          <p:cNvPr id="41" name="Text 38"/>
           <p:cNvSpPr txBox="1"/>
           <p:nvPr/>
         </p:nvSpPr>
@@ -11238,7 +11122,7 @@
       </p:sp>
       <p:sp>
         <p:nvSpPr>
-          <p:cNvPr id="39" name="Text 36"/>
+          <p:cNvPr id="42" name="Text 39"/>
           <p:cNvSpPr txBox="1"/>
           <p:nvPr/>
         </p:nvSpPr>
@@ -11277,14 +11161,14 @@
       </p:sp>
       <p:sp>
         <p:nvSpPr>
-          <p:cNvPr id="40" name="Text 37"/>
+          <p:cNvPr id="43" name="Text 40"/>
           <p:cNvSpPr txBox="1"/>
           <p:nvPr/>
         </p:nvSpPr>
         <p:spPr>
           <a:xfrm>
-            <a:off x="868680" y="4572000"/>
-            <a:ext cx="3063240" cy="868680"/>
+            <a:off x="868680" y="4599432"/>
+            <a:ext cx="3063240" cy="822960"/>
           </a:xfrm>
           <a:prstGeom prst="rect">
             <a:avLst/>
@@ -11300,12 +11184,70 @@
               <a:buNone/>
             </a:pPr>
             <a:r>
-              <a:rPr lang="en-US" sz="1400" dirty="0">
+              <a:rPr lang="en-US" sz="1500" dirty="0">
                 <a:solidFill>
                   <a:schemeClr val="tx1"/>
                 </a:solidFill>
               </a:rPr>
-              <a:t>Weniger Absatz erwartet („Beliebtheit nicht dauerhaft“). Nur 1 Palette, um kein Minus zu machen.</a:t>
+              <a:t>Weniger Absatz erwartet („Beliebtheit nicht dauerhaft“) → nur 1 Palette.</a:t>
+            </a:r>
+            <a:endParaRPr lang="en-US" sz="1500" dirty="0"/>
+          </a:p>
+        </p:txBody>
+      </p:sp>
+      <p:sp>
+        <p:nvSpPr>
+          <p:cNvPr id="44" name="Ergebnis R4"/>
+          <p:cNvSpPr/>
+          <p:nvPr/>
+        </p:nvSpPr>
+        <p:spPr>
+          <a:xfrm>
+            <a:off x="868680" y="5486400"/>
+            <a:ext cx="3063240" cy="411480"/>
+          </a:xfrm>
+          <a:prstGeom prst="roundRect">
+            <a:avLst>
+              <a:gd name="adj" fmla="val 13333"/>
+            </a:avLst>
+          </a:prstGeom>
+          <a:solidFill>
+            <a:schemeClr val="bg1"/>
+          </a:solidFill>
+          <a:ln/>
+        </p:spPr>
+      </p:sp>
+      <p:sp>
+        <p:nvSpPr>
+          <p:cNvPr id="45" name="Text 42"/>
+          <p:cNvSpPr txBox="1"/>
+          <p:nvPr/>
+        </p:nvSpPr>
+        <p:spPr>
+          <a:xfrm>
+            <a:off x="960120" y="5486400"/>
+            <a:ext cx="2880360" cy="411480"/>
+          </a:xfrm>
+          <a:prstGeom prst="rect">
+            <a:avLst/>
+          </a:prstGeom>
+          <a:noFill/>
+          <a:ln/>
+        </p:spPr>
+        <p:txBody>
+          <a:bodyPr wrap="square" lIns="0" tIns="0" rIns="0" bIns="0" rtlCol="0" anchor="ctr"/>
+          <a:lstStyle/>
+          <a:p>
+            <a:pPr indent="0" marL="0">
+              <a:buNone/>
+            </a:pPr>
+            <a:r>
+              <a:rPr lang="en-US" sz="1400" b="1" dirty="0">
+                <a:solidFill>
+                  <a:schemeClr val="tx2"/>
+                </a:solidFill>
+              </a:rPr>
+              <a:t>Ergebnis −12.750 € → Kasse 70.090 €</a:t>
             </a:r>
             <a:endParaRPr lang="en-US" sz="1400" dirty="0"/>
           </a:p>
@@ -11313,57 +11255,7 @@
       </p:sp>
       <p:sp>
         <p:nvSpPr>
-          <p:cNvPr id="41" name="Text 38"/>
-          <p:cNvSpPr txBox="1"/>
-          <p:nvPr/>
-        </p:nvSpPr>
-        <p:spPr>
-          <a:xfrm>
-            <a:off x="868680" y="5440680"/>
-            <a:ext cx="3063240" cy="548640"/>
-          </a:xfrm>
-          <a:prstGeom prst="rect">
-            <a:avLst/>
-          </a:prstGeom>
-          <a:noFill/>
-          <a:ln/>
-        </p:spPr>
-        <p:txBody>
-          <a:bodyPr wrap="square" lIns="0" tIns="0" rIns="0" bIns="0" rtlCol="0" anchor="t"/>
-          <a:lstStyle/>
-          <a:p>
-            <a:pPr indent="0" marL="0">
-              <a:buNone/>
-            </a:pPr>
-            <a:r>
-              <a:rPr lang="en-US" sz="1300" dirty="0">
-                <a:solidFill>
-                  <a:schemeClr val="tx1"/>
-                </a:solidFill>
-              </a:rPr>
-              <a:t>0,5 von 1 Palette am Markt verkauft</a:t>
-            </a:r>
-            <a:endParaRPr lang="en-US" sz="1300" dirty="0"/>
-          </a:p>
-          <a:p>
-            <a:pPr indent="0" marL="0">
-              <a:buNone/>
-            </a:pPr>
-            <a:r>
-              <a:rPr lang="en-US" sz="1300" b="1" dirty="0">
-                <a:solidFill>
-                  <a:schemeClr val="tx2"/>
-                </a:solidFill>
-              </a:rPr>
-              <a:t>Ergebnis −12.750 € → Kasse 70.090 €</a:t>
-            </a:r>
-            <a:endParaRPr lang="en-US" sz="1300" dirty="0"/>
-          </a:p>
-        </p:txBody>
-      </p:sp>
-      <p:sp>
-        <p:nvSpPr>
-          <p:cNvPr id="42" name="Runde 5"/>
+          <p:cNvPr id="46" name="Runde 5"/>
           <p:cNvSpPr/>
           <p:nvPr/>
         </p:nvSpPr>
@@ -11385,7 +11277,7 @@
       </p:sp>
       <p:sp>
         <p:nvSpPr>
-          <p:cNvPr id="43" name="Nr R5"/>
+          <p:cNvPr id="47" name="Nr R5"/>
           <p:cNvSpPr/>
           <p:nvPr/>
         </p:nvSpPr>
@@ -11405,7 +11297,7 @@
       </p:sp>
       <p:sp>
         <p:nvSpPr>
-          <p:cNvPr id="44" name="Text 41"/>
+          <p:cNvPr id="48" name="Text 45"/>
           <p:cNvSpPr txBox="1"/>
           <p:nvPr/>
         </p:nvSpPr>
@@ -11441,7 +11333,7 @@
       </p:sp>
       <p:sp>
         <p:nvSpPr>
-          <p:cNvPr id="45" name="Text 42"/>
+          <p:cNvPr id="49" name="Text 46"/>
           <p:cNvSpPr txBox="1"/>
           <p:nvPr/>
         </p:nvSpPr>
@@ -11477,7 +11369,7 @@
       </p:sp>
       <p:sp>
         <p:nvSpPr>
-          <p:cNvPr id="46" name="Text 43"/>
+          <p:cNvPr id="50" name="Text 47"/>
           <p:cNvSpPr txBox="1"/>
           <p:nvPr/>
         </p:nvSpPr>
@@ -11516,14 +11408,14 @@
       </p:sp>
       <p:sp>
         <p:nvSpPr>
-          <p:cNvPr id="47" name="Text 44"/>
+          <p:cNvPr id="51" name="Text 48"/>
           <p:cNvSpPr txBox="1"/>
           <p:nvPr/>
         </p:nvSpPr>
         <p:spPr>
           <a:xfrm>
-            <a:off x="4549140" y="4572000"/>
-            <a:ext cx="3063240" cy="868680"/>
+            <a:off x="4549140" y="4599432"/>
+            <a:ext cx="3063240" cy="822960"/>
           </a:xfrm>
           <a:prstGeom prst="rect">
             <a:avLst/>
@@ -11539,12 +11431,70 @@
               <a:buNone/>
             </a:pPr>
             <a:r>
-              <a:rPr lang="en-US" sz="1400" dirty="0">
+              <a:rPr lang="en-US" sz="1500" dirty="0">
                 <a:solidFill>
                   <a:schemeClr val="tx1"/>
                 </a:solidFill>
               </a:rPr>
-              <a:t>Marktanalyse sagte weniger Absatz voraus. Wieder nur 1 Palette.</a:t>
+              <a:t>Marktanalyse sagte weniger Absatz voraus → wieder nur 1 Palette.</a:t>
+            </a:r>
+            <a:endParaRPr lang="en-US" sz="1500" dirty="0"/>
+          </a:p>
+        </p:txBody>
+      </p:sp>
+      <p:sp>
+        <p:nvSpPr>
+          <p:cNvPr id="52" name="Ergebnis R5"/>
+          <p:cNvSpPr/>
+          <p:nvPr/>
+        </p:nvSpPr>
+        <p:spPr>
+          <a:xfrm>
+            <a:off x="4549140" y="5486400"/>
+            <a:ext cx="3063240" cy="411480"/>
+          </a:xfrm>
+          <a:prstGeom prst="roundRect">
+            <a:avLst>
+              <a:gd name="adj" fmla="val 13333"/>
+            </a:avLst>
+          </a:prstGeom>
+          <a:solidFill>
+            <a:schemeClr val="bg1"/>
+          </a:solidFill>
+          <a:ln/>
+        </p:spPr>
+      </p:sp>
+      <p:sp>
+        <p:nvSpPr>
+          <p:cNvPr id="53" name="Text 50"/>
+          <p:cNvSpPr txBox="1"/>
+          <p:nvPr/>
+        </p:nvSpPr>
+        <p:spPr>
+          <a:xfrm>
+            <a:off x="4640580" y="5486400"/>
+            <a:ext cx="2880360" cy="411480"/>
+          </a:xfrm>
+          <a:prstGeom prst="rect">
+            <a:avLst/>
+          </a:prstGeom>
+          <a:noFill/>
+          <a:ln/>
+        </p:spPr>
+        <p:txBody>
+          <a:bodyPr wrap="square" lIns="0" tIns="0" rIns="0" bIns="0" rtlCol="0" anchor="ctr"/>
+          <a:lstStyle/>
+          <a:p>
+            <a:pPr indent="0" marL="0">
+              <a:buNone/>
+            </a:pPr>
+            <a:r>
+              <a:rPr lang="en-US" sz="1400" b="1" dirty="0">
+                <a:solidFill>
+                  <a:schemeClr val="tx2"/>
+                </a:solidFill>
+              </a:rPr>
+              <a:t>Ergebnis −22.300 € → Kasse 47.790 €</a:t>
             </a:r>
             <a:endParaRPr lang="en-US" sz="1400" dirty="0"/>
           </a:p>
@@ -11552,57 +11502,7 @@
       </p:sp>
       <p:sp>
         <p:nvSpPr>
-          <p:cNvPr id="48" name="Text 45"/>
-          <p:cNvSpPr txBox="1"/>
-          <p:nvPr/>
-        </p:nvSpPr>
-        <p:spPr>
-          <a:xfrm>
-            <a:off x="4549140" y="5440680"/>
-            <a:ext cx="3063240" cy="548640"/>
-          </a:xfrm>
-          <a:prstGeom prst="rect">
-            <a:avLst/>
-          </a:prstGeom>
-          <a:noFill/>
-          <a:ln/>
-        </p:spPr>
-        <p:txBody>
-          <a:bodyPr wrap="square" lIns="0" tIns="0" rIns="0" bIns="0" rtlCol="0" anchor="t"/>
-          <a:lstStyle/>
-          <a:p>
-            <a:pPr indent="0" marL="0">
-              <a:buNone/>
-            </a:pPr>
-            <a:r>
-              <a:rPr lang="en-US" sz="1300" dirty="0">
-                <a:solidFill>
-                  <a:schemeClr val="tx1"/>
-                </a:solidFill>
-              </a:rPr>
-              <a:t>0,2 von 1 Palette am Markt verkauft</a:t>
-            </a:r>
-            <a:endParaRPr lang="en-US" sz="1300" dirty="0"/>
-          </a:p>
-          <a:p>
-            <a:pPr indent="0" marL="0">
-              <a:buNone/>
-            </a:pPr>
-            <a:r>
-              <a:rPr lang="en-US" sz="1300" b="1" dirty="0">
-                <a:solidFill>
-                  <a:schemeClr val="tx2"/>
-                </a:solidFill>
-              </a:rPr>
-              <a:t>Ergebnis −22.300 € → Kasse 47.790 €</a:t>
-            </a:r>
-            <a:endParaRPr lang="en-US" sz="1300" dirty="0"/>
-          </a:p>
-        </p:txBody>
-      </p:sp>
-      <p:sp>
-        <p:nvSpPr>
-          <p:cNvPr id="49" name="Runde 6"/>
+          <p:cNvPr id="54" name="Runde 6"/>
           <p:cNvSpPr/>
           <p:nvPr/>
         </p:nvSpPr>
@@ -11624,7 +11524,7 @@
       </p:sp>
       <p:sp>
         <p:nvSpPr>
-          <p:cNvPr id="50" name="Nr R6"/>
+          <p:cNvPr id="55" name="Nr R6"/>
           <p:cNvSpPr/>
           <p:nvPr/>
         </p:nvSpPr>
@@ -11644,7 +11544,7 @@
       </p:sp>
       <p:sp>
         <p:nvSpPr>
-          <p:cNvPr id="51" name="Text 48"/>
+          <p:cNvPr id="56" name="Text 53"/>
           <p:cNvSpPr txBox="1"/>
           <p:nvPr/>
         </p:nvSpPr>
@@ -11680,7 +11580,7 @@
       </p:sp>
       <p:sp>
         <p:nvSpPr>
-          <p:cNvPr id="52" name="Text 49"/>
+          <p:cNvPr id="57" name="Text 54"/>
           <p:cNvSpPr txBox="1"/>
           <p:nvPr/>
         </p:nvSpPr>
@@ -11716,7 +11616,7 @@
       </p:sp>
       <p:sp>
         <p:nvSpPr>
-          <p:cNvPr id="53" name="Text 50"/>
+          <p:cNvPr id="58" name="Text 55"/>
           <p:cNvSpPr txBox="1"/>
           <p:nvPr/>
         </p:nvSpPr>
@@ -11755,14 +11655,14 @@
       </p:sp>
       <p:sp>
         <p:nvSpPr>
-          <p:cNvPr id="54" name="Text 51"/>
+          <p:cNvPr id="59" name="Text 56"/>
           <p:cNvSpPr txBox="1"/>
           <p:nvPr/>
         </p:nvSpPr>
         <p:spPr>
           <a:xfrm>
-            <a:off x="8229600" y="4572000"/>
-            <a:ext cx="3063240" cy="868680"/>
+            <a:off x="8229600" y="4599432"/>
+            <a:ext cx="3063240" cy="822960"/>
           </a:xfrm>
           <a:prstGeom prst="rect">
             <a:avLst/>
@@ -11778,64 +11678,72 @@
               <a:buNone/>
             </a:pPr>
             <a:r>
-              <a:rPr lang="en-US" sz="1400" dirty="0">
+              <a:rPr lang="en-US" sz="1500" dirty="0">
                 <a:solidFill>
                   <a:schemeClr val="tx1"/>
                 </a:solidFill>
               </a:rPr>
-              <a:t>Letzte Runde: noch einmal produzieren und Umsatz machen.</a:t>
+              <a:t>Letzte Runde: noch einmal 13 Paletten, um Umsatz zu machen.</a:t>
+            </a:r>
+            <a:endParaRPr lang="en-US" sz="1500" dirty="0"/>
+          </a:p>
+        </p:txBody>
+      </p:sp>
+      <p:sp>
+        <p:nvSpPr>
+          <p:cNvPr id="60" name="Ergebnis R6"/>
+          <p:cNvSpPr/>
+          <p:nvPr/>
+        </p:nvSpPr>
+        <p:spPr>
+          <a:xfrm>
+            <a:off x="8229600" y="5486400"/>
+            <a:ext cx="3063240" cy="411480"/>
+          </a:xfrm>
+          <a:prstGeom prst="roundRect">
+            <a:avLst>
+              <a:gd name="adj" fmla="val 13333"/>
+            </a:avLst>
+          </a:prstGeom>
+          <a:solidFill>
+            <a:srgbClr val="E3EFCF"/>
+          </a:solidFill>
+          <a:ln/>
+        </p:spPr>
+      </p:sp>
+      <p:sp>
+        <p:nvSpPr>
+          <p:cNvPr id="61" name="Text 58"/>
+          <p:cNvSpPr txBox="1"/>
+          <p:nvPr/>
+        </p:nvSpPr>
+        <p:spPr>
+          <a:xfrm>
+            <a:off x="8321040" y="5486400"/>
+            <a:ext cx="2880360" cy="411480"/>
+          </a:xfrm>
+          <a:prstGeom prst="rect">
+            <a:avLst/>
+          </a:prstGeom>
+          <a:noFill/>
+          <a:ln/>
+        </p:spPr>
+        <p:txBody>
+          <a:bodyPr wrap="square" lIns="0" tIns="0" rIns="0" bIns="0" rtlCol="0" anchor="ctr"/>
+          <a:lstStyle/>
+          <a:p>
+            <a:pPr indent="0" marL="0">
+              <a:buNone/>
+            </a:pPr>
+            <a:r>
+              <a:rPr lang="en-US" sz="1400" b="1" dirty="0">
+                <a:solidFill>
+                  <a:srgbClr val="3D6610"/>
+                </a:solidFill>
+              </a:rPr>
+              <a:t>Ergebnis +5.980 € → Kasse 53.770 €</a:t>
             </a:r>
             <a:endParaRPr lang="en-US" sz="1400" dirty="0"/>
-          </a:p>
-        </p:txBody>
-      </p:sp>
-      <p:sp>
-        <p:nvSpPr>
-          <p:cNvPr id="55" name="Text 52"/>
-          <p:cNvSpPr txBox="1"/>
-          <p:nvPr/>
-        </p:nvSpPr>
-        <p:spPr>
-          <a:xfrm>
-            <a:off x="8229600" y="5440680"/>
-            <a:ext cx="3063240" cy="548640"/>
-          </a:xfrm>
-          <a:prstGeom prst="rect">
-            <a:avLst/>
-          </a:prstGeom>
-          <a:noFill/>
-          <a:ln/>
-        </p:spPr>
-        <p:txBody>
-          <a:bodyPr wrap="square" lIns="0" tIns="0" rIns="0" bIns="0" rtlCol="0" anchor="t"/>
-          <a:lstStyle/>
-          <a:p>
-            <a:pPr indent="0" marL="0">
-              <a:buNone/>
-            </a:pPr>
-            <a:r>
-              <a:rPr lang="en-US" sz="1300" dirty="0">
-                <a:solidFill>
-                  <a:schemeClr val="tx1"/>
-                </a:solidFill>
-              </a:rPr>
-              <a:t>5,2 von 13 Paletten am Markt verkauft</a:t>
-            </a:r>
-            <a:endParaRPr lang="en-US" sz="1300" dirty="0"/>
-          </a:p>
-          <a:p>
-            <a:pPr indent="0" marL="0">
-              <a:buNone/>
-            </a:pPr>
-            <a:r>
-              <a:rPr lang="en-US" sz="1300" b="1" dirty="0">
-                <a:solidFill>
-                  <a:srgbClr val="3D6610"/>
-                </a:solidFill>
-              </a:rPr>
-              <a:t>Ergebnis +5.980 € → Kasse 53.770 €</a:t>
-            </a:r>
-            <a:endParaRPr lang="en-US" sz="1300" dirty="0"/>
           </a:p>
         </p:txBody>
       </p:sp>
@@ -12365,7 +12273,7 @@
                   <a:schemeClr val="bg2"/>
                 </a:solidFill>
               </a:rPr>
-              <a:t>Zusatzkosten in Runde 2–6</a:t>
+              <a:t>Zusatzkosten in den Runden 2–6</a:t>
             </a:r>
             <a:endParaRPr lang="en-US" sz="1500" dirty="0"/>
           </a:p>
@@ -12445,7 +12353,7 @@
                   <a:schemeClr val="tx1"/>
                 </a:solidFill>
               </a:rPr>
-              <a:t>R4: Material 1.500 € statt 1.000 € je Palette</a:t>
+              <a:t>Am höchsten in R2 und R5 (je 10.000 €)</a:t>
             </a:r>
             <a:endParaRPr lang="en-US" sz="1500" dirty="0"/>
           </a:p>
@@ -12463,7 +12371,7 @@
                   <a:schemeClr val="tx1"/>
                 </a:solidFill>
               </a:rPr>
-              <a:t>Ohne Zusatzkosten: 34.000 € mehr in der Kasse</a:t>
+              <a:t>Ohne sie: Verkaufswert 117.770 € – über dem Startkapital</a:t>
             </a:r>
             <a:endParaRPr lang="en-US" sz="1500" dirty="0"/>
           </a:p>
@@ -12590,7 +12498,7 @@
                 <a:ea typeface="Cambria" pitchFamily="34" charset="-122"/>
                 <a:cs typeface="Cambria" pitchFamily="34" charset="-120"/>
               </a:rPr>
-              <a:t>Kennzahl Wirtschaftlichkeit</a:t>
+              <a:t>Unsere Kennzahlen je Runde</a:t>
             </a:r>
             <a:endParaRPr lang="en-US" sz="3600" dirty="0"/>
           </a:p>
@@ -12878,7 +12786,7 @@
       </p:sp>
       <p:graphicFrame>
         <p:nvGraphicFramePr>
-          <p:cNvPr id="8" name="Tabelle Wirtschaftlichkeit"/>
+          <p:cNvPr id="8" name="Tabelle Kennzahlen"/>
           <p:cNvGraphicFramePr>
             <a:graphicFrameLocks noGrp="1"/>
           </p:cNvGraphicFramePr>
@@ -12892,14 +12800,14 @@
         </p:nvGraphicFramePr>
         <p:xfrm>
           <a:off x="640080" y="1417320"/>
-          <a:ext cx="7589520" cy="914400"/>
+          <a:ext cx="7680960" cy="914400"/>
         </p:xfrm>
         <a:graphic>
           <a:graphicData uri="http://schemas.openxmlformats.org/drawingml/2006/table">
             <a:tbl>
               <a:tblPr/>
               <a:tblGrid>
-                <a:gridCol w="2103120"/>
+                <a:gridCol w="2194560"/>
                 <a:gridCol w="914400"/>
                 <a:gridCol w="914400"/>
                 <a:gridCol w="914400"/>
@@ -12907,7 +12815,7 @@
                 <a:gridCol w="914400"/>
                 <a:gridCol w="914400"/>
               </a:tblGrid>
-              <a:tr h="420624">
+              <a:tr h="457200">
                 <a:tc>
                   <a:txBody>
                     <a:bodyPr/>
@@ -12917,14 +12825,14 @@
                         <a:buNone/>
                       </a:pPr>
                       <a:r>
-                        <a:rPr lang="en-US" sz="1300" b="1" dirty="0">
+                        <a:rPr lang="en-US" sz="1500" b="1" dirty="0">
                           <a:solidFill>
                             <a:srgbClr val="FFFFFF"/>
                           </a:solidFill>
                         </a:rPr>
                         <a:t>in €</a:t>
                       </a:r>
-                      <a:endParaRPr lang="en-US" sz="1300" dirty="0"/>
+                      <a:endParaRPr lang="en-US" sz="1500" dirty="0"/>
                     </a:p>
                   </a:txBody>
                   <a:tcPr marL="91440" marR="91440" marT="45720" marB="45720" anchor="ctr">
@@ -12978,14 +12886,14 @@
                         <a:buNone/>
                       </a:pPr>
                       <a:r>
-                        <a:rPr lang="en-US" sz="1300" b="1" dirty="0">
+                        <a:rPr lang="en-US" sz="1500" b="1" dirty="0">
                           <a:solidFill>
                             <a:srgbClr val="FFFFFF"/>
                           </a:solidFill>
                         </a:rPr>
                         <a:t>R1</a:t>
                       </a:r>
-                      <a:endParaRPr lang="en-US" sz="1300" dirty="0"/>
+                      <a:endParaRPr lang="en-US" sz="1500" dirty="0"/>
                     </a:p>
                   </a:txBody>
                   <a:tcPr marL="91440" marR="91440" marT="45720" marB="45720" anchor="ctr">
@@ -13039,14 +12947,14 @@
                         <a:buNone/>
                       </a:pPr>
                       <a:r>
-                        <a:rPr lang="en-US" sz="1300" b="1" dirty="0">
+                        <a:rPr lang="en-US" sz="1500" b="1" dirty="0">
                           <a:solidFill>
                             <a:srgbClr val="FFFFFF"/>
                           </a:solidFill>
                         </a:rPr>
                         <a:t>R2</a:t>
                       </a:r>
-                      <a:endParaRPr lang="en-US" sz="1300" dirty="0"/>
+                      <a:endParaRPr lang="en-US" sz="1500" dirty="0"/>
                     </a:p>
                   </a:txBody>
                   <a:tcPr marL="91440" marR="91440" marT="45720" marB="45720" anchor="ctr">
@@ -13100,14 +13008,14 @@
                         <a:buNone/>
                       </a:pPr>
                       <a:r>
-                        <a:rPr lang="en-US" sz="1300" b="1" dirty="0">
+                        <a:rPr lang="en-US" sz="1500" b="1" dirty="0">
                           <a:solidFill>
                             <a:srgbClr val="FFFFFF"/>
                           </a:solidFill>
                         </a:rPr>
                         <a:t>R3</a:t>
                       </a:r>
-                      <a:endParaRPr lang="en-US" sz="1300" dirty="0"/>
+                      <a:endParaRPr lang="en-US" sz="1500" dirty="0"/>
                     </a:p>
                   </a:txBody>
                   <a:tcPr marL="91440" marR="91440" marT="45720" marB="45720" anchor="ctr">
@@ -13161,14 +13069,14 @@
                         <a:buNone/>
                       </a:pPr>
                       <a:r>
-                        <a:rPr lang="en-US" sz="1300" b="1" dirty="0">
+                        <a:rPr lang="en-US" sz="1500" b="1" dirty="0">
                           <a:solidFill>
                             <a:srgbClr val="FFFFFF"/>
                           </a:solidFill>
                         </a:rPr>
                         <a:t>R4</a:t>
                       </a:r>
-                      <a:endParaRPr lang="en-US" sz="1300" dirty="0"/>
+                      <a:endParaRPr lang="en-US" sz="1500" dirty="0"/>
                     </a:p>
                   </a:txBody>
                   <a:tcPr marL="91440" marR="91440" marT="45720" marB="45720" anchor="ctr">
@@ -13222,14 +13130,14 @@
                         <a:buNone/>
                       </a:pPr>
                       <a:r>
-                        <a:rPr lang="en-US" sz="1300" b="1" dirty="0">
+                        <a:rPr lang="en-US" sz="1500" b="1" dirty="0">
                           <a:solidFill>
                             <a:srgbClr val="FFFFFF"/>
                           </a:solidFill>
                         </a:rPr>
                         <a:t>R5</a:t>
                       </a:r>
-                      <a:endParaRPr lang="en-US" sz="1300" dirty="0"/>
+                      <a:endParaRPr lang="en-US" sz="1500" dirty="0"/>
                     </a:p>
                   </a:txBody>
                   <a:tcPr marL="91440" marR="91440" marT="45720" marB="45720" anchor="ctr">
@@ -13283,14 +13191,14 @@
                         <a:buNone/>
                       </a:pPr>
                       <a:r>
-                        <a:rPr lang="en-US" sz="1300" b="1" dirty="0">
+                        <a:rPr lang="en-US" sz="1500" b="1" dirty="0">
                           <a:solidFill>
                             <a:srgbClr val="FFFFFF"/>
                           </a:solidFill>
                         </a:rPr>
                         <a:t>R6</a:t>
                       </a:r>
-                      <a:endParaRPr lang="en-US" sz="1300" dirty="0"/>
+                      <a:endParaRPr lang="en-US" sz="1500" dirty="0"/>
                     </a:p>
                   </a:txBody>
                   <a:tcPr marL="91440" marR="91440" marT="45720" marB="45720" anchor="ctr">
@@ -13336,7 +13244,7 @@
                   </a:tcPr>
                 </a:tc>
               </a:tr>
-              <a:tr h="420624">
+              <a:tr h="457200">
                 <a:tc>
                   <a:txBody>
                     <a:bodyPr/>
@@ -13346,14 +13254,14 @@
                         <a:buNone/>
                       </a:pPr>
                       <a:r>
-                        <a:rPr lang="en-US" sz="1300" dirty="0">
+                        <a:rPr lang="en-US" sz="1500" dirty="0">
                           <a:solidFill>
                             <a:srgbClr val="1B2A2F"/>
                           </a:solidFill>
                         </a:rPr>
                         <a:t>– Maschinen</a:t>
                       </a:r>
-                      <a:endParaRPr lang="en-US" sz="1300" dirty="0"/>
+                      <a:endParaRPr lang="en-US" sz="1500" dirty="0"/>
                     </a:p>
                   </a:txBody>
                   <a:tcPr marL="91440" marR="91440" marT="45720" marB="45720" anchor="ctr">
@@ -13404,14 +13312,14 @@
                         <a:buNone/>
                       </a:pPr>
                       <a:r>
-                        <a:rPr lang="en-US" sz="1300" dirty="0">
+                        <a:rPr lang="en-US" sz="1500" dirty="0">
                           <a:solidFill>
                             <a:srgbClr val="1B2A2F"/>
                           </a:solidFill>
                         </a:rPr>
                         <a:t>30.000</a:t>
                       </a:r>
-                      <a:endParaRPr lang="en-US" sz="1300" dirty="0"/>
+                      <a:endParaRPr lang="en-US" sz="1500" dirty="0"/>
                     </a:p>
                   </a:txBody>
                   <a:tcPr marL="91440" marR="91440" marT="45720" marB="45720" anchor="ctr">
@@ -13462,14 +13370,14 @@
                         <a:buNone/>
                       </a:pPr>
                       <a:r>
-                        <a:rPr lang="en-US" sz="1300" dirty="0">
+                        <a:rPr lang="en-US" sz="1500" dirty="0">
                           <a:solidFill>
                             <a:srgbClr val="1B2A2F"/>
                           </a:solidFill>
                         </a:rPr>
                         <a:t>30.000</a:t>
                       </a:r>
-                      <a:endParaRPr lang="en-US" sz="1300" dirty="0"/>
+                      <a:endParaRPr lang="en-US" sz="1500" dirty="0"/>
                     </a:p>
                   </a:txBody>
                   <a:tcPr marL="91440" marR="91440" marT="45720" marB="45720" anchor="ctr">
@@ -13520,14 +13428,14 @@
                         <a:buNone/>
                       </a:pPr>
                       <a:r>
-                        <a:rPr lang="en-US" sz="1300" dirty="0">
+                        <a:rPr lang="en-US" sz="1500" dirty="0">
                           <a:solidFill>
                             <a:srgbClr val="1B2A2F"/>
                           </a:solidFill>
                         </a:rPr>
                         <a:t>0</a:t>
                       </a:r>
-                      <a:endParaRPr lang="en-US" sz="1300" dirty="0"/>
+                      <a:endParaRPr lang="en-US" sz="1500" dirty="0"/>
                     </a:p>
                   </a:txBody>
                   <a:tcPr marL="91440" marR="91440" marT="45720" marB="45720" anchor="ctr">
@@ -13578,14 +13486,14 @@
                         <a:buNone/>
                       </a:pPr>
                       <a:r>
-                        <a:rPr lang="en-US" sz="1300" dirty="0">
+                        <a:rPr lang="en-US" sz="1500" dirty="0">
                           <a:solidFill>
                             <a:srgbClr val="1B2A2F"/>
                           </a:solidFill>
                         </a:rPr>
                         <a:t>0</a:t>
                       </a:r>
-                      <a:endParaRPr lang="en-US" sz="1300" dirty="0"/>
+                      <a:endParaRPr lang="en-US" sz="1500" dirty="0"/>
                     </a:p>
                   </a:txBody>
                   <a:tcPr marL="91440" marR="91440" marT="45720" marB="45720" anchor="ctr">
@@ -13636,14 +13544,14 @@
                         <a:buNone/>
                       </a:pPr>
                       <a:r>
-                        <a:rPr lang="en-US" sz="1300" dirty="0">
+                        <a:rPr lang="en-US" sz="1500" dirty="0">
                           <a:solidFill>
                             <a:srgbClr val="1B2A2F"/>
                           </a:solidFill>
                         </a:rPr>
                         <a:t>0</a:t>
                       </a:r>
-                      <a:endParaRPr lang="en-US" sz="1300" dirty="0"/>
+                      <a:endParaRPr lang="en-US" sz="1500" dirty="0"/>
                     </a:p>
                   </a:txBody>
                   <a:tcPr marL="91440" marR="91440" marT="45720" marB="45720" anchor="ctr">
@@ -13694,14 +13602,14 @@
                         <a:buNone/>
                       </a:pPr>
                       <a:r>
-                        <a:rPr lang="en-US" sz="1300" dirty="0">
+                        <a:rPr lang="en-US" sz="1500" dirty="0">
                           <a:solidFill>
                             <a:srgbClr val="1B2A2F"/>
                           </a:solidFill>
                         </a:rPr>
                         <a:t>0</a:t>
                       </a:r>
-                      <a:endParaRPr lang="en-US" sz="1300" dirty="0"/>
+                      <a:endParaRPr lang="en-US" sz="1500" dirty="0"/>
                     </a:p>
                   </a:txBody>
                   <a:tcPr marL="91440" marR="91440" marT="45720" marB="45720" anchor="ctr">
@@ -13744,7 +13652,7 @@
                   </a:tcPr>
                 </a:tc>
               </a:tr>
-              <a:tr h="420624">
+              <a:tr h="457200">
                 <a:tc>
                   <a:txBody>
                     <a:bodyPr/>
@@ -13754,14 +13662,14 @@
                         <a:buNone/>
                       </a:pPr>
                       <a:r>
-                        <a:rPr lang="en-US" sz="1300" dirty="0">
+                        <a:rPr lang="en-US" sz="1500" dirty="0">
                           <a:solidFill>
                             <a:srgbClr val="1B2A2F"/>
                           </a:solidFill>
                         </a:rPr>
-                        <a:t>– Personal</a:t>
+                        <a:t>– Personal + Miete</a:t>
                       </a:r>
-                      <a:endParaRPr lang="en-US" sz="1300" dirty="0"/>
+                      <a:endParaRPr lang="en-US" sz="1500" dirty="0"/>
                     </a:p>
                   </a:txBody>
                   <a:tcPr marL="91440" marR="91440" marT="45720" marB="45720" anchor="ctr">
@@ -13812,14 +13720,14 @@
                         <a:buNone/>
                       </a:pPr>
                       <a:r>
-                        <a:rPr lang="en-US" sz="1300" dirty="0">
+                        <a:rPr lang="en-US" sz="1500" dirty="0">
                           <a:solidFill>
                             <a:srgbClr val="1B2A2F"/>
                           </a:solidFill>
                         </a:rPr>
-                        <a:t>4.000</a:t>
+                        <a:t>9.000</a:t>
                       </a:r>
-                      <a:endParaRPr lang="en-US" sz="1300" dirty="0"/>
+                      <a:endParaRPr lang="en-US" sz="1500" dirty="0"/>
                     </a:p>
                   </a:txBody>
                   <a:tcPr marL="91440" marR="91440" marT="45720" marB="45720" anchor="ctr">
@@ -13870,14 +13778,14 @@
                         <a:buNone/>
                       </a:pPr>
                       <a:r>
-                        <a:rPr lang="en-US" sz="1300" dirty="0">
+                        <a:rPr lang="en-US" sz="1500" dirty="0">
                           <a:solidFill>
                             <a:srgbClr val="1B2A2F"/>
                           </a:solidFill>
                         </a:rPr>
-                        <a:t>4.000</a:t>
+                        <a:t>9.000</a:t>
                       </a:r>
-                      <a:endParaRPr lang="en-US" sz="1300" dirty="0"/>
+                      <a:endParaRPr lang="en-US" sz="1500" dirty="0"/>
                     </a:p>
                   </a:txBody>
                   <a:tcPr marL="91440" marR="91440" marT="45720" marB="45720" anchor="ctr">
@@ -13928,14 +13836,14 @@
                         <a:buNone/>
                       </a:pPr>
                       <a:r>
-                        <a:rPr lang="en-US" sz="1300" dirty="0">
+                        <a:rPr lang="en-US" sz="1500" dirty="0">
                           <a:solidFill>
                             <a:srgbClr val="1B2A2F"/>
                           </a:solidFill>
                         </a:rPr>
-                        <a:t>8.000</a:t>
+                        <a:t>13.000</a:t>
                       </a:r>
-                      <a:endParaRPr lang="en-US" sz="1300" dirty="0"/>
+                      <a:endParaRPr lang="en-US" sz="1500" dirty="0"/>
                     </a:p>
                   </a:txBody>
                   <a:tcPr marL="91440" marR="91440" marT="45720" marB="45720" anchor="ctr">
@@ -13986,14 +13894,14 @@
                         <a:buNone/>
                       </a:pPr>
                       <a:r>
-                        <a:rPr lang="en-US" sz="1300" dirty="0">
+                        <a:rPr lang="en-US" sz="1500" dirty="0">
                           <a:solidFill>
                             <a:srgbClr val="1B2A2F"/>
                           </a:solidFill>
                         </a:rPr>
-                        <a:t>8.000</a:t>
+                        <a:t>13.000</a:t>
                       </a:r>
-                      <a:endParaRPr lang="en-US" sz="1300" dirty="0"/>
+                      <a:endParaRPr lang="en-US" sz="1500" dirty="0"/>
                     </a:p>
                   </a:txBody>
                   <a:tcPr marL="91440" marR="91440" marT="45720" marB="45720" anchor="ctr">
@@ -14044,14 +13952,14 @@
                         <a:buNone/>
                       </a:pPr>
                       <a:r>
-                        <a:rPr lang="en-US" sz="1300" dirty="0">
+                        <a:rPr lang="en-US" sz="1500" dirty="0">
                           <a:solidFill>
                             <a:srgbClr val="1B2A2F"/>
                           </a:solidFill>
                         </a:rPr>
-                        <a:t>8.000</a:t>
+                        <a:t>13.000</a:t>
                       </a:r>
-                      <a:endParaRPr lang="en-US" sz="1300" dirty="0"/>
+                      <a:endParaRPr lang="en-US" sz="1500" dirty="0"/>
                     </a:p>
                   </a:txBody>
                   <a:tcPr marL="91440" marR="91440" marT="45720" marB="45720" anchor="ctr">
@@ -14102,14 +14010,14 @@
                         <a:buNone/>
                       </a:pPr>
                       <a:r>
-                        <a:rPr lang="en-US" sz="1300" dirty="0">
+                        <a:rPr lang="en-US" sz="1500" dirty="0">
                           <a:solidFill>
                             <a:srgbClr val="1B2A2F"/>
                           </a:solidFill>
                         </a:rPr>
-                        <a:t>8.000</a:t>
+                        <a:t>13.000</a:t>
                       </a:r>
-                      <a:endParaRPr lang="en-US" sz="1300" dirty="0"/>
+                      <a:endParaRPr lang="en-US" sz="1500" dirty="0"/>
                     </a:p>
                   </a:txBody>
                   <a:tcPr marL="91440" marR="91440" marT="45720" marB="45720" anchor="ctr">
@@ -14152,7 +14060,7 @@
                   </a:tcPr>
                 </a:tc>
               </a:tr>
-              <a:tr h="420624">
+              <a:tr h="457200">
                 <a:tc>
                   <a:txBody>
                     <a:bodyPr/>
@@ -14162,14 +14070,14 @@
                         <a:buNone/>
                       </a:pPr>
                       <a:r>
-                        <a:rPr lang="en-US" sz="1300" dirty="0">
+                        <a:rPr lang="en-US" sz="1500" dirty="0">
                           <a:solidFill>
                             <a:srgbClr val="1B2A2F"/>
                           </a:solidFill>
                         </a:rPr>
-                        <a:t>– Miete</a:t>
+                        <a:t>– Wirtschaftsdienst</a:t>
                       </a:r>
-                      <a:endParaRPr lang="en-US" sz="1300" dirty="0"/>
+                      <a:endParaRPr lang="en-US" sz="1500" dirty="0"/>
                     </a:p>
                   </a:txBody>
                   <a:tcPr marL="91440" marR="91440" marT="45720" marB="45720" anchor="ctr">
@@ -14220,14 +14128,14 @@
                         <a:buNone/>
                       </a:pPr>
                       <a:r>
-                        <a:rPr lang="en-US" sz="1300" dirty="0">
+                        <a:rPr lang="en-US" sz="1500" dirty="0">
                           <a:solidFill>
                             <a:srgbClr val="1B2A2F"/>
                           </a:solidFill>
                         </a:rPr>
-                        <a:t>5.000</a:t>
+                        <a:t>0</a:t>
                       </a:r>
-                      <a:endParaRPr lang="en-US" sz="1300" dirty="0"/>
+                      <a:endParaRPr lang="en-US" sz="1500" dirty="0"/>
                     </a:p>
                   </a:txBody>
                   <a:tcPr marL="91440" marR="91440" marT="45720" marB="45720" anchor="ctr">
@@ -14278,14 +14186,14 @@
                         <a:buNone/>
                       </a:pPr>
                       <a:r>
-                        <a:rPr lang="en-US" sz="1300" dirty="0">
+                        <a:rPr lang="en-US" sz="1500" dirty="0">
                           <a:solidFill>
                             <a:srgbClr val="1B2A2F"/>
                           </a:solidFill>
                         </a:rPr>
-                        <a:t>5.000</a:t>
+                        <a:t>10.000</a:t>
                       </a:r>
-                      <a:endParaRPr lang="en-US" sz="1300" dirty="0"/>
+                      <a:endParaRPr lang="en-US" sz="1500" dirty="0"/>
                     </a:p>
                   </a:txBody>
                   <a:tcPr marL="91440" marR="91440" marT="45720" marB="45720" anchor="ctr">
@@ -14336,14 +14244,14 @@
                         <a:buNone/>
                       </a:pPr>
                       <a:r>
-                        <a:rPr lang="en-US" sz="1300" dirty="0">
+                        <a:rPr lang="en-US" sz="1500" dirty="0">
                           <a:solidFill>
                             <a:srgbClr val="1B2A2F"/>
                           </a:solidFill>
                         </a:rPr>
                         <a:t>5.000</a:t>
                       </a:r>
-                      <a:endParaRPr lang="en-US" sz="1300" dirty="0"/>
+                      <a:endParaRPr lang="en-US" sz="1500" dirty="0"/>
                     </a:p>
                   </a:txBody>
                   <a:tcPr marL="91440" marR="91440" marT="45720" marB="45720" anchor="ctr">
@@ -14394,14 +14302,14 @@
                         <a:buNone/>
                       </a:pPr>
                       <a:r>
-                        <a:rPr lang="en-US" sz="1300" dirty="0">
+                        <a:rPr lang="en-US" sz="1500" dirty="0">
                           <a:solidFill>
                             <a:srgbClr val="1B2A2F"/>
                           </a:solidFill>
                         </a:rPr>
-                        <a:t>5.000</a:t>
+                        <a:t>2.500</a:t>
                       </a:r>
-                      <a:endParaRPr lang="en-US" sz="1300" dirty="0"/>
+                      <a:endParaRPr lang="en-US" sz="1500" dirty="0"/>
                     </a:p>
                   </a:txBody>
                   <a:tcPr marL="91440" marR="91440" marT="45720" marB="45720" anchor="ctr">
@@ -14452,14 +14360,14 @@
                         <a:buNone/>
                       </a:pPr>
                       <a:r>
-                        <a:rPr lang="en-US" sz="1300" dirty="0">
+                        <a:rPr lang="en-US" sz="1500" dirty="0">
                           <a:solidFill>
                             <a:srgbClr val="1B2A2F"/>
                           </a:solidFill>
                         </a:rPr>
-                        <a:t>5.000</a:t>
+                        <a:t>10.000</a:t>
                       </a:r>
-                      <a:endParaRPr lang="en-US" sz="1300" dirty="0"/>
+                      <a:endParaRPr lang="en-US" sz="1500" dirty="0"/>
                     </a:p>
                   </a:txBody>
                   <a:tcPr marL="91440" marR="91440" marT="45720" marB="45720" anchor="ctr">
@@ -14510,14 +14418,14 @@
                         <a:buNone/>
                       </a:pPr>
                       <a:r>
-                        <a:rPr lang="en-US" sz="1300" dirty="0">
+                        <a:rPr lang="en-US" sz="1500" dirty="0">
                           <a:solidFill>
                             <a:srgbClr val="1B2A2F"/>
                           </a:solidFill>
                         </a:rPr>
-                        <a:t>5.000</a:t>
+                        <a:t>6.500</a:t>
                       </a:r>
-                      <a:endParaRPr lang="en-US" sz="1300" dirty="0"/>
+                      <a:endParaRPr lang="en-US" sz="1500" dirty="0"/>
                     </a:p>
                   </a:txBody>
                   <a:tcPr marL="91440" marR="91440" marT="45720" marB="45720" anchor="ctr">
@@ -14560,7 +14468,7 @@
                   </a:tcPr>
                 </a:tc>
               </a:tr>
-              <a:tr h="420624">
+              <a:tr h="457200">
                 <a:tc>
                   <a:txBody>
                     <a:bodyPr/>
@@ -14570,14 +14478,14 @@
                         <a:buNone/>
                       </a:pPr>
                       <a:r>
-                        <a:rPr lang="en-US" sz="1300" dirty="0">
+                        <a:rPr lang="en-US" sz="1500" dirty="0">
                           <a:solidFill>
                             <a:srgbClr val="1B2A2F"/>
                           </a:solidFill>
                         </a:rPr>
-                        <a:t>– Wirtschaftsdienst</a:t>
+                        <a:t>– Produktion + Material</a:t>
                       </a:r>
-                      <a:endParaRPr lang="en-US" sz="1300" dirty="0"/>
+                      <a:endParaRPr lang="en-US" sz="1500" dirty="0"/>
                     </a:p>
                   </a:txBody>
                   <a:tcPr marL="91440" marR="91440" marT="45720" marB="45720" anchor="ctr">
@@ -14628,14 +14536,14 @@
                         <a:buNone/>
                       </a:pPr>
                       <a:r>
-                        <a:rPr lang="en-US" sz="1300" dirty="0">
+                        <a:rPr lang="en-US" sz="1500" dirty="0">
                           <a:solidFill>
                             <a:srgbClr val="1B2A2F"/>
                           </a:solidFill>
                         </a:rPr>
-                        <a:t>0</a:t>
+                        <a:t>30.000</a:t>
                       </a:r>
-                      <a:endParaRPr lang="en-US" sz="1300" dirty="0"/>
+                      <a:endParaRPr lang="en-US" sz="1500" dirty="0"/>
                     </a:p>
                   </a:txBody>
                   <a:tcPr marL="91440" marR="91440" marT="45720" marB="45720" anchor="ctr">
@@ -14686,14 +14594,14 @@
                         <a:buNone/>
                       </a:pPr>
                       <a:r>
-                        <a:rPr lang="en-US" sz="1300" dirty="0">
+                        <a:rPr lang="en-US" sz="1500" dirty="0">
                           <a:solidFill>
                             <a:srgbClr val="1B2A2F"/>
                           </a:solidFill>
                         </a:rPr>
-                        <a:t>10.000</a:t>
+                        <a:t>26.000</a:t>
                       </a:r>
-                      <a:endParaRPr lang="en-US" sz="1300" dirty="0"/>
+                      <a:endParaRPr lang="en-US" sz="1500" dirty="0"/>
                     </a:p>
                   </a:txBody>
                   <a:tcPr marL="91440" marR="91440" marT="45720" marB="45720" anchor="ctr">
@@ -14744,14 +14652,14 @@
                         <a:buNone/>
                       </a:pPr>
                       <a:r>
-                        <a:rPr lang="en-US" sz="1300" dirty="0">
+                        <a:rPr lang="en-US" sz="1500" dirty="0">
                           <a:solidFill>
                             <a:srgbClr val="1B2A2F"/>
                           </a:solidFill>
                         </a:rPr>
-                        <a:t>5.000</a:t>
+                        <a:t>36.000</a:t>
                       </a:r>
-                      <a:endParaRPr lang="en-US" sz="1300" dirty="0"/>
+                      <a:endParaRPr lang="en-US" sz="1500" dirty="0"/>
                     </a:p>
                   </a:txBody>
                   <a:tcPr marL="91440" marR="91440" marT="45720" marB="45720" anchor="ctr">
@@ -14802,14 +14710,14 @@
                         <a:buNone/>
                       </a:pPr>
                       <a:r>
-                        <a:rPr lang="en-US" sz="1300" dirty="0">
+                        <a:rPr lang="en-US" sz="1500" dirty="0">
                           <a:solidFill>
                             <a:srgbClr val="1B2A2F"/>
                           </a:solidFill>
                         </a:rPr>
                         <a:t>2.500</a:t>
                       </a:r>
-                      <a:endParaRPr lang="en-US" sz="1300" dirty="0"/>
+                      <a:endParaRPr lang="en-US" sz="1500" dirty="0"/>
                     </a:p>
                   </a:txBody>
                   <a:tcPr marL="91440" marR="91440" marT="45720" marB="45720" anchor="ctr">
@@ -14860,14 +14768,14 @@
                         <a:buNone/>
                       </a:pPr>
                       <a:r>
-                        <a:rPr lang="en-US" sz="1300" dirty="0">
+                        <a:rPr lang="en-US" sz="1500" dirty="0">
                           <a:solidFill>
                             <a:srgbClr val="1B2A2F"/>
                           </a:solidFill>
                         </a:rPr>
-                        <a:t>10.000</a:t>
+                        <a:t>2.000</a:t>
                       </a:r>
-                      <a:endParaRPr lang="en-US" sz="1300" dirty="0"/>
+                      <a:endParaRPr lang="en-US" sz="1500" dirty="0"/>
                     </a:p>
                   </a:txBody>
                   <a:tcPr marL="91440" marR="91440" marT="45720" marB="45720" anchor="ctr">
@@ -14918,14 +14826,14 @@
                         <a:buNone/>
                       </a:pPr>
                       <a:r>
-                        <a:rPr lang="en-US" sz="1300" dirty="0">
+                        <a:rPr lang="en-US" sz="1500" dirty="0">
                           <a:solidFill>
                             <a:srgbClr val="1B2A2F"/>
                           </a:solidFill>
                         </a:rPr>
-                        <a:t>6.500</a:t>
+                        <a:t>26.000</a:t>
                       </a:r>
-                      <a:endParaRPr lang="en-US" sz="1300" dirty="0"/>
+                      <a:endParaRPr lang="en-US" sz="1500" dirty="0"/>
                     </a:p>
                   </a:txBody>
                   <a:tcPr marL="91440" marR="91440" marT="45720" marB="45720" anchor="ctr">
@@ -14968,7 +14876,7 @@
                   </a:tcPr>
                 </a:tc>
               </a:tr>
-              <a:tr h="420624">
+              <a:tr h="457200">
                 <a:tc>
                   <a:txBody>
                     <a:bodyPr/>
@@ -14978,14 +14886,14 @@
                         <a:buNone/>
                       </a:pPr>
                       <a:r>
-                        <a:rPr lang="en-US" sz="1300" dirty="0">
+                        <a:rPr lang="en-US" sz="1500" b="1" dirty="0">
                           <a:solidFill>
                             <a:srgbClr val="1B2A2F"/>
                           </a:solidFill>
                         </a:rPr>
-                        <a:t>– Produktion</a:t>
+                        <a:t>= Kosten gesamt</a:t>
                       </a:r>
-                      <a:endParaRPr lang="en-US" sz="1300" dirty="0"/>
+                      <a:endParaRPr lang="en-US" sz="1500" dirty="0"/>
                     </a:p>
                   </a:txBody>
                   <a:tcPr marL="91440" marR="91440" marT="45720" marB="45720" anchor="ctr">
@@ -15036,14 +14944,14 @@
                         <a:buNone/>
                       </a:pPr>
                       <a:r>
-                        <a:rPr lang="en-US" sz="1300" dirty="0">
+                        <a:rPr lang="en-US" sz="1500" b="1" dirty="0">
                           <a:solidFill>
                             <a:srgbClr val="1B2A2F"/>
                           </a:solidFill>
                         </a:rPr>
-                        <a:t>15.000</a:t>
+                        <a:t>69.000</a:t>
                       </a:r>
-                      <a:endParaRPr lang="en-US" sz="1300" dirty="0"/>
+                      <a:endParaRPr lang="en-US" sz="1500" dirty="0"/>
                     </a:p>
                   </a:txBody>
                   <a:tcPr marL="91440" marR="91440" marT="45720" marB="45720" anchor="ctr">
@@ -15094,14 +15002,14 @@
                         <a:buNone/>
                       </a:pPr>
                       <a:r>
-                        <a:rPr lang="en-US" sz="1300" dirty="0">
+                        <a:rPr lang="en-US" sz="1500" b="1" dirty="0">
                           <a:solidFill>
                             <a:srgbClr val="1B2A2F"/>
                           </a:solidFill>
                         </a:rPr>
-                        <a:t>13.000</a:t>
+                        <a:t>75.000</a:t>
                       </a:r>
-                      <a:endParaRPr lang="en-US" sz="1300" dirty="0"/>
+                      <a:endParaRPr lang="en-US" sz="1500" dirty="0"/>
                     </a:p>
                   </a:txBody>
                   <a:tcPr marL="91440" marR="91440" marT="45720" marB="45720" anchor="ctr">
@@ -15152,14 +15060,14 @@
                         <a:buNone/>
                       </a:pPr>
                       <a:r>
-                        <a:rPr lang="en-US" sz="1300" dirty="0">
+                        <a:rPr lang="en-US" sz="1500" b="1" dirty="0">
                           <a:solidFill>
                             <a:srgbClr val="1B2A2F"/>
                           </a:solidFill>
                         </a:rPr>
-                        <a:t>18.000</a:t>
+                        <a:t>54.000</a:t>
                       </a:r>
-                      <a:endParaRPr lang="en-US" sz="1300" dirty="0"/>
+                      <a:endParaRPr lang="en-US" sz="1500" dirty="0"/>
                     </a:p>
                   </a:txBody>
                   <a:tcPr marL="91440" marR="91440" marT="45720" marB="45720" anchor="ctr">
@@ -15210,14 +15118,14 @@
                         <a:buNone/>
                       </a:pPr>
                       <a:r>
-                        <a:rPr lang="en-US" sz="1300" dirty="0">
+                        <a:rPr lang="en-US" sz="1500" b="1" dirty="0">
                           <a:solidFill>
                             <a:srgbClr val="1B2A2F"/>
                           </a:solidFill>
                         </a:rPr>
-                        <a:t>1.000</a:t>
+                        <a:t>18.000</a:t>
                       </a:r>
-                      <a:endParaRPr lang="en-US" sz="1300" dirty="0"/>
+                      <a:endParaRPr lang="en-US" sz="1500" dirty="0"/>
                     </a:p>
                   </a:txBody>
                   <a:tcPr marL="91440" marR="91440" marT="45720" marB="45720" anchor="ctr">
@@ -15268,14 +15176,14 @@
                         <a:buNone/>
                       </a:pPr>
                       <a:r>
-                        <a:rPr lang="en-US" sz="1300" dirty="0">
+                        <a:rPr lang="en-US" sz="1500" b="1" dirty="0">
                           <a:solidFill>
                             <a:srgbClr val="1B2A2F"/>
                           </a:solidFill>
                         </a:rPr>
-                        <a:t>1.000</a:t>
+                        <a:t>25.000</a:t>
                       </a:r>
-                      <a:endParaRPr lang="en-US" sz="1300" dirty="0"/>
+                      <a:endParaRPr lang="en-US" sz="1500" dirty="0"/>
                     </a:p>
                   </a:txBody>
                   <a:tcPr marL="91440" marR="91440" marT="45720" marB="45720" anchor="ctr">
@@ -15326,14 +15234,14 @@
                         <a:buNone/>
                       </a:pPr>
                       <a:r>
-                        <a:rPr lang="en-US" sz="1300" dirty="0">
+                        <a:rPr lang="en-US" sz="1500" b="1" dirty="0">
                           <a:solidFill>
                             <a:srgbClr val="1B2A2F"/>
                           </a:solidFill>
                         </a:rPr>
-                        <a:t>13.000</a:t>
+                        <a:t>45.500</a:t>
                       </a:r>
-                      <a:endParaRPr lang="en-US" sz="1300" dirty="0"/>
+                      <a:endParaRPr lang="en-US" sz="1500" dirty="0"/>
                     </a:p>
                   </a:txBody>
                   <a:tcPr marL="91440" marR="91440" marT="45720" marB="45720" anchor="ctr">
@@ -15376,7 +15284,7 @@
                   </a:tcPr>
                 </a:tc>
               </a:tr>
-              <a:tr h="420624">
+              <a:tr h="457200">
                 <a:tc>
                   <a:txBody>
                     <a:bodyPr/>
@@ -15386,14 +15294,14 @@
                         <a:buNone/>
                       </a:pPr>
                       <a:r>
-                        <a:rPr lang="en-US" sz="1300" dirty="0">
+                        <a:rPr lang="en-US" sz="1500" b="1" dirty="0">
                           <a:solidFill>
                             <a:srgbClr val="1B2A2F"/>
                           </a:solidFill>
                         </a:rPr>
-                        <a:t>– Material</a:t>
+                        <a:t>Umsatzerlöse</a:t>
                       </a:r>
-                      <a:endParaRPr lang="en-US" sz="1300" dirty="0"/>
+                      <a:endParaRPr lang="en-US" sz="1500" dirty="0"/>
                     </a:p>
                   </a:txBody>
                   <a:tcPr marL="91440" marR="91440" marT="45720" marB="45720" anchor="ctr">
@@ -15444,14 +15352,14 @@
                         <a:buNone/>
                       </a:pPr>
                       <a:r>
-                        <a:rPr lang="en-US" sz="1300" dirty="0">
+                        <a:rPr lang="en-US" sz="1500" b="1" dirty="0">
                           <a:solidFill>
                             <a:srgbClr val="1B2A2F"/>
                           </a:solidFill>
                         </a:rPr>
-                        <a:t>15.000</a:t>
+                        <a:t>45.000</a:t>
                       </a:r>
-                      <a:endParaRPr lang="en-US" sz="1300" dirty="0"/>
+                      <a:endParaRPr lang="en-US" sz="1500" dirty="0"/>
                     </a:p>
                   </a:txBody>
                   <a:tcPr marL="91440" marR="91440" marT="45720" marB="45720" anchor="ctr">
@@ -15502,14 +15410,14 @@
                         <a:buNone/>
                       </a:pPr>
                       <a:r>
-                        <a:rPr lang="en-US" sz="1300" dirty="0">
+                        <a:rPr lang="en-US" sz="1500" b="1" dirty="0">
                           <a:solidFill>
                             <a:srgbClr val="1B2A2F"/>
                           </a:solidFill>
                         </a:rPr>
-                        <a:t>13.000</a:t>
+                        <a:t>55.900</a:t>
                       </a:r>
-                      <a:endParaRPr lang="en-US" sz="1300" dirty="0"/>
+                      <a:endParaRPr lang="en-US" sz="1500" dirty="0"/>
                     </a:p>
                   </a:txBody>
                   <a:tcPr marL="91440" marR="91440" marT="45720" marB="45720" anchor="ctr">
@@ -15560,14 +15468,14 @@
                         <a:buNone/>
                       </a:pPr>
                       <a:r>
-                        <a:rPr lang="en-US" sz="1300" dirty="0">
+                        <a:rPr lang="en-US" sz="1500" b="1" dirty="0">
                           <a:solidFill>
                             <a:srgbClr val="1B2A2F"/>
                           </a:solidFill>
                         </a:rPr>
-                        <a:t>18.000</a:t>
+                        <a:t>79.940</a:t>
                       </a:r>
-                      <a:endParaRPr lang="en-US" sz="1300" dirty="0"/>
+                      <a:endParaRPr lang="en-US" sz="1500" dirty="0"/>
                     </a:p>
                   </a:txBody>
                   <a:tcPr marL="91440" marR="91440" marT="45720" marB="45720" anchor="ctr">
@@ -15618,14 +15526,14 @@
                         <a:buNone/>
                       </a:pPr>
                       <a:r>
-                        <a:rPr lang="en-US" sz="1300" dirty="0">
+                        <a:rPr lang="en-US" sz="1500" b="1" dirty="0">
                           <a:solidFill>
                             <a:srgbClr val="1B2A2F"/>
                           </a:solidFill>
                         </a:rPr>
-                        <a:t>1.500</a:t>
+                        <a:t>5.250</a:t>
                       </a:r>
-                      <a:endParaRPr lang="en-US" sz="1300" dirty="0"/>
+                      <a:endParaRPr lang="en-US" sz="1500" dirty="0"/>
                     </a:p>
                   </a:txBody>
                   <a:tcPr marL="91440" marR="91440" marT="45720" marB="45720" anchor="ctr">
@@ -15676,14 +15584,14 @@
                         <a:buNone/>
                       </a:pPr>
                       <a:r>
-                        <a:rPr lang="en-US" sz="1300" dirty="0">
+                        <a:rPr lang="en-US" sz="1500" b="1" dirty="0">
                           <a:solidFill>
                             <a:srgbClr val="1B2A2F"/>
                           </a:solidFill>
                         </a:rPr>
-                        <a:t>1.000</a:t>
+                        <a:t>2.700</a:t>
                       </a:r>
-                      <a:endParaRPr lang="en-US" sz="1300" dirty="0"/>
+                      <a:endParaRPr lang="en-US" sz="1500" dirty="0"/>
                     </a:p>
                   </a:txBody>
                   <a:tcPr marL="91440" marR="91440" marT="45720" marB="45720" anchor="ctr">
@@ -15734,14 +15642,14 @@
                         <a:buNone/>
                       </a:pPr>
                       <a:r>
-                        <a:rPr lang="en-US" sz="1300" dirty="0">
+                        <a:rPr lang="en-US" sz="1500" b="1" dirty="0">
                           <a:solidFill>
                             <a:srgbClr val="1B2A2F"/>
                           </a:solidFill>
                         </a:rPr>
-                        <a:t>13.000</a:t>
+                        <a:t>51.480</a:t>
                       </a:r>
-                      <a:endParaRPr lang="en-US" sz="1300" dirty="0"/>
+                      <a:endParaRPr lang="en-US" sz="1500" dirty="0"/>
                     </a:p>
                   </a:txBody>
                   <a:tcPr marL="91440" marR="91440" marT="45720" marB="45720" anchor="ctr">
@@ -15784,7 +15692,7 @@
                   </a:tcPr>
                 </a:tc>
               </a:tr>
-              <a:tr h="420624">
+              <a:tr h="457200">
                 <a:tc>
                   <a:txBody>
                     <a:bodyPr/>
@@ -15794,830 +15702,14 @@
                         <a:buNone/>
                       </a:pPr>
                       <a:r>
-                        <a:rPr lang="en-US" sz="1300" b="1" dirty="0">
-                          <a:solidFill>
-                            <a:srgbClr val="1B2A2F"/>
-                          </a:solidFill>
-                        </a:rPr>
-                        <a:t>= Kosten gesamt</a:t>
-                      </a:r>
-                      <a:endParaRPr lang="en-US" sz="1300" dirty="0"/>
-                    </a:p>
-                  </a:txBody>
-                  <a:tcPr marL="91440" marR="91440" marT="45720" marB="45720" anchor="ctr">
-                    <a:lnL w="9525" cap="flat" cmpd="sng" algn="ctr">
-                      <a:solidFill>
-                        <a:srgbClr val="D3D1C8"/>
-                      </a:solidFill>
-                      <a:prstDash val="solid"/>
-                      <a:round/>
-                      <a:headEnd type="none" w="med" len="med"/>
-                      <a:tailEnd type="none" w="med" len="med"/>
-                    </a:lnL>
-                    <a:lnR w="9525" cap="flat" cmpd="sng" algn="ctr">
-                      <a:solidFill>
-                        <a:srgbClr val="D3D1C8"/>
-                      </a:solidFill>
-                      <a:prstDash val="solid"/>
-                      <a:round/>
-                      <a:headEnd type="none" w="med" len="med"/>
-                      <a:tailEnd type="none" w="med" len="med"/>
-                    </a:lnR>
-                    <a:lnT w="9525" cap="flat" cmpd="sng" algn="ctr">
-                      <a:solidFill>
-                        <a:srgbClr val="D3D1C8"/>
-                      </a:solidFill>
-                      <a:prstDash val="solid"/>
-                      <a:round/>
-                      <a:headEnd type="none" w="med" len="med"/>
-                      <a:tailEnd type="none" w="med" len="med"/>
-                    </a:lnT>
-                    <a:lnB w="9525" cap="flat" cmpd="sng" algn="ctr">
-                      <a:solidFill>
-                        <a:srgbClr val="D3D1C8"/>
-                      </a:solidFill>
-                      <a:prstDash val="solid"/>
-                      <a:round/>
-                      <a:headEnd type="none" w="med" len="med"/>
-                      <a:tailEnd type="none" w="med" len="med"/>
-                    </a:lnB>
-                  </a:tcPr>
-                </a:tc>
-                <a:tc>
-                  <a:txBody>
-                    <a:bodyPr/>
-                    <a:lstStyle/>
-                    <a:p>
-                      <a:pPr algn="r" indent="0" marL="0">
-                        <a:buNone/>
-                      </a:pPr>
-                      <a:r>
-                        <a:rPr lang="en-US" sz="1300" b="1" dirty="0">
-                          <a:solidFill>
-                            <a:srgbClr val="1B2A2F"/>
-                          </a:solidFill>
-                        </a:rPr>
-                        <a:t>69.000</a:t>
-                      </a:r>
-                      <a:endParaRPr lang="en-US" sz="1300" dirty="0"/>
-                    </a:p>
-                  </a:txBody>
-                  <a:tcPr marL="91440" marR="91440" marT="45720" marB="45720" anchor="ctr">
-                    <a:lnL w="9525" cap="flat" cmpd="sng" algn="ctr">
-                      <a:solidFill>
-                        <a:srgbClr val="D3D1C8"/>
-                      </a:solidFill>
-                      <a:prstDash val="solid"/>
-                      <a:round/>
-                      <a:headEnd type="none" w="med" len="med"/>
-                      <a:tailEnd type="none" w="med" len="med"/>
-                    </a:lnL>
-                    <a:lnR w="9525" cap="flat" cmpd="sng" algn="ctr">
-                      <a:solidFill>
-                        <a:srgbClr val="D3D1C8"/>
-                      </a:solidFill>
-                      <a:prstDash val="solid"/>
-                      <a:round/>
-                      <a:headEnd type="none" w="med" len="med"/>
-                      <a:tailEnd type="none" w="med" len="med"/>
-                    </a:lnR>
-                    <a:lnT w="9525" cap="flat" cmpd="sng" algn="ctr">
-                      <a:solidFill>
-                        <a:srgbClr val="D3D1C8"/>
-                      </a:solidFill>
-                      <a:prstDash val="solid"/>
-                      <a:round/>
-                      <a:headEnd type="none" w="med" len="med"/>
-                      <a:tailEnd type="none" w="med" len="med"/>
-                    </a:lnT>
-                    <a:lnB w="9525" cap="flat" cmpd="sng" algn="ctr">
-                      <a:solidFill>
-                        <a:srgbClr val="D3D1C8"/>
-                      </a:solidFill>
-                      <a:prstDash val="solid"/>
-                      <a:round/>
-                      <a:headEnd type="none" w="med" len="med"/>
-                      <a:tailEnd type="none" w="med" len="med"/>
-                    </a:lnB>
-                  </a:tcPr>
-                </a:tc>
-                <a:tc>
-                  <a:txBody>
-                    <a:bodyPr/>
-                    <a:lstStyle/>
-                    <a:p>
-                      <a:pPr algn="r" indent="0" marL="0">
-                        <a:buNone/>
-                      </a:pPr>
-                      <a:r>
-                        <a:rPr lang="en-US" sz="1300" b="1" dirty="0">
-                          <a:solidFill>
-                            <a:srgbClr val="1B2A2F"/>
-                          </a:solidFill>
-                        </a:rPr>
-                        <a:t>75.000</a:t>
-                      </a:r>
-                      <a:endParaRPr lang="en-US" sz="1300" dirty="0"/>
-                    </a:p>
-                  </a:txBody>
-                  <a:tcPr marL="91440" marR="91440" marT="45720" marB="45720" anchor="ctr">
-                    <a:lnL w="9525" cap="flat" cmpd="sng" algn="ctr">
-                      <a:solidFill>
-                        <a:srgbClr val="D3D1C8"/>
-                      </a:solidFill>
-                      <a:prstDash val="solid"/>
-                      <a:round/>
-                      <a:headEnd type="none" w="med" len="med"/>
-                      <a:tailEnd type="none" w="med" len="med"/>
-                    </a:lnL>
-                    <a:lnR w="9525" cap="flat" cmpd="sng" algn="ctr">
-                      <a:solidFill>
-                        <a:srgbClr val="D3D1C8"/>
-                      </a:solidFill>
-                      <a:prstDash val="solid"/>
-                      <a:round/>
-                      <a:headEnd type="none" w="med" len="med"/>
-                      <a:tailEnd type="none" w="med" len="med"/>
-                    </a:lnR>
-                    <a:lnT w="9525" cap="flat" cmpd="sng" algn="ctr">
-                      <a:solidFill>
-                        <a:srgbClr val="D3D1C8"/>
-                      </a:solidFill>
-                      <a:prstDash val="solid"/>
-                      <a:round/>
-                      <a:headEnd type="none" w="med" len="med"/>
-                      <a:tailEnd type="none" w="med" len="med"/>
-                    </a:lnT>
-                    <a:lnB w="9525" cap="flat" cmpd="sng" algn="ctr">
-                      <a:solidFill>
-                        <a:srgbClr val="D3D1C8"/>
-                      </a:solidFill>
-                      <a:prstDash val="solid"/>
-                      <a:round/>
-                      <a:headEnd type="none" w="med" len="med"/>
-                      <a:tailEnd type="none" w="med" len="med"/>
-                    </a:lnB>
-                  </a:tcPr>
-                </a:tc>
-                <a:tc>
-                  <a:txBody>
-                    <a:bodyPr/>
-                    <a:lstStyle/>
-                    <a:p>
-                      <a:pPr algn="r" indent="0" marL="0">
-                        <a:buNone/>
-                      </a:pPr>
-                      <a:r>
-                        <a:rPr lang="en-US" sz="1300" b="1" dirty="0">
-                          <a:solidFill>
-                            <a:srgbClr val="1B2A2F"/>
-                          </a:solidFill>
-                        </a:rPr>
-                        <a:t>54.000</a:t>
-                      </a:r>
-                      <a:endParaRPr lang="en-US" sz="1300" dirty="0"/>
-                    </a:p>
-                  </a:txBody>
-                  <a:tcPr marL="91440" marR="91440" marT="45720" marB="45720" anchor="ctr">
-                    <a:lnL w="9525" cap="flat" cmpd="sng" algn="ctr">
-                      <a:solidFill>
-                        <a:srgbClr val="D3D1C8"/>
-                      </a:solidFill>
-                      <a:prstDash val="solid"/>
-                      <a:round/>
-                      <a:headEnd type="none" w="med" len="med"/>
-                      <a:tailEnd type="none" w="med" len="med"/>
-                    </a:lnL>
-                    <a:lnR w="9525" cap="flat" cmpd="sng" algn="ctr">
-                      <a:solidFill>
-                        <a:srgbClr val="D3D1C8"/>
-                      </a:solidFill>
-                      <a:prstDash val="solid"/>
-                      <a:round/>
-                      <a:headEnd type="none" w="med" len="med"/>
-                      <a:tailEnd type="none" w="med" len="med"/>
-                    </a:lnR>
-                    <a:lnT w="9525" cap="flat" cmpd="sng" algn="ctr">
-                      <a:solidFill>
-                        <a:srgbClr val="D3D1C8"/>
-                      </a:solidFill>
-                      <a:prstDash val="solid"/>
-                      <a:round/>
-                      <a:headEnd type="none" w="med" len="med"/>
-                      <a:tailEnd type="none" w="med" len="med"/>
-                    </a:lnT>
-                    <a:lnB w="9525" cap="flat" cmpd="sng" algn="ctr">
-                      <a:solidFill>
-                        <a:srgbClr val="D3D1C8"/>
-                      </a:solidFill>
-                      <a:prstDash val="solid"/>
-                      <a:round/>
-                      <a:headEnd type="none" w="med" len="med"/>
-                      <a:tailEnd type="none" w="med" len="med"/>
-                    </a:lnB>
-                  </a:tcPr>
-                </a:tc>
-                <a:tc>
-                  <a:txBody>
-                    <a:bodyPr/>
-                    <a:lstStyle/>
-                    <a:p>
-                      <a:pPr algn="r" indent="0" marL="0">
-                        <a:buNone/>
-                      </a:pPr>
-                      <a:r>
-                        <a:rPr lang="en-US" sz="1300" b="1" dirty="0">
-                          <a:solidFill>
-                            <a:srgbClr val="1B2A2F"/>
-                          </a:solidFill>
-                        </a:rPr>
-                        <a:t>18.000</a:t>
-                      </a:r>
-                      <a:endParaRPr lang="en-US" sz="1300" dirty="0"/>
-                    </a:p>
-                  </a:txBody>
-                  <a:tcPr marL="91440" marR="91440" marT="45720" marB="45720" anchor="ctr">
-                    <a:lnL w="9525" cap="flat" cmpd="sng" algn="ctr">
-                      <a:solidFill>
-                        <a:srgbClr val="D3D1C8"/>
-                      </a:solidFill>
-                      <a:prstDash val="solid"/>
-                      <a:round/>
-                      <a:headEnd type="none" w="med" len="med"/>
-                      <a:tailEnd type="none" w="med" len="med"/>
-                    </a:lnL>
-                    <a:lnR w="9525" cap="flat" cmpd="sng" algn="ctr">
-                      <a:solidFill>
-                        <a:srgbClr val="D3D1C8"/>
-                      </a:solidFill>
-                      <a:prstDash val="solid"/>
-                      <a:round/>
-                      <a:headEnd type="none" w="med" len="med"/>
-                      <a:tailEnd type="none" w="med" len="med"/>
-                    </a:lnR>
-                    <a:lnT w="9525" cap="flat" cmpd="sng" algn="ctr">
-                      <a:solidFill>
-                        <a:srgbClr val="D3D1C8"/>
-                      </a:solidFill>
-                      <a:prstDash val="solid"/>
-                      <a:round/>
-                      <a:headEnd type="none" w="med" len="med"/>
-                      <a:tailEnd type="none" w="med" len="med"/>
-                    </a:lnT>
-                    <a:lnB w="9525" cap="flat" cmpd="sng" algn="ctr">
-                      <a:solidFill>
-                        <a:srgbClr val="D3D1C8"/>
-                      </a:solidFill>
-                      <a:prstDash val="solid"/>
-                      <a:round/>
-                      <a:headEnd type="none" w="med" len="med"/>
-                      <a:tailEnd type="none" w="med" len="med"/>
-                    </a:lnB>
-                  </a:tcPr>
-                </a:tc>
-                <a:tc>
-                  <a:txBody>
-                    <a:bodyPr/>
-                    <a:lstStyle/>
-                    <a:p>
-                      <a:pPr algn="r" indent="0" marL="0">
-                        <a:buNone/>
-                      </a:pPr>
-                      <a:r>
-                        <a:rPr lang="en-US" sz="1300" b="1" dirty="0">
-                          <a:solidFill>
-                            <a:srgbClr val="1B2A2F"/>
-                          </a:solidFill>
-                        </a:rPr>
-                        <a:t>25.000</a:t>
-                      </a:r>
-                      <a:endParaRPr lang="en-US" sz="1300" dirty="0"/>
-                    </a:p>
-                  </a:txBody>
-                  <a:tcPr marL="91440" marR="91440" marT="45720" marB="45720" anchor="ctr">
-                    <a:lnL w="9525" cap="flat" cmpd="sng" algn="ctr">
-                      <a:solidFill>
-                        <a:srgbClr val="D3D1C8"/>
-                      </a:solidFill>
-                      <a:prstDash val="solid"/>
-                      <a:round/>
-                      <a:headEnd type="none" w="med" len="med"/>
-                      <a:tailEnd type="none" w="med" len="med"/>
-                    </a:lnL>
-                    <a:lnR w="9525" cap="flat" cmpd="sng" algn="ctr">
-                      <a:solidFill>
-                        <a:srgbClr val="D3D1C8"/>
-                      </a:solidFill>
-                      <a:prstDash val="solid"/>
-                      <a:round/>
-                      <a:headEnd type="none" w="med" len="med"/>
-                      <a:tailEnd type="none" w="med" len="med"/>
-                    </a:lnR>
-                    <a:lnT w="9525" cap="flat" cmpd="sng" algn="ctr">
-                      <a:solidFill>
-                        <a:srgbClr val="D3D1C8"/>
-                      </a:solidFill>
-                      <a:prstDash val="solid"/>
-                      <a:round/>
-                      <a:headEnd type="none" w="med" len="med"/>
-                      <a:tailEnd type="none" w="med" len="med"/>
-                    </a:lnT>
-                    <a:lnB w="9525" cap="flat" cmpd="sng" algn="ctr">
-                      <a:solidFill>
-                        <a:srgbClr val="D3D1C8"/>
-                      </a:solidFill>
-                      <a:prstDash val="solid"/>
-                      <a:round/>
-                      <a:headEnd type="none" w="med" len="med"/>
-                      <a:tailEnd type="none" w="med" len="med"/>
-                    </a:lnB>
-                  </a:tcPr>
-                </a:tc>
-                <a:tc>
-                  <a:txBody>
-                    <a:bodyPr/>
-                    <a:lstStyle/>
-                    <a:p>
-                      <a:pPr algn="r" indent="0" marL="0">
-                        <a:buNone/>
-                      </a:pPr>
-                      <a:r>
-                        <a:rPr lang="en-US" sz="1300" b="1" dirty="0">
-                          <a:solidFill>
-                            <a:srgbClr val="1B2A2F"/>
-                          </a:solidFill>
-                        </a:rPr>
-                        <a:t>45.500</a:t>
-                      </a:r>
-                      <a:endParaRPr lang="en-US" sz="1300" dirty="0"/>
-                    </a:p>
-                  </a:txBody>
-                  <a:tcPr marL="91440" marR="91440" marT="45720" marB="45720" anchor="ctr">
-                    <a:lnL w="9525" cap="flat" cmpd="sng" algn="ctr">
-                      <a:solidFill>
-                        <a:srgbClr val="D3D1C8"/>
-                      </a:solidFill>
-                      <a:prstDash val="solid"/>
-                      <a:round/>
-                      <a:headEnd type="none" w="med" len="med"/>
-                      <a:tailEnd type="none" w="med" len="med"/>
-                    </a:lnL>
-                    <a:lnR w="9525" cap="flat" cmpd="sng" algn="ctr">
-                      <a:solidFill>
-                        <a:srgbClr val="D3D1C8"/>
-                      </a:solidFill>
-                      <a:prstDash val="solid"/>
-                      <a:round/>
-                      <a:headEnd type="none" w="med" len="med"/>
-                      <a:tailEnd type="none" w="med" len="med"/>
-                    </a:lnR>
-                    <a:lnT w="9525" cap="flat" cmpd="sng" algn="ctr">
-                      <a:solidFill>
-                        <a:srgbClr val="D3D1C8"/>
-                      </a:solidFill>
-                      <a:prstDash val="solid"/>
-                      <a:round/>
-                      <a:headEnd type="none" w="med" len="med"/>
-                      <a:tailEnd type="none" w="med" len="med"/>
-                    </a:lnT>
-                    <a:lnB w="9525" cap="flat" cmpd="sng" algn="ctr">
-                      <a:solidFill>
-                        <a:srgbClr val="D3D1C8"/>
-                      </a:solidFill>
-                      <a:prstDash val="solid"/>
-                      <a:round/>
-                      <a:headEnd type="none" w="med" len="med"/>
-                      <a:tailEnd type="none" w="med" len="med"/>
-                    </a:lnB>
-                  </a:tcPr>
-                </a:tc>
-              </a:tr>
-              <a:tr h="420624">
-                <a:tc>
-                  <a:txBody>
-                    <a:bodyPr/>
-                    <a:lstStyle/>
-                    <a:p>
-                      <a:pPr indent="0" marL="0">
-                        <a:buNone/>
-                      </a:pPr>
-                      <a:r>
-                        <a:rPr lang="en-US" sz="1300" b="1" dirty="0">
-                          <a:solidFill>
-                            <a:srgbClr val="1B2A2F"/>
-                          </a:solidFill>
-                        </a:rPr>
-                        <a:t>Umsatzerlöse</a:t>
-                      </a:r>
-                      <a:endParaRPr lang="en-US" sz="1300" dirty="0"/>
-                    </a:p>
-                  </a:txBody>
-                  <a:tcPr marL="91440" marR="91440" marT="45720" marB="45720" anchor="ctr">
-                    <a:lnL w="9525" cap="flat" cmpd="sng" algn="ctr">
-                      <a:solidFill>
-                        <a:srgbClr val="D3D1C8"/>
-                      </a:solidFill>
-                      <a:prstDash val="solid"/>
-                      <a:round/>
-                      <a:headEnd type="none" w="med" len="med"/>
-                      <a:tailEnd type="none" w="med" len="med"/>
-                    </a:lnL>
-                    <a:lnR w="9525" cap="flat" cmpd="sng" algn="ctr">
-                      <a:solidFill>
-                        <a:srgbClr val="D3D1C8"/>
-                      </a:solidFill>
-                      <a:prstDash val="solid"/>
-                      <a:round/>
-                      <a:headEnd type="none" w="med" len="med"/>
-                      <a:tailEnd type="none" w="med" len="med"/>
-                    </a:lnR>
-                    <a:lnT w="9525" cap="flat" cmpd="sng" algn="ctr">
-                      <a:solidFill>
-                        <a:srgbClr val="D3D1C8"/>
-                      </a:solidFill>
-                      <a:prstDash val="solid"/>
-                      <a:round/>
-                      <a:headEnd type="none" w="med" len="med"/>
-                      <a:tailEnd type="none" w="med" len="med"/>
-                    </a:lnT>
-                    <a:lnB w="9525" cap="flat" cmpd="sng" algn="ctr">
-                      <a:solidFill>
-                        <a:srgbClr val="D3D1C8"/>
-                      </a:solidFill>
-                      <a:prstDash val="solid"/>
-                      <a:round/>
-                      <a:headEnd type="none" w="med" len="med"/>
-                      <a:tailEnd type="none" w="med" len="med"/>
-                    </a:lnB>
-                  </a:tcPr>
-                </a:tc>
-                <a:tc>
-                  <a:txBody>
-                    <a:bodyPr/>
-                    <a:lstStyle/>
-                    <a:p>
-                      <a:pPr algn="r" indent="0" marL="0">
-                        <a:buNone/>
-                      </a:pPr>
-                      <a:r>
-                        <a:rPr lang="en-US" sz="1300" b="1" dirty="0">
-                          <a:solidFill>
-                            <a:srgbClr val="1B2A2F"/>
-                          </a:solidFill>
-                        </a:rPr>
-                        <a:t>45.000</a:t>
-                      </a:r>
-                      <a:endParaRPr lang="en-US" sz="1300" dirty="0"/>
-                    </a:p>
-                  </a:txBody>
-                  <a:tcPr marL="91440" marR="91440" marT="45720" marB="45720" anchor="ctr">
-                    <a:lnL w="9525" cap="flat" cmpd="sng" algn="ctr">
-                      <a:solidFill>
-                        <a:srgbClr val="D3D1C8"/>
-                      </a:solidFill>
-                      <a:prstDash val="solid"/>
-                      <a:round/>
-                      <a:headEnd type="none" w="med" len="med"/>
-                      <a:tailEnd type="none" w="med" len="med"/>
-                    </a:lnL>
-                    <a:lnR w="9525" cap="flat" cmpd="sng" algn="ctr">
-                      <a:solidFill>
-                        <a:srgbClr val="D3D1C8"/>
-                      </a:solidFill>
-                      <a:prstDash val="solid"/>
-                      <a:round/>
-                      <a:headEnd type="none" w="med" len="med"/>
-                      <a:tailEnd type="none" w="med" len="med"/>
-                    </a:lnR>
-                    <a:lnT w="9525" cap="flat" cmpd="sng" algn="ctr">
-                      <a:solidFill>
-                        <a:srgbClr val="D3D1C8"/>
-                      </a:solidFill>
-                      <a:prstDash val="solid"/>
-                      <a:round/>
-                      <a:headEnd type="none" w="med" len="med"/>
-                      <a:tailEnd type="none" w="med" len="med"/>
-                    </a:lnT>
-                    <a:lnB w="9525" cap="flat" cmpd="sng" algn="ctr">
-                      <a:solidFill>
-                        <a:srgbClr val="D3D1C8"/>
-                      </a:solidFill>
-                      <a:prstDash val="solid"/>
-                      <a:round/>
-                      <a:headEnd type="none" w="med" len="med"/>
-                      <a:tailEnd type="none" w="med" len="med"/>
-                    </a:lnB>
-                  </a:tcPr>
-                </a:tc>
-                <a:tc>
-                  <a:txBody>
-                    <a:bodyPr/>
-                    <a:lstStyle/>
-                    <a:p>
-                      <a:pPr algn="r" indent="0" marL="0">
-                        <a:buNone/>
-                      </a:pPr>
-                      <a:r>
-                        <a:rPr lang="en-US" sz="1300" b="1" dirty="0">
-                          <a:solidFill>
-                            <a:srgbClr val="1B2A2F"/>
-                          </a:solidFill>
-                        </a:rPr>
-                        <a:t>55.900</a:t>
-                      </a:r>
-                      <a:endParaRPr lang="en-US" sz="1300" dirty="0"/>
-                    </a:p>
-                  </a:txBody>
-                  <a:tcPr marL="91440" marR="91440" marT="45720" marB="45720" anchor="ctr">
-                    <a:lnL w="9525" cap="flat" cmpd="sng" algn="ctr">
-                      <a:solidFill>
-                        <a:srgbClr val="D3D1C8"/>
-                      </a:solidFill>
-                      <a:prstDash val="solid"/>
-                      <a:round/>
-                      <a:headEnd type="none" w="med" len="med"/>
-                      <a:tailEnd type="none" w="med" len="med"/>
-                    </a:lnL>
-                    <a:lnR w="9525" cap="flat" cmpd="sng" algn="ctr">
-                      <a:solidFill>
-                        <a:srgbClr val="D3D1C8"/>
-                      </a:solidFill>
-                      <a:prstDash val="solid"/>
-                      <a:round/>
-                      <a:headEnd type="none" w="med" len="med"/>
-                      <a:tailEnd type="none" w="med" len="med"/>
-                    </a:lnR>
-                    <a:lnT w="9525" cap="flat" cmpd="sng" algn="ctr">
-                      <a:solidFill>
-                        <a:srgbClr val="D3D1C8"/>
-                      </a:solidFill>
-                      <a:prstDash val="solid"/>
-                      <a:round/>
-                      <a:headEnd type="none" w="med" len="med"/>
-                      <a:tailEnd type="none" w="med" len="med"/>
-                    </a:lnT>
-                    <a:lnB w="9525" cap="flat" cmpd="sng" algn="ctr">
-                      <a:solidFill>
-                        <a:srgbClr val="D3D1C8"/>
-                      </a:solidFill>
-                      <a:prstDash val="solid"/>
-                      <a:round/>
-                      <a:headEnd type="none" w="med" len="med"/>
-                      <a:tailEnd type="none" w="med" len="med"/>
-                    </a:lnB>
-                  </a:tcPr>
-                </a:tc>
-                <a:tc>
-                  <a:txBody>
-                    <a:bodyPr/>
-                    <a:lstStyle/>
-                    <a:p>
-                      <a:pPr algn="r" indent="0" marL="0">
-                        <a:buNone/>
-                      </a:pPr>
-                      <a:r>
-                        <a:rPr lang="en-US" sz="1300" b="1" dirty="0">
-                          <a:solidFill>
-                            <a:srgbClr val="1B2A2F"/>
-                          </a:solidFill>
-                        </a:rPr>
-                        <a:t>79.940</a:t>
-                      </a:r>
-                      <a:endParaRPr lang="en-US" sz="1300" dirty="0"/>
-                    </a:p>
-                  </a:txBody>
-                  <a:tcPr marL="91440" marR="91440" marT="45720" marB="45720" anchor="ctr">
-                    <a:lnL w="9525" cap="flat" cmpd="sng" algn="ctr">
-                      <a:solidFill>
-                        <a:srgbClr val="D3D1C8"/>
-                      </a:solidFill>
-                      <a:prstDash val="solid"/>
-                      <a:round/>
-                      <a:headEnd type="none" w="med" len="med"/>
-                      <a:tailEnd type="none" w="med" len="med"/>
-                    </a:lnL>
-                    <a:lnR w="9525" cap="flat" cmpd="sng" algn="ctr">
-                      <a:solidFill>
-                        <a:srgbClr val="D3D1C8"/>
-                      </a:solidFill>
-                      <a:prstDash val="solid"/>
-                      <a:round/>
-                      <a:headEnd type="none" w="med" len="med"/>
-                      <a:tailEnd type="none" w="med" len="med"/>
-                    </a:lnR>
-                    <a:lnT w="9525" cap="flat" cmpd="sng" algn="ctr">
-                      <a:solidFill>
-                        <a:srgbClr val="D3D1C8"/>
-                      </a:solidFill>
-                      <a:prstDash val="solid"/>
-                      <a:round/>
-                      <a:headEnd type="none" w="med" len="med"/>
-                      <a:tailEnd type="none" w="med" len="med"/>
-                    </a:lnT>
-                    <a:lnB w="9525" cap="flat" cmpd="sng" algn="ctr">
-                      <a:solidFill>
-                        <a:srgbClr val="D3D1C8"/>
-                      </a:solidFill>
-                      <a:prstDash val="solid"/>
-                      <a:round/>
-                      <a:headEnd type="none" w="med" len="med"/>
-                      <a:tailEnd type="none" w="med" len="med"/>
-                    </a:lnB>
-                  </a:tcPr>
-                </a:tc>
-                <a:tc>
-                  <a:txBody>
-                    <a:bodyPr/>
-                    <a:lstStyle/>
-                    <a:p>
-                      <a:pPr algn="r" indent="0" marL="0">
-                        <a:buNone/>
-                      </a:pPr>
-                      <a:r>
-                        <a:rPr lang="en-US" sz="1300" b="1" dirty="0">
-                          <a:solidFill>
-                            <a:srgbClr val="1B2A2F"/>
-                          </a:solidFill>
-                        </a:rPr>
-                        <a:t>5.250</a:t>
-                      </a:r>
-                      <a:endParaRPr lang="en-US" sz="1300" dirty="0"/>
-                    </a:p>
-                  </a:txBody>
-                  <a:tcPr marL="91440" marR="91440" marT="45720" marB="45720" anchor="ctr">
-                    <a:lnL w="9525" cap="flat" cmpd="sng" algn="ctr">
-                      <a:solidFill>
-                        <a:srgbClr val="D3D1C8"/>
-                      </a:solidFill>
-                      <a:prstDash val="solid"/>
-                      <a:round/>
-                      <a:headEnd type="none" w="med" len="med"/>
-                      <a:tailEnd type="none" w="med" len="med"/>
-                    </a:lnL>
-                    <a:lnR w="9525" cap="flat" cmpd="sng" algn="ctr">
-                      <a:solidFill>
-                        <a:srgbClr val="D3D1C8"/>
-                      </a:solidFill>
-                      <a:prstDash val="solid"/>
-                      <a:round/>
-                      <a:headEnd type="none" w="med" len="med"/>
-                      <a:tailEnd type="none" w="med" len="med"/>
-                    </a:lnR>
-                    <a:lnT w="9525" cap="flat" cmpd="sng" algn="ctr">
-                      <a:solidFill>
-                        <a:srgbClr val="D3D1C8"/>
-                      </a:solidFill>
-                      <a:prstDash val="solid"/>
-                      <a:round/>
-                      <a:headEnd type="none" w="med" len="med"/>
-                      <a:tailEnd type="none" w="med" len="med"/>
-                    </a:lnT>
-                    <a:lnB w="9525" cap="flat" cmpd="sng" algn="ctr">
-                      <a:solidFill>
-                        <a:srgbClr val="D3D1C8"/>
-                      </a:solidFill>
-                      <a:prstDash val="solid"/>
-                      <a:round/>
-                      <a:headEnd type="none" w="med" len="med"/>
-                      <a:tailEnd type="none" w="med" len="med"/>
-                    </a:lnB>
-                  </a:tcPr>
-                </a:tc>
-                <a:tc>
-                  <a:txBody>
-                    <a:bodyPr/>
-                    <a:lstStyle/>
-                    <a:p>
-                      <a:pPr algn="r" indent="0" marL="0">
-                        <a:buNone/>
-                      </a:pPr>
-                      <a:r>
-                        <a:rPr lang="en-US" sz="1300" b="1" dirty="0">
-                          <a:solidFill>
-                            <a:srgbClr val="1B2A2F"/>
-                          </a:solidFill>
-                        </a:rPr>
-                        <a:t>2.700</a:t>
-                      </a:r>
-                      <a:endParaRPr lang="en-US" sz="1300" dirty="0"/>
-                    </a:p>
-                  </a:txBody>
-                  <a:tcPr marL="91440" marR="91440" marT="45720" marB="45720" anchor="ctr">
-                    <a:lnL w="9525" cap="flat" cmpd="sng" algn="ctr">
-                      <a:solidFill>
-                        <a:srgbClr val="D3D1C8"/>
-                      </a:solidFill>
-                      <a:prstDash val="solid"/>
-                      <a:round/>
-                      <a:headEnd type="none" w="med" len="med"/>
-                      <a:tailEnd type="none" w="med" len="med"/>
-                    </a:lnL>
-                    <a:lnR w="9525" cap="flat" cmpd="sng" algn="ctr">
-                      <a:solidFill>
-                        <a:srgbClr val="D3D1C8"/>
-                      </a:solidFill>
-                      <a:prstDash val="solid"/>
-                      <a:round/>
-                      <a:headEnd type="none" w="med" len="med"/>
-                      <a:tailEnd type="none" w="med" len="med"/>
-                    </a:lnR>
-                    <a:lnT w="9525" cap="flat" cmpd="sng" algn="ctr">
-                      <a:solidFill>
-                        <a:srgbClr val="D3D1C8"/>
-                      </a:solidFill>
-                      <a:prstDash val="solid"/>
-                      <a:round/>
-                      <a:headEnd type="none" w="med" len="med"/>
-                      <a:tailEnd type="none" w="med" len="med"/>
-                    </a:lnT>
-                    <a:lnB w="9525" cap="flat" cmpd="sng" algn="ctr">
-                      <a:solidFill>
-                        <a:srgbClr val="D3D1C8"/>
-                      </a:solidFill>
-                      <a:prstDash val="solid"/>
-                      <a:round/>
-                      <a:headEnd type="none" w="med" len="med"/>
-                      <a:tailEnd type="none" w="med" len="med"/>
-                    </a:lnB>
-                  </a:tcPr>
-                </a:tc>
-                <a:tc>
-                  <a:txBody>
-                    <a:bodyPr/>
-                    <a:lstStyle/>
-                    <a:p>
-                      <a:pPr algn="r" indent="0" marL="0">
-                        <a:buNone/>
-                      </a:pPr>
-                      <a:r>
-                        <a:rPr lang="en-US" sz="1300" b="1" dirty="0">
-                          <a:solidFill>
-                            <a:srgbClr val="1B2A2F"/>
-                          </a:solidFill>
-                        </a:rPr>
-                        <a:t>51.480</a:t>
-                      </a:r>
-                      <a:endParaRPr lang="en-US" sz="1300" dirty="0"/>
-                    </a:p>
-                  </a:txBody>
-                  <a:tcPr marL="91440" marR="91440" marT="45720" marB="45720" anchor="ctr">
-                    <a:lnL w="9525" cap="flat" cmpd="sng" algn="ctr">
-                      <a:solidFill>
-                        <a:srgbClr val="D3D1C8"/>
-                      </a:solidFill>
-                      <a:prstDash val="solid"/>
-                      <a:round/>
-                      <a:headEnd type="none" w="med" len="med"/>
-                      <a:tailEnd type="none" w="med" len="med"/>
-                    </a:lnL>
-                    <a:lnR w="9525" cap="flat" cmpd="sng" algn="ctr">
-                      <a:solidFill>
-                        <a:srgbClr val="D3D1C8"/>
-                      </a:solidFill>
-                      <a:prstDash val="solid"/>
-                      <a:round/>
-                      <a:headEnd type="none" w="med" len="med"/>
-                      <a:tailEnd type="none" w="med" len="med"/>
-                    </a:lnR>
-                    <a:lnT w="9525" cap="flat" cmpd="sng" algn="ctr">
-                      <a:solidFill>
-                        <a:srgbClr val="D3D1C8"/>
-                      </a:solidFill>
-                      <a:prstDash val="solid"/>
-                      <a:round/>
-                      <a:headEnd type="none" w="med" len="med"/>
-                      <a:tailEnd type="none" w="med" len="med"/>
-                    </a:lnT>
-                    <a:lnB w="9525" cap="flat" cmpd="sng" algn="ctr">
-                      <a:solidFill>
-                        <a:srgbClr val="D3D1C8"/>
-                      </a:solidFill>
-                      <a:prstDash val="solid"/>
-                      <a:round/>
-                      <a:headEnd type="none" w="med" len="med"/>
-                      <a:tailEnd type="none" w="med" len="med"/>
-                    </a:lnB>
-                  </a:tcPr>
-                </a:tc>
-              </a:tr>
-              <a:tr h="420624">
-                <a:tc>
-                  <a:txBody>
-                    <a:bodyPr/>
-                    <a:lstStyle/>
-                    <a:p>
-                      <a:pPr indent="0" marL="0">
-                        <a:buNone/>
-                      </a:pPr>
-                      <a:r>
-                        <a:rPr lang="en-US" sz="1300" b="1" dirty="0">
+                        <a:rPr lang="en-US" sz="1500" b="1" dirty="0">
                           <a:solidFill>
                             <a:srgbClr val="FFFFFF"/>
                           </a:solidFill>
                         </a:rPr>
                         <a:t>Wirtschaftlichkeit</a:t>
                       </a:r>
-                      <a:endParaRPr lang="en-US" sz="1300" dirty="0"/>
+                      <a:endParaRPr lang="en-US" sz="1500" dirty="0"/>
                     </a:p>
                   </a:txBody>
                   <a:tcPr marL="91440" marR="91440" marT="45720" marB="45720" anchor="ctr">
@@ -16671,14 +15763,14 @@
                         <a:buNone/>
                       </a:pPr>
                       <a:r>
-                        <a:rPr lang="en-US" sz="1300" b="1" dirty="0">
+                        <a:rPr lang="en-US" sz="1500" b="1" dirty="0">
                           <a:solidFill>
                             <a:srgbClr val="8A4A12"/>
                           </a:solidFill>
                         </a:rPr>
                         <a:t>0,65</a:t>
                       </a:r>
-                      <a:endParaRPr lang="en-US" sz="1300" dirty="0"/>
+                      <a:endParaRPr lang="en-US" sz="1500" dirty="0"/>
                     </a:p>
                   </a:txBody>
                   <a:tcPr marL="91440" marR="91440" marT="45720" marB="45720" anchor="ctr">
@@ -16732,14 +15824,14 @@
                         <a:buNone/>
                       </a:pPr>
                       <a:r>
-                        <a:rPr lang="en-US" sz="1300" b="1" dirty="0">
+                        <a:rPr lang="en-US" sz="1500" b="1" dirty="0">
                           <a:solidFill>
                             <a:srgbClr val="8A4A12"/>
                           </a:solidFill>
                         </a:rPr>
                         <a:t>0,75</a:t>
                       </a:r>
-                      <a:endParaRPr lang="en-US" sz="1300" dirty="0"/>
+                      <a:endParaRPr lang="en-US" sz="1500" dirty="0"/>
                     </a:p>
                   </a:txBody>
                   <a:tcPr marL="91440" marR="91440" marT="45720" marB="45720" anchor="ctr">
@@ -16793,14 +15885,14 @@
                         <a:buNone/>
                       </a:pPr>
                       <a:r>
-                        <a:rPr lang="en-US" sz="1300" b="1" dirty="0">
+                        <a:rPr lang="en-US" sz="1500" b="1" dirty="0">
                           <a:solidFill>
                             <a:srgbClr val="3D6610"/>
                           </a:solidFill>
                         </a:rPr>
                         <a:t>1,48</a:t>
                       </a:r>
-                      <a:endParaRPr lang="en-US" sz="1300" dirty="0"/>
+                      <a:endParaRPr lang="en-US" sz="1500" dirty="0"/>
                     </a:p>
                   </a:txBody>
                   <a:tcPr marL="91440" marR="91440" marT="45720" marB="45720" anchor="ctr">
@@ -16854,14 +15946,14 @@
                         <a:buNone/>
                       </a:pPr>
                       <a:r>
-                        <a:rPr lang="en-US" sz="1300" b="1" dirty="0">
+                        <a:rPr lang="en-US" sz="1500" b="1" dirty="0">
                           <a:solidFill>
                             <a:srgbClr val="8A4A12"/>
                           </a:solidFill>
                         </a:rPr>
                         <a:t>0,29</a:t>
                       </a:r>
-                      <a:endParaRPr lang="en-US" sz="1300" dirty="0"/>
+                      <a:endParaRPr lang="en-US" sz="1500" dirty="0"/>
                     </a:p>
                   </a:txBody>
                   <a:tcPr marL="91440" marR="91440" marT="45720" marB="45720" anchor="ctr">
@@ -16915,14 +16007,14 @@
                         <a:buNone/>
                       </a:pPr>
                       <a:r>
-                        <a:rPr lang="en-US" sz="1300" b="1" dirty="0">
+                        <a:rPr lang="en-US" sz="1500" b="1" dirty="0">
                           <a:solidFill>
                             <a:srgbClr val="8A4A12"/>
                           </a:solidFill>
                         </a:rPr>
                         <a:t>0,11</a:t>
                       </a:r>
-                      <a:endParaRPr lang="en-US" sz="1300" dirty="0"/>
+                      <a:endParaRPr lang="en-US" sz="1500" dirty="0"/>
                     </a:p>
                   </a:txBody>
                   <a:tcPr marL="91440" marR="91440" marT="45720" marB="45720" anchor="ctr">
@@ -16976,14 +16068,14 @@
                         <a:buNone/>
                       </a:pPr>
                       <a:r>
-                        <a:rPr lang="en-US" sz="1300" b="1" dirty="0">
+                        <a:rPr lang="en-US" sz="1500" b="1" dirty="0">
                           <a:solidFill>
                             <a:srgbClr val="3D6610"/>
                           </a:solidFill>
                         </a:rPr>
                         <a:t>1,13</a:t>
                       </a:r>
-                      <a:endParaRPr lang="en-US" sz="1300" dirty="0"/>
+                      <a:endParaRPr lang="en-US" sz="1500" dirty="0"/>
                     </a:p>
                   </a:txBody>
                   <a:tcPr marL="91440" marR="91440" marT="45720" marB="45720" anchor="ctr">
@@ -17025,6 +16117,435 @@
                     </a:lnB>
                     <a:solidFill>
                       <a:srgbClr val="E3EFCF"/>
+                    </a:solidFill>
+                  </a:tcPr>
+                </a:tc>
+              </a:tr>
+              <a:tr h="457200">
+                <a:tc>
+                  <a:txBody>
+                    <a:bodyPr/>
+                    <a:lstStyle/>
+                    <a:p>
+                      <a:pPr indent="0" marL="0">
+                        <a:buNone/>
+                      </a:pPr>
+                      <a:r>
+                        <a:rPr lang="en-US" sz="1500" b="1" dirty="0">
+                          <a:solidFill>
+                            <a:srgbClr val="FFFFFF"/>
+                          </a:solidFill>
+                        </a:rPr>
+                        <a:t>Absatzquote</a:t>
+                      </a:r>
+                      <a:endParaRPr lang="en-US" sz="1500" dirty="0"/>
+                    </a:p>
+                  </a:txBody>
+                  <a:tcPr marL="91440" marR="91440" marT="45720" marB="45720" anchor="ctr">
+                    <a:lnL w="9525" cap="flat" cmpd="sng" algn="ctr">
+                      <a:solidFill>
+                        <a:srgbClr val="D3D1C8"/>
+                      </a:solidFill>
+                      <a:prstDash val="solid"/>
+                      <a:round/>
+                      <a:headEnd type="none" w="med" len="med"/>
+                      <a:tailEnd type="none" w="med" len="med"/>
+                    </a:lnL>
+                    <a:lnR w="9525" cap="flat" cmpd="sng" algn="ctr">
+                      <a:solidFill>
+                        <a:srgbClr val="D3D1C8"/>
+                      </a:solidFill>
+                      <a:prstDash val="solid"/>
+                      <a:round/>
+                      <a:headEnd type="none" w="med" len="med"/>
+                      <a:tailEnd type="none" w="med" len="med"/>
+                    </a:lnR>
+                    <a:lnT w="9525" cap="flat" cmpd="sng" algn="ctr">
+                      <a:solidFill>
+                        <a:srgbClr val="D3D1C8"/>
+                      </a:solidFill>
+                      <a:prstDash val="solid"/>
+                      <a:round/>
+                      <a:headEnd type="none" w="med" len="med"/>
+                      <a:tailEnd type="none" w="med" len="med"/>
+                    </a:lnT>
+                    <a:lnB w="9525" cap="flat" cmpd="sng" algn="ctr">
+                      <a:solidFill>
+                        <a:srgbClr val="D3D1C8"/>
+                      </a:solidFill>
+                      <a:prstDash val="solid"/>
+                      <a:round/>
+                      <a:headEnd type="none" w="med" len="med"/>
+                      <a:tailEnd type="none" w="med" len="med"/>
+                    </a:lnB>
+                    <a:solidFill>
+                      <a:srgbClr val="0F5C6B"/>
+                    </a:solidFill>
+                  </a:tcPr>
+                </a:tc>
+                <a:tc>
+                  <a:txBody>
+                    <a:bodyPr/>
+                    <a:lstStyle/>
+                    <a:p>
+                      <a:pPr algn="ctr" indent="0" marL="0">
+                        <a:buNone/>
+                      </a:pPr>
+                      <a:r>
+                        <a:rPr lang="en-US" sz="1500" b="1" dirty="0">
+                          <a:solidFill>
+                            <a:srgbClr val="0F5C6B"/>
+                          </a:solidFill>
+                        </a:rPr>
+                        <a:t>100 %</a:t>
+                      </a:r>
+                      <a:endParaRPr lang="en-US" sz="1500" dirty="0"/>
+                    </a:p>
+                  </a:txBody>
+                  <a:tcPr marL="91440" marR="91440" marT="45720" marB="45720" anchor="ctr">
+                    <a:lnL w="9525" cap="flat" cmpd="sng" algn="ctr">
+                      <a:solidFill>
+                        <a:srgbClr val="D3D1C8"/>
+                      </a:solidFill>
+                      <a:prstDash val="solid"/>
+                      <a:round/>
+                      <a:headEnd type="none" w="med" len="med"/>
+                      <a:tailEnd type="none" w="med" len="med"/>
+                    </a:lnL>
+                    <a:lnR w="9525" cap="flat" cmpd="sng" algn="ctr">
+                      <a:solidFill>
+                        <a:srgbClr val="D3D1C8"/>
+                      </a:solidFill>
+                      <a:prstDash val="solid"/>
+                      <a:round/>
+                      <a:headEnd type="none" w="med" len="med"/>
+                      <a:tailEnd type="none" w="med" len="med"/>
+                    </a:lnR>
+                    <a:lnT w="9525" cap="flat" cmpd="sng" algn="ctr">
+                      <a:solidFill>
+                        <a:srgbClr val="D3D1C8"/>
+                      </a:solidFill>
+                      <a:prstDash val="solid"/>
+                      <a:round/>
+                      <a:headEnd type="none" w="med" len="med"/>
+                      <a:tailEnd type="none" w="med" len="med"/>
+                    </a:lnT>
+                    <a:lnB w="9525" cap="flat" cmpd="sng" algn="ctr">
+                      <a:solidFill>
+                        <a:srgbClr val="D3D1C8"/>
+                      </a:solidFill>
+                      <a:prstDash val="solid"/>
+                      <a:round/>
+                      <a:headEnd type="none" w="med" len="med"/>
+                      <a:tailEnd type="none" w="med" len="med"/>
+                    </a:lnB>
+                    <a:solidFill>
+                      <a:srgbClr val="E6EEF0"/>
+                    </a:solidFill>
+                  </a:tcPr>
+                </a:tc>
+                <a:tc>
+                  <a:txBody>
+                    <a:bodyPr/>
+                    <a:lstStyle/>
+                    <a:p>
+                      <a:pPr algn="ctr" indent="0" marL="0">
+                        <a:buNone/>
+                      </a:pPr>
+                      <a:r>
+                        <a:rPr lang="en-US" sz="1500" b="1" dirty="0">
+                          <a:solidFill>
+                            <a:srgbClr val="0F5C6B"/>
+                          </a:solidFill>
+                        </a:rPr>
+                        <a:t>50 %</a:t>
+                      </a:r>
+                      <a:endParaRPr lang="en-US" sz="1500" dirty="0"/>
+                    </a:p>
+                  </a:txBody>
+                  <a:tcPr marL="91440" marR="91440" marT="45720" marB="45720" anchor="ctr">
+                    <a:lnL w="9525" cap="flat" cmpd="sng" algn="ctr">
+                      <a:solidFill>
+                        <a:srgbClr val="D3D1C8"/>
+                      </a:solidFill>
+                      <a:prstDash val="solid"/>
+                      <a:round/>
+                      <a:headEnd type="none" w="med" len="med"/>
+                      <a:tailEnd type="none" w="med" len="med"/>
+                    </a:lnL>
+                    <a:lnR w="9525" cap="flat" cmpd="sng" algn="ctr">
+                      <a:solidFill>
+                        <a:srgbClr val="D3D1C8"/>
+                      </a:solidFill>
+                      <a:prstDash val="solid"/>
+                      <a:round/>
+                      <a:headEnd type="none" w="med" len="med"/>
+                      <a:tailEnd type="none" w="med" len="med"/>
+                    </a:lnR>
+                    <a:lnT w="9525" cap="flat" cmpd="sng" algn="ctr">
+                      <a:solidFill>
+                        <a:srgbClr val="D3D1C8"/>
+                      </a:solidFill>
+                      <a:prstDash val="solid"/>
+                      <a:round/>
+                      <a:headEnd type="none" w="med" len="med"/>
+                      <a:tailEnd type="none" w="med" len="med"/>
+                    </a:lnT>
+                    <a:lnB w="9525" cap="flat" cmpd="sng" algn="ctr">
+                      <a:solidFill>
+                        <a:srgbClr val="D3D1C8"/>
+                      </a:solidFill>
+                      <a:prstDash val="solid"/>
+                      <a:round/>
+                      <a:headEnd type="none" w="med" len="med"/>
+                      <a:tailEnd type="none" w="med" len="med"/>
+                    </a:lnB>
+                    <a:solidFill>
+                      <a:srgbClr val="E6EEF0"/>
+                    </a:solidFill>
+                  </a:tcPr>
+                </a:tc>
+                <a:tc>
+                  <a:txBody>
+                    <a:bodyPr/>
+                    <a:lstStyle/>
+                    <a:p>
+                      <a:pPr algn="ctr" indent="0" marL="0">
+                        <a:buNone/>
+                      </a:pPr>
+                      <a:r>
+                        <a:rPr lang="en-US" sz="1500" b="1" dirty="0">
+                          <a:solidFill>
+                            <a:srgbClr val="0F5C6B"/>
+                          </a:solidFill>
+                        </a:rPr>
+                        <a:t>70 %</a:t>
+                      </a:r>
+                      <a:endParaRPr lang="en-US" sz="1500" dirty="0"/>
+                    </a:p>
+                  </a:txBody>
+                  <a:tcPr marL="91440" marR="91440" marT="45720" marB="45720" anchor="ctr">
+                    <a:lnL w="9525" cap="flat" cmpd="sng" algn="ctr">
+                      <a:solidFill>
+                        <a:srgbClr val="D3D1C8"/>
+                      </a:solidFill>
+                      <a:prstDash val="solid"/>
+                      <a:round/>
+                      <a:headEnd type="none" w="med" len="med"/>
+                      <a:tailEnd type="none" w="med" len="med"/>
+                    </a:lnL>
+                    <a:lnR w="9525" cap="flat" cmpd="sng" algn="ctr">
+                      <a:solidFill>
+                        <a:srgbClr val="D3D1C8"/>
+                      </a:solidFill>
+                      <a:prstDash val="solid"/>
+                      <a:round/>
+                      <a:headEnd type="none" w="med" len="med"/>
+                      <a:tailEnd type="none" w="med" len="med"/>
+                    </a:lnR>
+                    <a:lnT w="9525" cap="flat" cmpd="sng" algn="ctr">
+                      <a:solidFill>
+                        <a:srgbClr val="D3D1C8"/>
+                      </a:solidFill>
+                      <a:prstDash val="solid"/>
+                      <a:round/>
+                      <a:headEnd type="none" w="med" len="med"/>
+                      <a:tailEnd type="none" w="med" len="med"/>
+                    </a:lnT>
+                    <a:lnB w="9525" cap="flat" cmpd="sng" algn="ctr">
+                      <a:solidFill>
+                        <a:srgbClr val="D3D1C8"/>
+                      </a:solidFill>
+                      <a:prstDash val="solid"/>
+                      <a:round/>
+                      <a:headEnd type="none" w="med" len="med"/>
+                      <a:tailEnd type="none" w="med" len="med"/>
+                    </a:lnB>
+                    <a:solidFill>
+                      <a:srgbClr val="E6EEF0"/>
+                    </a:solidFill>
+                  </a:tcPr>
+                </a:tc>
+                <a:tc>
+                  <a:txBody>
+                    <a:bodyPr/>
+                    <a:lstStyle/>
+                    <a:p>
+                      <a:pPr algn="ctr" indent="0" marL="0">
+                        <a:buNone/>
+                      </a:pPr>
+                      <a:r>
+                        <a:rPr lang="en-US" sz="1500" b="1" dirty="0">
+                          <a:solidFill>
+                            <a:srgbClr val="0F5C6B"/>
+                          </a:solidFill>
+                        </a:rPr>
+                        <a:t>50 %</a:t>
+                      </a:r>
+                      <a:endParaRPr lang="en-US" sz="1500" dirty="0"/>
+                    </a:p>
+                  </a:txBody>
+                  <a:tcPr marL="91440" marR="91440" marT="45720" marB="45720" anchor="ctr">
+                    <a:lnL w="9525" cap="flat" cmpd="sng" algn="ctr">
+                      <a:solidFill>
+                        <a:srgbClr val="D3D1C8"/>
+                      </a:solidFill>
+                      <a:prstDash val="solid"/>
+                      <a:round/>
+                      <a:headEnd type="none" w="med" len="med"/>
+                      <a:tailEnd type="none" w="med" len="med"/>
+                    </a:lnL>
+                    <a:lnR w="9525" cap="flat" cmpd="sng" algn="ctr">
+                      <a:solidFill>
+                        <a:srgbClr val="D3D1C8"/>
+                      </a:solidFill>
+                      <a:prstDash val="solid"/>
+                      <a:round/>
+                      <a:headEnd type="none" w="med" len="med"/>
+                      <a:tailEnd type="none" w="med" len="med"/>
+                    </a:lnR>
+                    <a:lnT w="9525" cap="flat" cmpd="sng" algn="ctr">
+                      <a:solidFill>
+                        <a:srgbClr val="D3D1C8"/>
+                      </a:solidFill>
+                      <a:prstDash val="solid"/>
+                      <a:round/>
+                      <a:headEnd type="none" w="med" len="med"/>
+                      <a:tailEnd type="none" w="med" len="med"/>
+                    </a:lnT>
+                    <a:lnB w="9525" cap="flat" cmpd="sng" algn="ctr">
+                      <a:solidFill>
+                        <a:srgbClr val="D3D1C8"/>
+                      </a:solidFill>
+                      <a:prstDash val="solid"/>
+                      <a:round/>
+                      <a:headEnd type="none" w="med" len="med"/>
+                      <a:tailEnd type="none" w="med" len="med"/>
+                    </a:lnB>
+                    <a:solidFill>
+                      <a:srgbClr val="E6EEF0"/>
+                    </a:solidFill>
+                  </a:tcPr>
+                </a:tc>
+                <a:tc>
+                  <a:txBody>
+                    <a:bodyPr/>
+                    <a:lstStyle/>
+                    <a:p>
+                      <a:pPr algn="ctr" indent="0" marL="0">
+                        <a:buNone/>
+                      </a:pPr>
+                      <a:r>
+                        <a:rPr lang="en-US" sz="1500" b="1" dirty="0">
+                          <a:solidFill>
+                            <a:srgbClr val="0F5C6B"/>
+                          </a:solidFill>
+                        </a:rPr>
+                        <a:t>20 %</a:t>
+                      </a:r>
+                      <a:endParaRPr lang="en-US" sz="1500" dirty="0"/>
+                    </a:p>
+                  </a:txBody>
+                  <a:tcPr marL="91440" marR="91440" marT="45720" marB="45720" anchor="ctr">
+                    <a:lnL w="9525" cap="flat" cmpd="sng" algn="ctr">
+                      <a:solidFill>
+                        <a:srgbClr val="D3D1C8"/>
+                      </a:solidFill>
+                      <a:prstDash val="solid"/>
+                      <a:round/>
+                      <a:headEnd type="none" w="med" len="med"/>
+                      <a:tailEnd type="none" w="med" len="med"/>
+                    </a:lnL>
+                    <a:lnR w="9525" cap="flat" cmpd="sng" algn="ctr">
+                      <a:solidFill>
+                        <a:srgbClr val="D3D1C8"/>
+                      </a:solidFill>
+                      <a:prstDash val="solid"/>
+                      <a:round/>
+                      <a:headEnd type="none" w="med" len="med"/>
+                      <a:tailEnd type="none" w="med" len="med"/>
+                    </a:lnR>
+                    <a:lnT w="9525" cap="flat" cmpd="sng" algn="ctr">
+                      <a:solidFill>
+                        <a:srgbClr val="D3D1C8"/>
+                      </a:solidFill>
+                      <a:prstDash val="solid"/>
+                      <a:round/>
+                      <a:headEnd type="none" w="med" len="med"/>
+                      <a:tailEnd type="none" w="med" len="med"/>
+                    </a:lnT>
+                    <a:lnB w="9525" cap="flat" cmpd="sng" algn="ctr">
+                      <a:solidFill>
+                        <a:srgbClr val="D3D1C8"/>
+                      </a:solidFill>
+                      <a:prstDash val="solid"/>
+                      <a:round/>
+                      <a:headEnd type="none" w="med" len="med"/>
+                      <a:tailEnd type="none" w="med" len="med"/>
+                    </a:lnB>
+                    <a:solidFill>
+                      <a:srgbClr val="E6EEF0"/>
+                    </a:solidFill>
+                  </a:tcPr>
+                </a:tc>
+                <a:tc>
+                  <a:txBody>
+                    <a:bodyPr/>
+                    <a:lstStyle/>
+                    <a:p>
+                      <a:pPr algn="ctr" indent="0" marL="0">
+                        <a:buNone/>
+                      </a:pPr>
+                      <a:r>
+                        <a:rPr lang="en-US" sz="1500" b="1" dirty="0">
+                          <a:solidFill>
+                            <a:srgbClr val="0F5C6B"/>
+                          </a:solidFill>
+                        </a:rPr>
+                        <a:t>40 %</a:t>
+                      </a:r>
+                      <a:endParaRPr lang="en-US" sz="1500" dirty="0"/>
+                    </a:p>
+                  </a:txBody>
+                  <a:tcPr marL="91440" marR="91440" marT="45720" marB="45720" anchor="ctr">
+                    <a:lnL w="9525" cap="flat" cmpd="sng" algn="ctr">
+                      <a:solidFill>
+                        <a:srgbClr val="D3D1C8"/>
+                      </a:solidFill>
+                      <a:prstDash val="solid"/>
+                      <a:round/>
+                      <a:headEnd type="none" w="med" len="med"/>
+                      <a:tailEnd type="none" w="med" len="med"/>
+                    </a:lnL>
+                    <a:lnR w="9525" cap="flat" cmpd="sng" algn="ctr">
+                      <a:solidFill>
+                        <a:srgbClr val="D3D1C8"/>
+                      </a:solidFill>
+                      <a:prstDash val="solid"/>
+                      <a:round/>
+                      <a:headEnd type="none" w="med" len="med"/>
+                      <a:tailEnd type="none" w="med" len="med"/>
+                    </a:lnR>
+                    <a:lnT w="9525" cap="flat" cmpd="sng" algn="ctr">
+                      <a:solidFill>
+                        <a:srgbClr val="D3D1C8"/>
+                      </a:solidFill>
+                      <a:prstDash val="solid"/>
+                      <a:round/>
+                      <a:headEnd type="none" w="med" len="med"/>
+                      <a:tailEnd type="none" w="med" len="med"/>
+                    </a:lnT>
+                    <a:lnB w="9525" cap="flat" cmpd="sng" algn="ctr">
+                      <a:solidFill>
+                        <a:srgbClr val="D3D1C8"/>
+                      </a:solidFill>
+                      <a:prstDash val="solid"/>
+                      <a:round/>
+                      <a:headEnd type="none" w="med" len="med"/>
+                      <a:tailEnd type="none" w="med" len="med"/>
+                    </a:lnB>
+                    <a:solidFill>
+                      <a:srgbClr val="E6EEF0"/>
                     </a:solidFill>
                   </a:tcPr>
                 </a:tc>
@@ -17035,18 +16556,54 @@
       </p:graphicFrame>
       <p:sp>
         <p:nvSpPr>
-          <p:cNvPr id="15" name="Formel"/>
+          <p:cNvPr id="15" name="Text 11"/>
+          <p:cNvSpPr txBox="1"/>
+          <p:nvPr/>
+        </p:nvSpPr>
+        <p:spPr>
+          <a:xfrm>
+            <a:off x="640080" y="5623560"/>
+            <a:ext cx="7680960" cy="320040"/>
+          </a:xfrm>
+          <a:prstGeom prst="rect">
+            <a:avLst/>
+          </a:prstGeom>
+          <a:noFill/>
+          <a:ln/>
+        </p:spPr>
+        <p:txBody>
+          <a:bodyPr wrap="square" lIns="0" tIns="0" rIns="0" bIns="0" rtlCol="0" anchor="ctr"/>
+          <a:lstStyle/>
+          <a:p>
+            <a:pPr indent="0" marL="0">
+              <a:buNone/>
+            </a:pPr>
+            <a:r>
+              <a:rPr lang="en-US" sz="1200" i="1" dirty="0">
+                <a:solidFill>
+                  <a:schemeClr val="accent4"/>
+                </a:solidFill>
+              </a:rPr>
+              <a:t>Vollständige Kostentabelle: Auswertungsbogen M15</a:t>
+            </a:r>
+            <a:endParaRPr lang="en-US" sz="1200" dirty="0"/>
+          </a:p>
+        </p:txBody>
+      </p:sp>
+      <p:sp>
+        <p:nvSpPr>
+          <p:cNvPr id="16" name="Formeln"/>
           <p:cNvSpPr/>
           <p:nvPr/>
         </p:nvSpPr>
         <p:spPr>
           <a:xfrm>
-            <a:off x="8503920" y="1417320"/>
-            <a:ext cx="3017520" cy="4709160"/>
+            <a:off x="8549640" y="1417320"/>
+            <a:ext cx="2971800" cy="4709160"/>
           </a:xfrm>
           <a:prstGeom prst="roundRect">
             <a:avLst>
-              <a:gd name="adj" fmla="val 3636"/>
+              <a:gd name="adj" fmla="val 3692"/>
             </a:avLst>
           </a:prstGeom>
           <a:solidFill>
@@ -17057,14 +16614,14 @@
       </p:sp>
       <p:sp>
         <p:nvSpPr>
-          <p:cNvPr id="16" name="Icon-Kreis FaBalanceScale"/>
+          <p:cNvPr id="17" name="Icon-Kreis FaBalanceScale"/>
           <p:cNvSpPr/>
           <p:nvPr/>
         </p:nvSpPr>
         <p:spPr>
           <a:xfrm>
-            <a:off x="8732520" y="1645920"/>
-            <a:ext cx="640080" cy="640080"/>
+            <a:off x="8778240" y="1600200"/>
+            <a:ext cx="594360" cy="594360"/>
           </a:xfrm>
           <a:prstGeom prst="ellipse">
             <a:avLst/>
@@ -17077,7 +16634,7 @@
       </p:sp>
       <p:pic>
         <p:nvPicPr>
-          <p:cNvPr id="17" name="Icon FaBalanceScale" descr="Symbol BalanceScale">    </p:cNvPr>
+          <p:cNvPr id="18" name="Icon FaBalanceScale" descr="Symbol BalanceScale">    </p:cNvPr>
           <p:cNvPicPr>
             <a:picLocks noChangeAspect="1"/>
           </p:cNvPicPr>
@@ -17091,50 +16648,14 @@
         </p:blipFill>
         <p:spPr>
           <a:xfrm>
-            <a:off x="8905342" y="1818742"/>
-            <a:ext cx="294437" cy="294437"/>
+            <a:off x="8938717" y="1760677"/>
+            <a:ext cx="273406" cy="273406"/>
           </a:xfrm>
           <a:prstGeom prst="rect">
             <a:avLst/>
           </a:prstGeom>
         </p:spPr>
       </p:pic>
-      <p:sp>
-        <p:nvSpPr>
-          <p:cNvPr id="18" name="Text 13"/>
-          <p:cNvSpPr txBox="1"/>
-          <p:nvPr/>
-        </p:nvSpPr>
-        <p:spPr>
-          <a:xfrm>
-            <a:off x="9509760" y="1645920"/>
-            <a:ext cx="1920240" cy="640080"/>
-          </a:xfrm>
-          <a:prstGeom prst="rect">
-            <a:avLst/>
-          </a:prstGeom>
-          <a:noFill/>
-          <a:ln/>
-        </p:spPr>
-        <p:txBody>
-          <a:bodyPr wrap="square" lIns="0" tIns="0" rIns="0" bIns="0" rtlCol="0" anchor="ctr"/>
-          <a:lstStyle/>
-          <a:p>
-            <a:pPr indent="0" marL="0">
-              <a:buNone/>
-            </a:pPr>
-            <a:r>
-              <a:rPr lang="en-US" sz="1800" b="1" dirty="0">
-                <a:solidFill>
-                  <a:schemeClr val="tx2"/>
-                </a:solidFill>
-              </a:rPr>
-              <a:t>So rechnen wir</a:t>
-            </a:r>
-            <a:endParaRPr lang="en-US" sz="1800" dirty="0"/>
-          </a:p>
-        </p:txBody>
-      </p:sp>
       <p:sp>
         <p:nvSpPr>
           <p:cNvPr id="19" name="Text 14"/>
@@ -17143,8 +16664,8 @@
         </p:nvSpPr>
         <p:spPr>
           <a:xfrm>
-            <a:off x="8732520" y="2423160"/>
-            <a:ext cx="2606040" cy="3611880"/>
+            <a:off x="9509760" y="1600200"/>
+            <a:ext cx="1920240" cy="594360"/>
           </a:xfrm>
           <a:prstGeom prst="rect">
             <a:avLst/>
@@ -17153,6 +16674,42 @@
           <a:ln/>
         </p:spPr>
         <p:txBody>
+          <a:bodyPr wrap="square" lIns="0" tIns="0" rIns="0" bIns="0" rtlCol="0" anchor="ctr"/>
+          <a:lstStyle/>
+          <a:p>
+            <a:pPr indent="0" marL="0">
+              <a:buNone/>
+            </a:pPr>
+            <a:r>
+              <a:rPr lang="en-US" sz="1800" b="1" dirty="0">
+                <a:solidFill>
+                  <a:schemeClr val="tx2"/>
+                </a:solidFill>
+              </a:rPr>
+              <a:t>So rechnen wir</a:t>
+            </a:r>
+            <a:endParaRPr lang="en-US" sz="1800" dirty="0"/>
+          </a:p>
+        </p:txBody>
+      </p:sp>
+      <p:sp>
+        <p:nvSpPr>
+          <p:cNvPr id="20" name="Text 15"/>
+          <p:cNvSpPr txBox="1"/>
+          <p:nvPr/>
+        </p:nvSpPr>
+        <p:spPr>
+          <a:xfrm>
+            <a:off x="8778240" y="2331720"/>
+            <a:ext cx="2560320" cy="3657600"/>
+          </a:xfrm>
+          <a:prstGeom prst="rect">
+            <a:avLst/>
+          </a:prstGeom>
+          <a:noFill/>
+          <a:ln/>
+        </p:spPr>
+        <p:txBody>
           <a:bodyPr wrap="square" lIns="0" tIns="0" rIns="0" bIns="0" rtlCol="0" anchor="t"/>
           <a:lstStyle/>
           <a:p>
@@ -17160,118 +16717,115 @@
               <a:buNone/>
             </a:pPr>
             <a:r>
-              <a:rPr lang="en-US" sz="1500" b="1" dirty="0">
+              <a:rPr lang="en-US" sz="1400" b="1" dirty="0">
                 <a:solidFill>
                   <a:schemeClr val="tx1"/>
                 </a:solidFill>
               </a:rPr>
-              <a:t>Wirtschaftlichkeit =</a:t>
-            </a:r>
-            <a:endParaRPr lang="en-US" sz="1500" dirty="0"/>
+              <a:t>Wirtschaftlichkeit</a:t>
+            </a:r>
+            <a:endParaRPr lang="en-US" sz="1400" dirty="0"/>
+          </a:p>
+          <a:p>
+            <a:pPr indent="0" marL="0">
+              <a:buNone/>
+            </a:pPr>
+            <a:r>
+              <a:rPr lang="en-US" sz="1400" dirty="0">
+                <a:solidFill>
+                  <a:schemeClr val="tx1"/>
+                </a:solidFill>
+              </a:rPr>
+              <a:t>= Umsatzerlöse ÷ Kosten</a:t>
+            </a:r>
+            <a:endParaRPr lang="en-US" sz="1400" dirty="0"/>
           </a:p>
           <a:p>
             <a:pPr indent="0" marL="0">
               <a:spcAft>
-                <a:spcPts val="1400"/>
+                <a:spcPts val="1000"/>
               </a:spcAft>
               <a:buNone/>
             </a:pPr>
             <a:r>
-              <a:rPr lang="en-US" sz="1500" dirty="0">
+              <a:rPr lang="en-US" sz="1400" dirty="0">
+                <a:solidFill>
+                  <a:schemeClr val="accent4"/>
+                </a:solidFill>
+              </a:rPr>
+              <a:t>R3: 79.940 ÷ 54.000 = 1,48</a:t>
+            </a:r>
+            <a:endParaRPr lang="en-US" sz="1400" dirty="0"/>
+          </a:p>
+          <a:p>
+            <a:pPr indent="0" marL="0">
+              <a:buNone/>
+            </a:pPr>
+            <a:r>
+              <a:rPr lang="en-US" sz="1400" b="1" dirty="0">
                 <a:solidFill>
                   <a:schemeClr val="tx1"/>
                 </a:solidFill>
               </a:rPr>
-              <a:t>Umsatzerlöse ÷ Kosten</a:t>
-            </a:r>
-            <a:endParaRPr lang="en-US" sz="1500" dirty="0"/>
+              <a:t>Absatzquote</a:t>
+            </a:r>
+            <a:endParaRPr lang="en-US" sz="1400" dirty="0"/>
           </a:p>
           <a:p>
             <a:pPr indent="0" marL="0">
               <a:buNone/>
             </a:pPr>
             <a:r>
-              <a:rPr lang="en-US" sz="1400" b="1" dirty="0">
+              <a:rPr lang="en-US" sz="1400" dirty="0">
                 <a:solidFill>
                   <a:schemeClr val="tx1"/>
                 </a:solidFill>
               </a:rPr>
-              <a:t>Beispiel R3:</a:t>
-            </a:r>
-            <a:endParaRPr lang="en-US" sz="1500" dirty="0"/>
+              <a:t>= am Markt verkauft ÷ produziert</a:t>
+            </a:r>
+            <a:endParaRPr lang="en-US" sz="1400" dirty="0"/>
           </a:p>
           <a:p>
             <a:pPr indent="0" marL="0">
               <a:spcAft>
-                <a:spcPts val="1400"/>
+                <a:spcPts val="1000"/>
               </a:spcAft>
               <a:buNone/>
             </a:pPr>
             <a:r>
               <a:rPr lang="en-US" sz="1400" dirty="0">
                 <a:solidFill>
+                  <a:schemeClr val="accent4"/>
+                </a:solidFill>
+              </a:rPr>
+              <a:t>R3: 12,6 ÷ 18 = 70 %</a:t>
+            </a:r>
+            <a:endParaRPr lang="en-US" sz="1400" dirty="0"/>
+          </a:p>
+          <a:p>
+            <a:pPr indent="0" marL="0">
+              <a:buNone/>
+            </a:pPr>
+            <a:r>
+              <a:rPr lang="en-US" sz="1400" b="1" dirty="0">
+                <a:solidFill>
                   <a:schemeClr val="tx1"/>
                 </a:solidFill>
               </a:rPr>
-              <a:t>79.940 € ÷ 54.000 € = 1,48</a:t>
-            </a:r>
-            <a:endParaRPr lang="en-US" sz="1500" dirty="0"/>
-          </a:p>
-          <a:p>
+              <a:t>Aussagekraft: </a:t>
+            </a:r>
             <a:pPr indent="0" marL="0">
               <a:buNone/>
             </a:pPr>
             <a:r>
-              <a:rPr lang="en-US" sz="1400" b="1" dirty="0">
-                <a:solidFill>
-                  <a:srgbClr val="3D6610"/>
-                </a:solidFill>
-              </a:rPr>
-              <a:t>über 1 = Gewinn</a:t>
-            </a:r>
-            <a:endParaRPr lang="en-US" sz="1500" dirty="0"/>
-          </a:p>
-          <a:p>
-            <a:pPr indent="0" marL="0">
-              <a:spcAft>
-                <a:spcPts val="1400"/>
-              </a:spcAft>
-              <a:buNone/>
-            </a:pPr>
-            <a:r>
-              <a:rPr lang="en-US" sz="1400" b="1" dirty="0">
-                <a:solidFill>
-                  <a:srgbClr val="8A4A12"/>
-                </a:solidFill>
-              </a:rPr>
-              <a:t>unter 1 = Verlust</a:t>
-            </a:r>
-            <a:endParaRPr lang="en-US" sz="1500" dirty="0"/>
-          </a:p>
-          <a:p>
-            <a:pPr indent="0" marL="0">
-              <a:buNone/>
-            </a:pPr>
-            <a:r>
-              <a:rPr lang="en-US" sz="1300" b="1" dirty="0">
+              <a:rPr lang="en-US" sz="1400" dirty="0">
                 <a:solidFill>
                   <a:schemeClr val="tx1"/>
                 </a:solidFill>
               </a:rPr>
-              <a:t>Aussagekraft: </a:t>
-            </a:r>
-            <a:pPr indent="0" marL="0">
-              <a:buNone/>
-            </a:pPr>
-            <a:r>
-              <a:rPr lang="en-US" sz="1300" dirty="0">
-                <a:solidFill>
-                  <a:schemeClr val="tx1"/>
-                </a:solidFill>
-              </a:rPr>
-              <a:t>zeigt, ob der Umsatz einer Runde ihre Kosten deckt. R1 und R2 tragen die Maschinenkäufe, die später mitgenutzt wurden.</a:t>
-            </a:r>
-            <a:endParaRPr lang="en-US" sz="1500" dirty="0"/>
+              <a:t>über 1 = Gewinn. Die Absatzquote zeigt, ob der Preis zum Markt passte.</a:t>
+            </a:r>
+            <a:endParaRPr lang="en-US" sz="1400" dirty="0"/>
           </a:p>
         </p:txBody>
       </p:sp>
@@ -17380,7 +16934,7 @@
                 <a:ea typeface="Cambria" pitchFamily="34" charset="-122"/>
                 <a:cs typeface="Cambria" pitchFamily="34" charset="-120"/>
               </a:rPr>
-              <a:t>Wirtschaftlichkeit und Kassenbestand</a:t>
+              <a:t>Wirtschaftlichkeit und Schlussbestand</a:t>
             </a:r>
             <a:endParaRPr lang="en-US" sz="3600" dirty="0"/>
           </a:p>
@@ -17761,7 +17315,7 @@
                   <a:schemeClr val="tx1"/>
                 </a:solidFill>
               </a:rPr>
-              <a:t>Nur zwei von sechs Runden waren wirtschaftlich – vom Startkapital bleiben 53.770 €.</a:t>
+              <a:t>Nur 2 von 6 Runden über 1, gesamt 0,84 – Schlussbestand 53.770 € (mit Maschinen: nächste Folie).</a:t>
             </a:r>
             <a:endParaRPr lang="en-US" sz="1600" dirty="0"/>
           </a:p>

--- a/endpraesentation/Elbharz_Endpraesentation.pptx
+++ b/endpraesentation/Elbharz_Endpraesentation.pptx
@@ -119,43 +119,43 @@
   <p:extLst>
     <p:ext uri="{521415D9-36F7-43E2-AB2F-B90AF26B5E84}">
       <p14:sectionLst xmlns:p14="http://schemas.microsoft.com/office/powerpoint/2010/main">
-        <p14:section name="Einleitung" id="{c461b272-78a2-9290-9328-c097d0f9949d}">
+        <p14:section name="Einleitung" id="{68d7ce1f-c253-7e73-4d6f-545ebcce0cda}">
           <p14:sldIdLst>
             <p14:sldId id="256"/>
             <p14:sldId id="257"/>
             <p14:sldId id="258"/>
           </p14:sldIdLst>
         </p14:section>
-        <p14:section name="Verlauf" id="{dfe8e0c7-2735-f458-fc63-4f8506f222ce}">
+        <p14:section name="Verlauf" id="{0c98e0e7-7ef2-7dc9-fe8b-e759d7ff7e96}">
           <p14:sldIdLst>
             <p14:sldId id="259"/>
             <p14:sldId id="260"/>
             <p14:sldId id="261"/>
           </p14:sldIdLst>
         </p14:section>
-        <p14:section name="Auswertung" id="{2d3e4570-774d-f8a8-f573-0fde43656102}">
+        <p14:section name="Auswertung" id="{033d5c48-3250-f338-49de-1da2e7c2a8da}">
           <p14:sldIdLst>
             <p14:sldId id="262"/>
             <p14:sldId id="263"/>
             <p14:sldId id="264"/>
           </p14:sldIdLst>
         </p14:section>
-        <p14:section name="Reflexion" id="{8eabee37-c5f7-4771-c4a7-ca540e84a84e}">
+        <p14:section name="Reflexion" id="{3e99ae92-bc00-1b29-76ee-39302885212e}">
           <p14:sldIdLst>
             <p14:sldId id="265"/>
           </p14:sldIdLst>
         </p14:section>
-        <p14:section name="Gründung" id="{3cee98de-1084-9e2b-9777-869ce5d35641}">
+        <p14:section name="Gründung" id="{5fd58470-59da-acbe-6d3b-e48f86911727}">
           <p14:sldIdLst>
             <p14:sldId id="266"/>
           </p14:sldIdLst>
         </p14:section>
-        <p14:section name="Abschluss" id="{92573ac5-96cb-f0f9-4639-f41a9f8d6c22}">
+        <p14:section name="Abschluss" id="{728d7031-0990-ab39-0c44-29f954076eab}">
           <p14:sldIdLst>
             <p14:sldId id="267"/>
           </p14:sldIdLst>
         </p14:section>
-        <p14:section name="Quellen" id="{750a32a9-e790-f8b6-0146-fc040c42f8d5}">
+        <p14:section name="Quellen" id="{c574f6e5-6f05-fa9b-33a2-193ab2486384}">
           <p14:sldIdLst>
             <p14:sldId id="268"/>
           </p14:sldIdLst>
